--- a/docs/qunxiang.pptx
+++ b/docs/qunxiang.pptx
@@ -10,6 +10,7 @@
     <p:sldId id="258" r:id="rId9"/>
     <p:sldId id="259" r:id="rId10"/>
     <p:sldId id="260" r:id="rId11"/>
+    <p:sldId id="262" r:id="rId13"/>
     <p:sldId id="261" r:id="rId12"/>
   </p:sldIdLst>
   <p:sldSz cx="12191695" cy="6858000" type="screen4x3"/>
@@ -6347,6 +6348,710 @@
       </p:sp>
       <p:sp>
         <p:nvSpPr>
+          <p:cNvPr id="3" name="TextBox 2"/>
+          <p:cNvSpPr txBox="1"/>
+          <p:nvPr/>
+        </p:nvSpPr>
+        <p:spPr>
+          <a:xfrm>
+            <a:off x="731520" y="457200"/>
+            <a:ext cx="1828800" cy="365760"/>
+          </a:xfrm>
+          <a:prstGeom prst="rect">
+            <a:avLst/>
+          </a:prstGeom>
+          <a:noFill/>
+        </p:spPr>
+        <p:txBody>
+          <a:bodyPr wrap="square">
+            <a:spAutoFit/>
+          </a:bodyPr>
+          <a:lstStyle/>
+          <a:p>
+            <a:pPr algn="l"/>
+            <a:r>
+              <a:rPr sz="1400" b="0">
+                <a:solidFill>
+                  <a:srgbClr val="93A3B8"/>
+                </a:solidFill>
+                <a:latin typeface="Microsoft YaHei"/>
+              </a:rPr>
+              <a:t>06 / 07</a:t>
+            </a:r>
+          </a:p>
+        </p:txBody>
+      </p:sp>
+      <p:sp>
+        <p:nvSpPr>
+          <p:cNvPr id="4" name="Rounded Rectangle 3"/>
+          <p:cNvSpPr/>
+          <p:nvPr/>
+        </p:nvSpPr>
+        <p:spPr>
+          <a:xfrm>
+            <a:off x="731520" y="914400"/>
+            <a:ext cx="1645920" cy="411480"/>
+          </a:xfrm>
+          <a:prstGeom prst="roundRect">
+            <a:avLst/>
+          </a:prstGeom>
+          <a:solidFill>
+            <a:srgbClr val="EC4899"/>
+          </a:solidFill>
+          <a:ln>
+            <a:noFill/>
+          </a:ln>
+        </p:spPr>
+        <p:style>
+          <a:lnRef idx="1">
+            <a:schemeClr val="accent1"/>
+          </a:lnRef>
+          <a:fillRef idx="3">
+            <a:schemeClr val="accent1"/>
+          </a:fillRef>
+          <a:effectRef idx="2">
+            <a:schemeClr val="accent1"/>
+          </a:effectRef>
+          <a:fontRef idx="minor">
+            <a:schemeClr val="lt1"/>
+          </a:fontRef>
+        </p:style>
+        <p:txBody>
+          <a:bodyPr rtlCol="0" anchor="ctr"/>
+          <a:lstStyle/>
+          <a:p>
+            <a:pPr algn="ctr"/>
+          </a:p>
+        </p:txBody>
+      </p:sp>
+      <p:sp>
+        <p:nvSpPr>
+          <p:cNvPr id="5" name="TextBox 4"/>
+          <p:cNvSpPr txBox="1"/>
+          <p:nvPr/>
+        </p:nvSpPr>
+        <p:spPr>
+          <a:xfrm>
+            <a:off x="731520" y="987552"/>
+            <a:ext cx="1645920" cy="411480"/>
+          </a:xfrm>
+          <a:prstGeom prst="rect">
+            <a:avLst/>
+          </a:prstGeom>
+          <a:noFill/>
+        </p:spPr>
+        <p:txBody>
+          <a:bodyPr wrap="square">
+            <a:spAutoFit/>
+          </a:bodyPr>
+          <a:lstStyle/>
+          <a:p>
+            <a:pPr algn="ctr"/>
+            <a:r>
+              <a:rPr sz="1600" b="1">
+                <a:solidFill>
+                  <a:srgbClr val="FFFFFF"/>
+                </a:solidFill>
+                <a:latin typeface="Microsoft YaHei"/>
+              </a:rPr>
+              <a:t>人机模式</a:t>
+            </a:r>
+          </a:p>
+        </p:txBody>
+      </p:sp>
+      <p:sp>
+        <p:nvSpPr>
+          <p:cNvPr id="6" name="TextBox 5"/>
+          <p:cNvSpPr txBox="1"/>
+          <p:nvPr/>
+        </p:nvSpPr>
+        <p:spPr>
+          <a:xfrm>
+            <a:off x="731520" y="1463040"/>
+            <a:ext cx="10972800" cy="731520"/>
+          </a:xfrm>
+          <a:prstGeom prst="rect">
+            <a:avLst/>
+          </a:prstGeom>
+          <a:noFill/>
+        </p:spPr>
+        <p:txBody>
+          <a:bodyPr wrap="square">
+            <a:spAutoFit/>
+          </a:bodyPr>
+          <a:lstStyle/>
+          <a:p>
+            <a:pPr algn="l"/>
+            <a:r>
+              <a:rPr sz="4000" b="1">
+                <a:solidFill>
+                  <a:srgbClr val="1E3A5F"/>
+                </a:solidFill>
+                <a:latin typeface="Microsoft YaHei"/>
+              </a:rPr>
+              <a:t>双人对白，碰撞真实火花</a:t>
+            </a:r>
+          </a:p>
+        </p:txBody>
+      </p:sp>
+      <p:sp>
+        <p:nvSpPr>
+          <p:cNvPr id="7" name="TextBox 6"/>
+          <p:cNvSpPr txBox="1"/>
+          <p:nvPr/>
+        </p:nvSpPr>
+        <p:spPr>
+          <a:xfrm>
+            <a:off x="731520" y="2194560"/>
+            <a:ext cx="10972800" cy="457200"/>
+          </a:xfrm>
+          <a:prstGeom prst="rect">
+            <a:avLst/>
+          </a:prstGeom>
+          <a:noFill/>
+        </p:spPr>
+        <p:txBody>
+          <a:bodyPr wrap="square">
+            <a:spAutoFit/>
+          </a:bodyPr>
+          <a:lstStyle/>
+          <a:p>
+            <a:pPr algn="l"/>
+            <a:r>
+              <a:rPr sz="1800" b="0">
+                <a:solidFill>
+                  <a:srgbClr val="5A7A9A"/>
+                </a:solidFill>
+                <a:latin typeface="Microsoft YaHei"/>
+              </a:rPr>
+              <a:t>与 AI 或真人搭档，在自由脑洞中即兴创作，真实对话中诞生灵感</a:t>
+            </a:r>
+          </a:p>
+        </p:txBody>
+      </p:sp>
+      <p:sp>
+        <p:nvSpPr>
+          <p:cNvPr id="8" name="Rounded Rectangle 7"/>
+          <p:cNvSpPr/>
+          <p:nvPr/>
+        </p:nvSpPr>
+        <p:spPr>
+          <a:xfrm>
+            <a:off x="731520" y="2926080"/>
+            <a:ext cx="5303520" cy="1645920"/>
+          </a:xfrm>
+          <a:prstGeom prst="roundRect">
+            <a:avLst/>
+          </a:prstGeom>
+          <a:solidFill>
+            <a:srgbClr val="FFFFFF"/>
+          </a:solidFill>
+          <a:ln>
+            <a:solidFill>
+              <a:srgbClr val="E2E8F0"/>
+            </a:solidFill>
+          </a:ln>
+        </p:spPr>
+        <p:style>
+          <a:lnRef idx="1">
+            <a:schemeClr val="accent1"/>
+          </a:lnRef>
+          <a:fillRef idx="3">
+            <a:schemeClr val="accent1"/>
+          </a:fillRef>
+          <a:effectRef idx="2">
+            <a:schemeClr val="accent1"/>
+          </a:effectRef>
+          <a:fontRef idx="minor">
+            <a:schemeClr val="lt1"/>
+          </a:fontRef>
+        </p:style>
+        <p:txBody>
+          <a:bodyPr rtlCol="0" anchor="ctr"/>
+          <a:lstStyle/>
+          <a:p>
+            <a:pPr algn="ctr"/>
+          </a:p>
+        </p:txBody>
+      </p:sp>
+      <p:sp>
+        <p:nvSpPr>
+          <p:cNvPr id="9" name="TextBox 8"/>
+          <p:cNvSpPr txBox="1"/>
+          <p:nvPr/>
+        </p:nvSpPr>
+        <p:spPr>
+          <a:xfrm>
+            <a:off x="1005840" y="3108960"/>
+            <a:ext cx="4754880" cy="365760"/>
+          </a:xfrm>
+          <a:prstGeom prst="rect">
+            <a:avLst/>
+          </a:prstGeom>
+          <a:noFill/>
+        </p:spPr>
+        <p:txBody>
+          <a:bodyPr wrap="square">
+            <a:spAutoFit/>
+          </a:bodyPr>
+          <a:lstStyle/>
+          <a:p>
+            <a:pPr algn="l"/>
+            <a:r>
+              <a:rPr sz="1800" b="1">
+                <a:solidFill>
+                  <a:srgbClr val="BE185D"/>
+                </a:solidFill>
+                <a:latin typeface="Microsoft YaHei"/>
+              </a:rPr>
+              <a:t>脑洞大厅</a:t>
+            </a:r>
+          </a:p>
+        </p:txBody>
+      </p:sp>
+      <p:sp>
+        <p:nvSpPr>
+          <p:cNvPr id="10" name="TextBox 9"/>
+          <p:cNvSpPr txBox="1"/>
+          <p:nvPr/>
+        </p:nvSpPr>
+        <p:spPr>
+          <a:xfrm>
+            <a:off x="1005840" y="3520440"/>
+            <a:ext cx="4754880" cy="914400"/>
+          </a:xfrm>
+          <a:prstGeom prst="rect">
+            <a:avLst/>
+          </a:prstGeom>
+          <a:noFill/>
+        </p:spPr>
+        <p:txBody>
+          <a:bodyPr wrap="square">
+            <a:spAutoFit/>
+          </a:bodyPr>
+          <a:lstStyle/>
+          <a:p>
+            <a:pPr algn="l"/>
+            <a:r>
+              <a:rPr sz="1400" b="0">
+                <a:solidFill>
+                  <a:srgbClr val="5A7A9A"/>
+                </a:solidFill>
+                <a:latin typeface="Microsoft YaHei"/>
+              </a:rPr>
+              <a:t>热度加权随机匹配脑洞场景，每次进入都是新体验，告别创作枯竭</a:t>
+            </a:r>
+          </a:p>
+        </p:txBody>
+      </p:sp>
+      <p:sp>
+        <p:nvSpPr>
+          <p:cNvPr id="11" name="Rounded Rectangle 10"/>
+          <p:cNvSpPr/>
+          <p:nvPr/>
+        </p:nvSpPr>
+        <p:spPr>
+          <a:xfrm>
+            <a:off x="6492240" y="2926080"/>
+            <a:ext cx="5303520" cy="1645920"/>
+          </a:xfrm>
+          <a:prstGeom prst="roundRect">
+            <a:avLst/>
+          </a:prstGeom>
+          <a:solidFill>
+            <a:srgbClr val="FFFFFF"/>
+          </a:solidFill>
+          <a:ln>
+            <a:solidFill>
+              <a:srgbClr val="E2E8F0"/>
+            </a:solidFill>
+          </a:ln>
+        </p:spPr>
+        <p:style>
+          <a:lnRef idx="1">
+            <a:schemeClr val="accent1"/>
+          </a:lnRef>
+          <a:fillRef idx="3">
+            <a:schemeClr val="accent1"/>
+          </a:fillRef>
+          <a:effectRef idx="2">
+            <a:schemeClr val="accent1"/>
+          </a:effectRef>
+          <a:fontRef idx="minor">
+            <a:schemeClr val="lt1"/>
+          </a:fontRef>
+        </p:style>
+        <p:txBody>
+          <a:bodyPr rtlCol="0" anchor="ctr"/>
+          <a:lstStyle/>
+          <a:p>
+            <a:pPr algn="ctr"/>
+          </a:p>
+        </p:txBody>
+      </p:sp>
+      <p:sp>
+        <p:nvSpPr>
+          <p:cNvPr id="12" name="TextBox 11"/>
+          <p:cNvSpPr txBox="1"/>
+          <p:nvPr/>
+        </p:nvSpPr>
+        <p:spPr>
+          <a:xfrm>
+            <a:off x="6766560" y="3108960"/>
+            <a:ext cx="4754880" cy="365760"/>
+          </a:xfrm>
+          <a:prstGeom prst="rect">
+            <a:avLst/>
+          </a:prstGeom>
+          <a:noFill/>
+        </p:spPr>
+        <p:txBody>
+          <a:bodyPr wrap="square">
+            <a:spAutoFit/>
+          </a:bodyPr>
+          <a:lstStyle/>
+          <a:p>
+            <a:pPr algn="l"/>
+            <a:r>
+              <a:rPr sz="1800" b="1">
+                <a:solidFill>
+                  <a:srgbClr val="BE185D"/>
+                </a:solidFill>
+                <a:latin typeface="Microsoft YaHei"/>
+              </a:rPr>
+              <a:t>AI 搭档</a:t>
+            </a:r>
+          </a:p>
+        </p:txBody>
+      </p:sp>
+      <p:sp>
+        <p:nvSpPr>
+          <p:cNvPr id="13" name="TextBox 12"/>
+          <p:cNvSpPr txBox="1"/>
+          <p:nvPr/>
+        </p:nvSpPr>
+        <p:spPr>
+          <a:xfrm>
+            <a:off x="6766560" y="3520440"/>
+            <a:ext cx="4754880" cy="914400"/>
+          </a:xfrm>
+          <a:prstGeom prst="rect">
+            <a:avLst/>
+          </a:prstGeom>
+          <a:noFill/>
+        </p:spPr>
+        <p:txBody>
+          <a:bodyPr wrap="square">
+            <a:spAutoFit/>
+          </a:bodyPr>
+          <a:lstStyle/>
+          <a:p>
+            <a:pPr algn="l"/>
+            <a:r>
+              <a:rPr sz="1400" b="0">
+                <a:solidFill>
+                  <a:srgbClr val="5A7A9A"/>
+                </a:solidFill>
+                <a:latin typeface="Microsoft YaHei"/>
+              </a:rPr>
+              <a:t>刘看山随时待命，陪你聊任何脑洞，从生活琐事到奇幻冒险都能接梗</a:t>
+            </a:r>
+          </a:p>
+        </p:txBody>
+      </p:sp>
+      <p:sp>
+        <p:nvSpPr>
+          <p:cNvPr id="14" name="Rounded Rectangle 13"/>
+          <p:cNvSpPr/>
+          <p:nvPr/>
+        </p:nvSpPr>
+        <p:spPr>
+          <a:xfrm>
+            <a:off x="731520" y="4937760"/>
+            <a:ext cx="5303520" cy="1645920"/>
+          </a:xfrm>
+          <a:prstGeom prst="roundRect">
+            <a:avLst/>
+          </a:prstGeom>
+          <a:solidFill>
+            <a:srgbClr val="FFFFFF"/>
+          </a:solidFill>
+          <a:ln>
+            <a:solidFill>
+              <a:srgbClr val="E2E8F0"/>
+            </a:solidFill>
+          </a:ln>
+        </p:spPr>
+        <p:style>
+          <a:lnRef idx="1">
+            <a:schemeClr val="accent1"/>
+          </a:lnRef>
+          <a:fillRef idx="3">
+            <a:schemeClr val="accent1"/>
+          </a:fillRef>
+          <a:effectRef idx="2">
+            <a:schemeClr val="accent1"/>
+          </a:effectRef>
+          <a:fontRef idx="minor">
+            <a:schemeClr val="lt1"/>
+          </a:fontRef>
+        </p:style>
+        <p:txBody>
+          <a:bodyPr rtlCol="0" anchor="ctr"/>
+          <a:lstStyle/>
+          <a:p>
+            <a:pPr algn="ctr"/>
+          </a:p>
+        </p:txBody>
+      </p:sp>
+      <p:sp>
+        <p:nvSpPr>
+          <p:cNvPr id="15" name="TextBox 14"/>
+          <p:cNvSpPr txBox="1"/>
+          <p:nvPr/>
+        </p:nvSpPr>
+        <p:spPr>
+          <a:xfrm>
+            <a:off x="1005840" y="5120640"/>
+            <a:ext cx="4754880" cy="365760"/>
+          </a:xfrm>
+          <a:prstGeom prst="rect">
+            <a:avLst/>
+          </a:prstGeom>
+          <a:noFill/>
+        </p:spPr>
+        <p:txBody>
+          <a:bodyPr wrap="square">
+            <a:spAutoFit/>
+          </a:bodyPr>
+          <a:lstStyle/>
+          <a:p>
+            <a:pPr algn="l"/>
+            <a:r>
+              <a:rPr sz="1800" b="1">
+                <a:solidFill>
+                  <a:srgbClr val="BE185D"/>
+                </a:solidFill>
+                <a:latin typeface="Microsoft YaHei"/>
+              </a:rPr>
+              <a:t>真人匹配</a:t>
+            </a:r>
+          </a:p>
+        </p:txBody>
+      </p:sp>
+      <p:sp>
+        <p:nvSpPr>
+          <p:cNvPr id="16" name="TextBox 15"/>
+          <p:cNvSpPr txBox="1"/>
+          <p:nvPr/>
+        </p:nvSpPr>
+        <p:spPr>
+          <a:xfrm>
+            <a:off x="1005840" y="5532120"/>
+            <a:ext cx="4754880" cy="914400"/>
+          </a:xfrm>
+          <a:prstGeom prst="rect">
+            <a:avLst/>
+          </a:prstGeom>
+          <a:noFill/>
+        </p:spPr>
+        <p:txBody>
+          <a:bodyPr wrap="square">
+            <a:spAutoFit/>
+          </a:bodyPr>
+          <a:lstStyle/>
+          <a:p>
+            <a:pPr algn="l"/>
+            <a:r>
+              <a:rPr sz="1400" b="0">
+                <a:solidFill>
+                  <a:srgbClr val="5A7A9A"/>
+                </a:solidFill>
+                <a:latin typeface="Microsoft YaHei"/>
+              </a:rPr>
+              <a:t>一键匹配陌生创作者，不同视角的碰撞往往诞生最精彩的对白</a:t>
+            </a:r>
+          </a:p>
+        </p:txBody>
+      </p:sp>
+      <p:sp>
+        <p:nvSpPr>
+          <p:cNvPr id="17" name="Rounded Rectangle 16"/>
+          <p:cNvSpPr/>
+          <p:nvPr/>
+        </p:nvSpPr>
+        <p:spPr>
+          <a:xfrm>
+            <a:off x="6492240" y="4937760"/>
+            <a:ext cx="5303520" cy="1645920"/>
+          </a:xfrm>
+          <a:prstGeom prst="roundRect">
+            <a:avLst/>
+          </a:prstGeom>
+          <a:solidFill>
+            <a:srgbClr val="FFFFFF"/>
+          </a:solidFill>
+          <a:ln>
+            <a:solidFill>
+              <a:srgbClr val="E2E8F0"/>
+            </a:solidFill>
+          </a:ln>
+        </p:spPr>
+        <p:style>
+          <a:lnRef idx="1">
+            <a:schemeClr val="accent1"/>
+          </a:lnRef>
+          <a:fillRef idx="3">
+            <a:schemeClr val="accent1"/>
+          </a:fillRef>
+          <a:effectRef idx="2">
+            <a:schemeClr val="accent1"/>
+          </a:effectRef>
+          <a:fontRef idx="minor">
+            <a:schemeClr val="lt1"/>
+          </a:fontRef>
+        </p:style>
+        <p:txBody>
+          <a:bodyPr rtlCol="0" anchor="ctr"/>
+          <a:lstStyle/>
+          <a:p>
+            <a:pPr algn="ctr"/>
+          </a:p>
+        </p:txBody>
+      </p:sp>
+      <p:sp>
+        <p:nvSpPr>
+          <p:cNvPr id="18" name="TextBox 17"/>
+          <p:cNvSpPr txBox="1"/>
+          <p:nvPr/>
+        </p:nvSpPr>
+        <p:spPr>
+          <a:xfrm>
+            <a:off x="6766560" y="5120640"/>
+            <a:ext cx="4754880" cy="365760"/>
+          </a:xfrm>
+          <a:prstGeom prst="rect">
+            <a:avLst/>
+          </a:prstGeom>
+          <a:noFill/>
+        </p:spPr>
+        <p:txBody>
+          <a:bodyPr wrap="square">
+            <a:spAutoFit/>
+          </a:bodyPr>
+          <a:lstStyle/>
+          <a:p>
+            <a:pPr algn="l"/>
+            <a:r>
+              <a:rPr sz="1800" b="1">
+                <a:solidFill>
+                  <a:srgbClr val="BE185D"/>
+                </a:solidFill>
+                <a:latin typeface="Microsoft YaHei"/>
+              </a:rPr>
+              <a:t>火花沉淀</a:t>
+            </a:r>
+          </a:p>
+        </p:txBody>
+      </p:sp>
+      <p:sp>
+        <p:nvSpPr>
+          <p:cNvPr id="19" name="TextBox 18"/>
+          <p:cNvSpPr txBox="1"/>
+          <p:nvPr/>
+        </p:nvSpPr>
+        <p:spPr>
+          <a:xfrm>
+            <a:off x="6766560" y="5532120"/>
+            <a:ext cx="4754880" cy="914400"/>
+          </a:xfrm>
+          <a:prstGeom prst="rect">
+            <a:avLst/>
+          </a:prstGeom>
+          <a:noFill/>
+        </p:spPr>
+        <p:txBody>
+          <a:bodyPr wrap="square">
+            <a:spAutoFit/>
+          </a:bodyPr>
+          <a:lstStyle/>
+          <a:p>
+            <a:pPr algn="l"/>
+            <a:r>
+              <a:rPr sz="1400" b="0">
+                <a:solidFill>
+                  <a:srgbClr val="5A7A9A"/>
+                </a:solidFill>
+                <a:latin typeface="Microsoft YaHei"/>
+              </a:rPr>
+              <a:t>即兴对白自动生成故事资产，你的每一次灵感都不会浪费</a:t>
+            </a:r>
+          </a:p>
+        </p:txBody>
+      </p:sp>
+    </p:spTree>
+  </p:cSld>
+  <p:clrMapOvr>
+    <a:masterClrMapping/>
+  </p:clrMapOvr>
+</p:sld>
+</file>
+
+<file path=ppt/slides/slide7.xml><?xml version="1.0" encoding="utf-8"?>
+<p:sld xmlns:a="http://schemas.openxmlformats.org/drawingml/2006/main" xmlns:p="http://schemas.openxmlformats.org/presentationml/2006/main" xmlns:r="http://schemas.openxmlformats.org/officeDocument/2006/relationships">
+  <p:cSld>
+    <p:spTree>
+      <p:nvGrpSpPr>
+        <p:cNvPr id="1" name=""/>
+        <p:cNvGrpSpPr/>
+        <p:nvPr/>
+      </p:nvGrpSpPr>
+      <p:grpSpPr/>
+      <p:sp>
+        <p:nvSpPr>
+          <p:cNvPr id="2" name="Rectangle 1"/>
+          <p:cNvSpPr/>
+          <p:nvPr/>
+        </p:nvSpPr>
+        <p:spPr>
+          <a:xfrm>
+            <a:off x="0" y="0"/>
+            <a:ext cx="12191695" cy="6858000"/>
+          </a:xfrm>
+          <a:prstGeom prst="rect">
+            <a:avLst/>
+          </a:prstGeom>
+          <a:solidFill>
+            <a:srgbClr val="F0F7FF"/>
+          </a:solidFill>
+          <a:ln>
+            <a:noFill/>
+          </a:ln>
+        </p:spPr>
+        <p:style>
+          <a:lnRef idx="1">
+            <a:schemeClr val="accent1"/>
+          </a:lnRef>
+          <a:fillRef idx="3">
+            <a:schemeClr val="accent1"/>
+          </a:fillRef>
+          <a:effectRef idx="2">
+            <a:schemeClr val="accent1"/>
+          </a:effectRef>
+          <a:fontRef idx="minor">
+            <a:schemeClr val="lt1"/>
+          </a:fontRef>
+        </p:style>
+        <p:txBody>
+          <a:bodyPr rtlCol="0" anchor="ctr"/>
+          <a:lstStyle/>
+          <a:p>
+            <a:pPr algn="ctr"/>
+          </a:p>
+        </p:txBody>
+      </p:sp>
+      <p:sp>
+        <p:nvSpPr>
           <p:cNvPr id="3" name="Rounded Rectangle 2"/>
           <p:cNvSpPr/>
           <p:nvPr/>
@@ -6491,7 +7196,7 @@
               </a:defRPr>
             </a:pPr>
             <a:r>
-              <a:t>www.xinghuo.app</a:t>
+              <a:t>http://81.70.59.228/</a:t>
             </a:r>
           </a:p>
         </p:txBody>

--- a/docs/qunxiang.pptx
+++ b/docs/qunxiang.pptx
@@ -10,8 +10,8 @@
     <p:sldId id="258" r:id="rId9"/>
     <p:sldId id="259" r:id="rId10"/>
     <p:sldId id="260" r:id="rId11"/>
+    <p:sldId id="261" r:id="rId12"/>
     <p:sldId id="262" r:id="rId13"/>
-    <p:sldId id="261" r:id="rId12"/>
   </p:sldIdLst>
   <p:sldSz cx="12191695" cy="6858000" type="screen4x3"/>
   <p:notesSz cx="6858000" cy="9144000"/>
@@ -3087,6 +3087,14 @@
 <file path=ppt/slides/slide1.xml><?xml version="1.0" encoding="utf-8"?>
 <p:sld xmlns:a="http://schemas.openxmlformats.org/drawingml/2006/main" xmlns:p="http://schemas.openxmlformats.org/presentationml/2006/main" xmlns:r="http://schemas.openxmlformats.org/officeDocument/2006/relationships">
   <p:cSld>
+    <p:bg>
+      <p:bgPr>
+        <a:solidFill>
+          <a:srgbClr val="FFFFFF"/>
+        </a:solidFill>
+        <a:effectLst/>
+      </p:bgPr>
+    </p:bg>
     <p:spTree>
       <p:nvGrpSpPr>
         <p:cNvPr id="1" name=""/>
@@ -3096,20 +3104,20 @@
       <p:grpSpPr/>
       <p:sp>
         <p:nvSpPr>
-          <p:cNvPr id="2" name="Rectangle 1"/>
+          <p:cNvPr id="2" name="Oval 1"/>
           <p:cNvSpPr/>
           <p:nvPr/>
         </p:nvSpPr>
         <p:spPr>
           <a:xfrm>
-            <a:off x="0" y="0"/>
-            <a:ext cx="12191695" cy="6858000"/>
-          </a:xfrm>
-          <a:prstGeom prst="rect">
+            <a:off x="-1371600" y="-1371600"/>
+            <a:ext cx="4572000" cy="4572000"/>
+          </a:xfrm>
+          <a:prstGeom prst="ellipse">
             <a:avLst/>
           </a:prstGeom>
           <a:solidFill>
-            <a:srgbClr val="F0F7FF"/>
+            <a:srgbClr val="E8F0FF"/>
           </a:solidFill>
           <a:ln>
             <a:noFill/>
@@ -3145,14 +3153,14 @@
         </p:nvSpPr>
         <p:spPr>
           <a:xfrm>
-            <a:off x="5394960" y="1645920"/>
-            <a:ext cx="1371600" cy="1371600"/>
+            <a:off x="731520" y="4754880"/>
+            <a:ext cx="1828800" cy="1828800"/>
           </a:xfrm>
           <a:prstGeom prst="roundRect">
             <a:avLst/>
           </a:prstGeom>
           <a:solidFill>
-            <a:srgbClr val="3B82F6"/>
+            <a:srgbClr val="F0F5FF"/>
           </a:solidFill>
           <a:ln>
             <a:noFill/>
@@ -3188,8 +3196,8 @@
         </p:nvSpPr>
         <p:spPr>
           <a:xfrm>
-            <a:off x="914400" y="3291840"/>
-            <a:ext cx="10362895" cy="1097280"/>
+            <a:off x="0" y="2011680"/>
+            <a:ext cx="12191695" cy="1097280"/>
           </a:xfrm>
           <a:prstGeom prst="rect">
             <a:avLst/>
@@ -3202,15 +3210,14 @@
           </a:bodyPr>
           <a:lstStyle/>
           <a:p>
-            <a:pPr algn="ctr">
-              <a:defRPr sz="6000" b="1">
-                <a:solidFill>
-                  <a:srgbClr val="1E3A5F"/>
+            <a:pPr algn="ctr"/>
+            <a:r>
+              <a:rPr sz="6000" b="1">
+                <a:solidFill>
+                  <a:srgbClr val="0066FF"/>
                 </a:solidFill>
                 <a:latin typeface="Microsoft YaHei"/>
-              </a:defRPr>
-            </a:pPr>
-            <a:r>
+              </a:rPr>
               <a:t>群像·星火</a:t>
             </a:r>
           </a:p>
@@ -3224,8 +3231,8 @@
         </p:nvSpPr>
         <p:spPr>
           <a:xfrm>
-            <a:off x="914400" y="4206240"/>
-            <a:ext cx="10362895" cy="457200"/>
+            <a:off x="0" y="3200400"/>
+            <a:ext cx="12191695" cy="548640"/>
           </a:xfrm>
           <a:prstGeom prst="rect">
             <a:avLst/>
@@ -3238,30 +3245,72 @@
           </a:bodyPr>
           <a:lstStyle/>
           <a:p>
-            <a:pPr algn="ctr">
-              <a:defRPr sz="1600" b="0">
-                <a:solidFill>
-                  <a:srgbClr val="93A3B8"/>
+            <a:pPr algn="ctr"/>
+            <a:r>
+              <a:rPr sz="2400" b="0">
+                <a:solidFill>
+                  <a:srgbClr val="1A1A1A"/>
                 </a:solidFill>
                 <a:latin typeface="Microsoft YaHei"/>
-              </a:defRPr>
-            </a:pPr>
-            <a:r>
-              <a:t>QUNXIANG · XINGHUO</a:t>
-            </a:r>
-          </a:p>
-        </p:txBody>
-      </p:sp>
-      <p:sp>
-        <p:nvSpPr>
-          <p:cNvPr id="6" name="TextBox 5"/>
+              </a:rPr>
+              <a:t>让真实发光，让思想变现</a:t>
+            </a:r>
+          </a:p>
+        </p:txBody>
+      </p:sp>
+      <p:sp>
+        <p:nvSpPr>
+          <p:cNvPr id="6" name="Rectangle 5"/>
+          <p:cNvSpPr/>
+          <p:nvPr/>
+        </p:nvSpPr>
+        <p:spPr>
+          <a:xfrm>
+            <a:off x="5303520" y="3840480"/>
+            <a:ext cx="1554480" cy="18288"/>
+          </a:xfrm>
+          <a:prstGeom prst="rect">
+            <a:avLst/>
+          </a:prstGeom>
+          <a:solidFill>
+            <a:srgbClr val="0066FF"/>
+          </a:solidFill>
+          <a:ln>
+            <a:noFill/>
+          </a:ln>
+        </p:spPr>
+        <p:style>
+          <a:lnRef idx="1">
+            <a:schemeClr val="accent1"/>
+          </a:lnRef>
+          <a:fillRef idx="3">
+            <a:schemeClr val="accent1"/>
+          </a:fillRef>
+          <a:effectRef idx="2">
+            <a:schemeClr val="accent1"/>
+          </a:effectRef>
+          <a:fontRef idx="minor">
+            <a:schemeClr val="lt1"/>
+          </a:fontRef>
+        </p:style>
+        <p:txBody>
+          <a:bodyPr rtlCol="0" anchor="ctr"/>
+          <a:lstStyle/>
+          <a:p>
+            <a:pPr algn="ctr"/>
+          </a:p>
+        </p:txBody>
+      </p:sp>
+      <p:sp>
+        <p:nvSpPr>
+          <p:cNvPr id="7" name="TextBox 6"/>
           <p:cNvSpPr txBox="1"/>
           <p:nvPr/>
         </p:nvSpPr>
         <p:spPr>
           <a:xfrm>
-            <a:off x="914400" y="4754880"/>
-            <a:ext cx="10362895" cy="548640"/>
+            <a:off x="0" y="4114800"/>
+            <a:ext cx="12191695" cy="457200"/>
           </a:xfrm>
           <a:prstGeom prst="rect">
             <a:avLst/>
@@ -3274,30 +3323,74 @@
           </a:bodyPr>
           <a:lstStyle/>
           <a:p>
-            <a:pPr algn="ctr">
-              <a:defRPr sz="2800" b="0">
-                <a:solidFill>
-                  <a:srgbClr val="3B82F6"/>
+            <a:pPr algn="ctr"/>
+            <a:r>
+              <a:rPr sz="1400" b="0">
+                <a:solidFill>
+                  <a:srgbClr val="888888"/>
                 </a:solidFill>
                 <a:latin typeface="Microsoft YaHei"/>
-              </a:defRPr>
-            </a:pPr>
-            <a:r>
-              <a:t>让真实发光，让思想变现</a:t>
-            </a:r>
-          </a:p>
-        </p:txBody>
-      </p:sp>
-      <p:sp>
-        <p:nvSpPr>
-          <p:cNvPr id="7" name="TextBox 6"/>
+              </a:rPr>
+              <a:t>一个关于创作、连接与被看见的故事</a:t>
+            </a:r>
+          </a:p>
+        </p:txBody>
+      </p:sp>
+      <p:sp>
+        <p:nvSpPr>
+          <p:cNvPr id="8" name="Rounded Rectangle 7"/>
+          <p:cNvSpPr/>
+          <p:nvPr/>
+        </p:nvSpPr>
+        <p:spPr>
+          <a:xfrm>
+            <a:off x="8686800" y="5669280"/>
+            <a:ext cx="2743200" cy="457200"/>
+          </a:xfrm>
+          <a:prstGeom prst="roundRect">
+            <a:avLst/>
+          </a:prstGeom>
+          <a:solidFill>
+            <a:srgbClr val="FFFFFF"/>
+          </a:solidFill>
+          <a:ln>
+            <a:solidFill>
+              <a:srgbClr val="CCDDFF"/>
+            </a:solidFill>
+          </a:ln>
+        </p:spPr>
+        <p:style>
+          <a:lnRef idx="1">
+            <a:schemeClr val="accent1"/>
+          </a:lnRef>
+          <a:fillRef idx="3">
+            <a:schemeClr val="accent1"/>
+          </a:fillRef>
+          <a:effectRef idx="2">
+            <a:schemeClr val="accent1"/>
+          </a:effectRef>
+          <a:fontRef idx="minor">
+            <a:schemeClr val="lt1"/>
+          </a:fontRef>
+        </p:style>
+        <p:txBody>
+          <a:bodyPr rtlCol="0" anchor="ctr"/>
+          <a:lstStyle/>
+          <a:p>
+            <a:pPr algn="ctr"/>
+          </a:p>
+        </p:txBody>
+      </p:sp>
+      <p:sp>
+        <p:nvSpPr>
+          <p:cNvPr id="9" name="TextBox 8"/>
           <p:cNvSpPr txBox="1"/>
           <p:nvPr/>
         </p:nvSpPr>
         <p:spPr>
           <a:xfrm>
-            <a:off x="914400" y="5486400"/>
-            <a:ext cx="10362895" cy="731520"/>
+            <a:off x="8686800" y="5715000"/>
+            <a:ext cx="2743200" cy="365760"/>
           </a:xfrm>
           <a:prstGeom prst="rect">
             <a:avLst/>
@@ -3310,16 +3403,15 @@
           </a:bodyPr>
           <a:lstStyle/>
           <a:p>
-            <a:pPr algn="ctr">
-              <a:defRPr sz="1600" b="0">
-                <a:solidFill>
-                  <a:srgbClr val="5A7A9A"/>
+            <a:pPr algn="ctr"/>
+            <a:r>
+              <a:rPr sz="1200" b="0">
+                <a:solidFill>
+                  <a:srgbClr val="0066FF"/>
                 </a:solidFill>
                 <a:latin typeface="Microsoft YaHei"/>
-              </a:defRPr>
-            </a:pPr>
-            <a:r>
-              <a:t>下一代互动叙事创作平台</a:t>
+              </a:rPr>
+              <a:t>知乎黑客松 2026 参赛项目</a:t>
             </a:r>
           </a:p>
         </p:txBody>
@@ -3335,6 +3427,14 @@
 <file path=ppt/slides/slide2.xml><?xml version="1.0" encoding="utf-8"?>
 <p:sld xmlns:a="http://schemas.openxmlformats.org/drawingml/2006/main" xmlns:p="http://schemas.openxmlformats.org/presentationml/2006/main" xmlns:r="http://schemas.openxmlformats.org/officeDocument/2006/relationships">
   <p:cSld>
+    <p:bg>
+      <p:bgPr>
+        <a:solidFill>
+          <a:srgbClr val="FFFFFF"/>
+        </a:solidFill>
+        <a:effectLst/>
+      </p:bgPr>
+    </p:bg>
     <p:spTree>
       <p:nvGrpSpPr>
         <p:cNvPr id="1" name=""/>
@@ -3344,57 +3444,14 @@
       <p:grpSpPr/>
       <p:sp>
         <p:nvSpPr>
-          <p:cNvPr id="2" name="Rectangle 1"/>
-          <p:cNvSpPr/>
-          <p:nvPr/>
-        </p:nvSpPr>
-        <p:spPr>
-          <a:xfrm>
-            <a:off x="0" y="0"/>
-            <a:ext cx="12191695" cy="6858000"/>
-          </a:xfrm>
-          <a:prstGeom prst="rect">
-            <a:avLst/>
-          </a:prstGeom>
-          <a:solidFill>
-            <a:srgbClr val="F0F7FF"/>
-          </a:solidFill>
-          <a:ln>
-            <a:noFill/>
-          </a:ln>
-        </p:spPr>
-        <p:style>
-          <a:lnRef idx="1">
-            <a:schemeClr val="accent1"/>
-          </a:lnRef>
-          <a:fillRef idx="3">
-            <a:schemeClr val="accent1"/>
-          </a:fillRef>
-          <a:effectRef idx="2">
-            <a:schemeClr val="accent1"/>
-          </a:effectRef>
-          <a:fontRef idx="minor">
-            <a:schemeClr val="lt1"/>
-          </a:fontRef>
-        </p:style>
-        <p:txBody>
-          <a:bodyPr rtlCol="0" anchor="ctr"/>
-          <a:lstStyle/>
-          <a:p>
-            <a:pPr algn="ctr"/>
-          </a:p>
-        </p:txBody>
-      </p:sp>
-      <p:sp>
-        <p:nvSpPr>
-          <p:cNvPr id="3" name="TextBox 2"/>
+          <p:cNvPr id="2" name="TextBox 1"/>
           <p:cNvSpPr txBox="1"/>
           <p:nvPr/>
         </p:nvSpPr>
         <p:spPr>
           <a:xfrm>
-            <a:off x="731520" y="548640"/>
-            <a:ext cx="10515600" cy="731520"/>
+            <a:off x="0" y="731520"/>
+            <a:ext cx="12191695" cy="822960"/>
           </a:xfrm>
           <a:prstGeom prst="rect">
             <a:avLst/>
@@ -3407,30 +3464,29 @@
           </a:bodyPr>
           <a:lstStyle/>
           <a:p>
-            <a:pPr algn="l">
-              <a:defRPr sz="4000" b="1">
-                <a:solidFill>
-                  <a:srgbClr val="1E3A5F"/>
+            <a:pPr algn="ctr"/>
+            <a:r>
+              <a:rPr sz="4200" b="1">
+                <a:solidFill>
+                  <a:srgbClr val="0066FF"/>
                 </a:solidFill>
                 <a:latin typeface="Microsoft YaHei"/>
-              </a:defRPr>
-            </a:pPr>
-            <a:r>
-              <a:t>创作者痛点</a:t>
-            </a:r>
-          </a:p>
-        </p:txBody>
-      </p:sp>
-      <p:sp>
-        <p:nvSpPr>
-          <p:cNvPr id="4" name="TextBox 3"/>
+              </a:rPr>
+              <a:t>希望有一天…</a:t>
+            </a:r>
+          </a:p>
+        </p:txBody>
+      </p:sp>
+      <p:sp>
+        <p:nvSpPr>
+          <p:cNvPr id="3" name="TextBox 2"/>
           <p:cNvSpPr txBox="1"/>
           <p:nvPr/>
         </p:nvSpPr>
         <p:spPr>
           <a:xfrm>
-            <a:off x="731520" y="1188720"/>
-            <a:ext cx="10515600" cy="457200"/>
+            <a:off x="0" y="1463040"/>
+            <a:ext cx="12191695" cy="365760"/>
           </a:xfrm>
           <a:prstGeom prst="rect">
             <a:avLst/>
@@ -3443,73 +3499,29 @@
           </a:bodyPr>
           <a:lstStyle/>
           <a:p>
-            <a:pPr algn="l">
-              <a:defRPr sz="1800" b="0">
-                <a:solidFill>
-                  <a:srgbClr val="5A7A9A"/>
+            <a:pPr algn="ctr"/>
+            <a:r>
+              <a:rPr sz="1400" b="0">
+                <a:solidFill>
+                  <a:srgbClr val="888888"/>
                 </a:solidFill>
                 <a:latin typeface="Microsoft YaHei"/>
-              </a:defRPr>
-            </a:pPr>
-            <a:r>
-              <a:t>90% 的创作者有精彩的想法，但只有 10% 能把它变成完整的故事</a:t>
-            </a:r>
-          </a:p>
-        </p:txBody>
-      </p:sp>
-      <p:sp>
-        <p:nvSpPr>
-          <p:cNvPr id="5" name="Rounded Rectangle 4"/>
-          <p:cNvSpPr/>
-          <p:nvPr/>
-        </p:nvSpPr>
-        <p:spPr>
-          <a:xfrm>
-            <a:off x="731520" y="2011680"/>
-            <a:ext cx="548640" cy="548640"/>
-          </a:xfrm>
-          <a:prstGeom prst="roundRect">
-            <a:avLst/>
-          </a:prstGeom>
-          <a:solidFill>
-            <a:srgbClr val="EF4444"/>
-          </a:solidFill>
-          <a:ln>
-            <a:noFill/>
-          </a:ln>
-        </p:spPr>
-        <p:style>
-          <a:lnRef idx="1">
-            <a:schemeClr val="accent1"/>
-          </a:lnRef>
-          <a:fillRef idx="3">
-            <a:schemeClr val="accent1"/>
-          </a:fillRef>
-          <a:effectRef idx="2">
-            <a:schemeClr val="accent1"/>
-          </a:effectRef>
-          <a:fontRef idx="minor">
-            <a:schemeClr val="lt1"/>
-          </a:fontRef>
-        </p:style>
-        <p:txBody>
-          <a:bodyPr rtlCol="0" anchor="ctr"/>
-          <a:lstStyle/>
-          <a:p>
-            <a:pPr algn="ctr"/>
-          </a:p>
-        </p:txBody>
-      </p:sp>
-      <p:sp>
-        <p:nvSpPr>
-          <p:cNvPr id="6" name="TextBox 5"/>
+              </a:rPr>
+              <a:t>这是我们做这件事的全部理由</a:t>
+            </a:r>
+          </a:p>
+        </p:txBody>
+      </p:sp>
+      <p:sp>
+        <p:nvSpPr>
+          <p:cNvPr id="4" name="TextBox 3"/>
           <p:cNvSpPr txBox="1"/>
           <p:nvPr/>
         </p:nvSpPr>
         <p:spPr>
           <a:xfrm>
-            <a:off x="731520" y="2057400"/>
-            <a:ext cx="548640" cy="457200"/>
+            <a:off x="3200400" y="2103120"/>
+            <a:ext cx="3200400" cy="457200"/>
           </a:xfrm>
           <a:prstGeom prst="rect">
             <a:avLst/>
@@ -3522,30 +3534,29 @@
           </a:bodyPr>
           <a:lstStyle/>
           <a:p>
-            <a:pPr algn="ctr">
-              <a:defRPr sz="1600" b="1">
-                <a:solidFill>
-                  <a:srgbClr val="FFFFFF"/>
+            <a:pPr algn="r"/>
+            <a:r>
+              <a:rPr sz="2000" b="0">
+                <a:solidFill>
+                  <a:srgbClr val="555555"/>
                 </a:solidFill>
                 <a:latin typeface="Microsoft YaHei"/>
-              </a:defRPr>
-            </a:pPr>
-            <a:r>
-              <a:t>01</a:t>
-            </a:r>
-          </a:p>
-        </p:txBody>
-      </p:sp>
-      <p:sp>
-        <p:nvSpPr>
-          <p:cNvPr id="7" name="TextBox 6"/>
+              </a:rPr>
+              <a:t>人人都是</a:t>
+            </a:r>
+          </a:p>
+        </p:txBody>
+      </p:sp>
+      <p:sp>
+        <p:nvSpPr>
+          <p:cNvPr id="5" name="TextBox 4"/>
           <p:cNvSpPr txBox="1"/>
           <p:nvPr/>
         </p:nvSpPr>
         <p:spPr>
           <a:xfrm>
-            <a:off x="1463040" y="2011680"/>
-            <a:ext cx="9144000" cy="365760"/>
+            <a:off x="6400800" y="2103120"/>
+            <a:ext cx="3200400" cy="457200"/>
           </a:xfrm>
           <a:prstGeom prst="rect">
             <a:avLst/>
@@ -3558,30 +3569,29 @@
           </a:bodyPr>
           <a:lstStyle/>
           <a:p>
-            <a:pPr algn="l">
-              <a:defRPr sz="2000" b="1">
-                <a:solidFill>
-                  <a:srgbClr val="1E3A5F"/>
+            <a:pPr algn="l"/>
+            <a:r>
+              <a:rPr sz="2000" b="1">
+                <a:solidFill>
+                  <a:srgbClr val="0066FF"/>
                 </a:solidFill>
                 <a:latin typeface="Microsoft YaHei"/>
-              </a:defRPr>
-            </a:pPr>
-            <a:r>
-              <a:t>专业门槛太高</a:t>
-            </a:r>
-          </a:p>
-        </p:txBody>
-      </p:sp>
-      <p:sp>
-        <p:nvSpPr>
-          <p:cNvPr id="8" name="TextBox 7"/>
+              </a:rPr>
+              <a:t>创作者</a:t>
+            </a:r>
+          </a:p>
+        </p:txBody>
+      </p:sp>
+      <p:sp>
+        <p:nvSpPr>
+          <p:cNvPr id="6" name="TextBox 5"/>
           <p:cNvSpPr txBox="1"/>
           <p:nvPr/>
         </p:nvSpPr>
         <p:spPr>
           <a:xfrm>
-            <a:off x="1463040" y="2377440"/>
-            <a:ext cx="9144000" cy="457200"/>
+            <a:off x="3200400" y="2697479"/>
+            <a:ext cx="3200400" cy="457200"/>
           </a:xfrm>
           <a:prstGeom prst="rect">
             <a:avLst/>
@@ -3594,73 +3604,29 @@
           </a:bodyPr>
           <a:lstStyle/>
           <a:p>
-            <a:pPr algn="l">
-              <a:defRPr sz="1400" b="0">
-                <a:solidFill>
-                  <a:srgbClr val="5A7A9A"/>
+            <a:pPr algn="r"/>
+            <a:r>
+              <a:rPr sz="2000" b="0">
+                <a:solidFill>
+                  <a:srgbClr val="555555"/>
                 </a:solidFill>
                 <a:latin typeface="Microsoft YaHei"/>
-              </a:defRPr>
-            </a:pPr>
-            <a:r>
-              <a:t>编剧、导演、世界观设定……需要掌握大量专业技能，普通人望而却步</a:t>
-            </a:r>
-          </a:p>
-        </p:txBody>
-      </p:sp>
-      <p:sp>
-        <p:nvSpPr>
-          <p:cNvPr id="9" name="Rounded Rectangle 8"/>
-          <p:cNvSpPr/>
-          <p:nvPr/>
-        </p:nvSpPr>
-        <p:spPr>
-          <a:xfrm>
-            <a:off x="731520" y="3383280"/>
-            <a:ext cx="548640" cy="548640"/>
-          </a:xfrm>
-          <a:prstGeom prst="roundRect">
-            <a:avLst/>
-          </a:prstGeom>
-          <a:solidFill>
-            <a:srgbClr val="EF4444"/>
-          </a:solidFill>
-          <a:ln>
-            <a:noFill/>
-          </a:ln>
-        </p:spPr>
-        <p:style>
-          <a:lnRef idx="1">
-            <a:schemeClr val="accent1"/>
-          </a:lnRef>
-          <a:fillRef idx="3">
-            <a:schemeClr val="accent1"/>
-          </a:fillRef>
-          <a:effectRef idx="2">
-            <a:schemeClr val="accent1"/>
-          </a:effectRef>
-          <a:fontRef idx="minor">
-            <a:schemeClr val="lt1"/>
-          </a:fontRef>
-        </p:style>
-        <p:txBody>
-          <a:bodyPr rtlCol="0" anchor="ctr"/>
-          <a:lstStyle/>
-          <a:p>
-            <a:pPr algn="ctr"/>
-          </a:p>
-        </p:txBody>
-      </p:sp>
-      <p:sp>
-        <p:nvSpPr>
-          <p:cNvPr id="10" name="TextBox 9"/>
+              </a:rPr>
+              <a:t>我们能成为</a:t>
+            </a:r>
+          </a:p>
+        </p:txBody>
+      </p:sp>
+      <p:sp>
+        <p:nvSpPr>
+          <p:cNvPr id="7" name="TextBox 6"/>
           <p:cNvSpPr txBox="1"/>
           <p:nvPr/>
         </p:nvSpPr>
         <p:spPr>
           <a:xfrm>
-            <a:off x="731520" y="3429000"/>
-            <a:ext cx="548640" cy="457200"/>
+            <a:off x="6400800" y="2697479"/>
+            <a:ext cx="3200400" cy="457200"/>
           </a:xfrm>
           <a:prstGeom prst="rect">
             <a:avLst/>
@@ -3673,30 +3639,29 @@
           </a:bodyPr>
           <a:lstStyle/>
           <a:p>
-            <a:pPr algn="ctr">
-              <a:defRPr sz="1600" b="1">
-                <a:solidFill>
-                  <a:srgbClr val="FFFFFF"/>
+            <a:pPr algn="l"/>
+            <a:r>
+              <a:rPr sz="2000" b="1">
+                <a:solidFill>
+                  <a:srgbClr val="0066FF"/>
                 </a:solidFill>
                 <a:latin typeface="Microsoft YaHei"/>
-              </a:defRPr>
-            </a:pPr>
-            <a:r>
-              <a:t>02</a:t>
-            </a:r>
-          </a:p>
-        </p:txBody>
-      </p:sp>
-      <p:sp>
-        <p:nvSpPr>
-          <p:cNvPr id="11" name="TextBox 10"/>
+              </a:rPr>
+              <a:t>故事的参与者</a:t>
+            </a:r>
+          </a:p>
+        </p:txBody>
+      </p:sp>
+      <p:sp>
+        <p:nvSpPr>
+          <p:cNvPr id="8" name="TextBox 7"/>
           <p:cNvSpPr txBox="1"/>
           <p:nvPr/>
         </p:nvSpPr>
         <p:spPr>
           <a:xfrm>
-            <a:off x="1463040" y="3383280"/>
-            <a:ext cx="9144000" cy="365760"/>
+            <a:off x="3200400" y="3291839"/>
+            <a:ext cx="3200400" cy="457200"/>
           </a:xfrm>
           <a:prstGeom prst="rect">
             <a:avLst/>
@@ -3709,30 +3674,29 @@
           </a:bodyPr>
           <a:lstStyle/>
           <a:p>
-            <a:pPr algn="l">
-              <a:defRPr sz="2000" b="1">
-                <a:solidFill>
-                  <a:srgbClr val="1E3A5F"/>
+            <a:pPr algn="r"/>
+            <a:r>
+              <a:rPr sz="2000" b="0">
+                <a:solidFill>
+                  <a:srgbClr val="555555"/>
                 </a:solidFill>
                 <a:latin typeface="Microsoft YaHei"/>
-              </a:defRPr>
-            </a:pPr>
-            <a:r>
-              <a:t>创作是孤独的</a:t>
-            </a:r>
-          </a:p>
-        </p:txBody>
-      </p:sp>
-      <p:sp>
-        <p:nvSpPr>
-          <p:cNvPr id="12" name="TextBox 11"/>
+              </a:rPr>
+              <a:t>我们能在故事里相遇，</a:t>
+            </a:r>
+          </a:p>
+        </p:txBody>
+      </p:sp>
+      <p:sp>
+        <p:nvSpPr>
+          <p:cNvPr id="9" name="TextBox 8"/>
           <p:cNvSpPr txBox="1"/>
           <p:nvPr/>
         </p:nvSpPr>
         <p:spPr>
           <a:xfrm>
-            <a:off x="1463040" y="3749040"/>
-            <a:ext cx="9144000" cy="457200"/>
+            <a:off x="6400800" y="3291839"/>
+            <a:ext cx="3200400" cy="457200"/>
           </a:xfrm>
           <a:prstGeom prst="rect">
             <a:avLst/>
@@ -3745,73 +3709,29 @@
           </a:bodyPr>
           <a:lstStyle/>
           <a:p>
-            <a:pPr algn="l">
-              <a:defRPr sz="1400" b="0">
-                <a:solidFill>
-                  <a:srgbClr val="5A7A9A"/>
+            <a:pPr algn="l"/>
+            <a:r>
+              <a:rPr sz="2000" b="1">
+                <a:solidFill>
+                  <a:srgbClr val="0066FF"/>
                 </a:solidFill>
                 <a:latin typeface="Microsoft YaHei"/>
-              </a:defRPr>
-            </a:pPr>
-            <a:r>
-              <a:t>一个人想剧情容易陷入瓶颈，缺乏即时的反馈和碰撞</a:t>
-            </a:r>
-          </a:p>
-        </p:txBody>
-      </p:sp>
-      <p:sp>
-        <p:nvSpPr>
-          <p:cNvPr id="13" name="Rounded Rectangle 12"/>
-          <p:cNvSpPr/>
-          <p:nvPr/>
-        </p:nvSpPr>
-        <p:spPr>
-          <a:xfrm>
-            <a:off x="731520" y="4754880"/>
-            <a:ext cx="548640" cy="548640"/>
-          </a:xfrm>
-          <a:prstGeom prst="roundRect">
-            <a:avLst/>
-          </a:prstGeom>
-          <a:solidFill>
-            <a:srgbClr val="EF4444"/>
-          </a:solidFill>
-          <a:ln>
-            <a:noFill/>
-          </a:ln>
-        </p:spPr>
-        <p:style>
-          <a:lnRef idx="1">
-            <a:schemeClr val="accent1"/>
-          </a:lnRef>
-          <a:fillRef idx="3">
-            <a:schemeClr val="accent1"/>
-          </a:fillRef>
-          <a:effectRef idx="2">
-            <a:schemeClr val="accent1"/>
-          </a:effectRef>
-          <a:fontRef idx="minor">
-            <a:schemeClr val="lt1"/>
-          </a:fontRef>
-        </p:style>
-        <p:txBody>
-          <a:bodyPr rtlCol="0" anchor="ctr"/>
-          <a:lstStyle/>
-          <a:p>
-            <a:pPr algn="ctr"/>
-          </a:p>
-        </p:txBody>
-      </p:sp>
-      <p:sp>
-        <p:nvSpPr>
-          <p:cNvPr id="14" name="TextBox 13"/>
+              </a:rPr>
+              <a:t>争论小小细节</a:t>
+            </a:r>
+          </a:p>
+        </p:txBody>
+      </p:sp>
+      <p:sp>
+        <p:nvSpPr>
+          <p:cNvPr id="10" name="TextBox 9"/>
           <p:cNvSpPr txBox="1"/>
           <p:nvPr/>
         </p:nvSpPr>
         <p:spPr>
           <a:xfrm>
-            <a:off x="731520" y="4800600"/>
-            <a:ext cx="548640" cy="457200"/>
+            <a:off x="3200400" y="3886200"/>
+            <a:ext cx="3200400" cy="457200"/>
           </a:xfrm>
           <a:prstGeom prst="rect">
             <a:avLst/>
@@ -3824,30 +3744,29 @@
           </a:bodyPr>
           <a:lstStyle/>
           <a:p>
-            <a:pPr algn="ctr">
-              <a:defRPr sz="1600" b="1">
-                <a:solidFill>
-                  <a:srgbClr val="FFFFFF"/>
+            <a:pPr algn="r"/>
+            <a:r>
+              <a:rPr sz="2000" b="0">
+                <a:solidFill>
+                  <a:srgbClr val="555555"/>
                 </a:solidFill>
                 <a:latin typeface="Microsoft YaHei"/>
-              </a:defRPr>
-            </a:pPr>
-            <a:r>
-              <a:t>03</a:t>
-            </a:r>
-          </a:p>
-        </p:txBody>
-      </p:sp>
-      <p:sp>
-        <p:nvSpPr>
-          <p:cNvPr id="15" name="TextBox 14"/>
+              </a:rPr>
+              <a:t>在玩故事中</a:t>
+            </a:r>
+          </a:p>
+        </p:txBody>
+      </p:sp>
+      <p:sp>
+        <p:nvSpPr>
+          <p:cNvPr id="11" name="TextBox 10"/>
           <p:cNvSpPr txBox="1"/>
           <p:nvPr/>
         </p:nvSpPr>
         <p:spPr>
           <a:xfrm>
-            <a:off x="1463040" y="4754880"/>
-            <a:ext cx="9144000" cy="365760"/>
+            <a:off x="6400800" y="3886200"/>
+            <a:ext cx="3200400" cy="457200"/>
           </a:xfrm>
           <a:prstGeom prst="rect">
             <a:avLst/>
@@ -3860,30 +3779,29 @@
           </a:bodyPr>
           <a:lstStyle/>
           <a:p>
-            <a:pPr algn="l">
-              <a:defRPr sz="2000" b="1">
-                <a:solidFill>
-                  <a:srgbClr val="1E3A5F"/>
+            <a:pPr algn="l"/>
+            <a:r>
+              <a:rPr sz="2000" b="1">
+                <a:solidFill>
+                  <a:srgbClr val="0066FF"/>
                 </a:solidFill>
                 <a:latin typeface="Microsoft YaHei"/>
-              </a:defRPr>
-            </a:pPr>
-            <a:r>
-              <a:t>从想法到作品路径太长</a:t>
-            </a:r>
-          </a:p>
-        </p:txBody>
-      </p:sp>
-      <p:sp>
-        <p:nvSpPr>
-          <p:cNvPr id="16" name="TextBox 15"/>
+              </a:rPr>
+              <a:t>收获快乐和朋友</a:t>
+            </a:r>
+          </a:p>
+        </p:txBody>
+      </p:sp>
+      <p:sp>
+        <p:nvSpPr>
+          <p:cNvPr id="12" name="TextBox 11"/>
           <p:cNvSpPr txBox="1"/>
           <p:nvPr/>
         </p:nvSpPr>
         <p:spPr>
           <a:xfrm>
-            <a:off x="1463040" y="5120640"/>
-            <a:ext cx="9144000" cy="457200"/>
+            <a:off x="3200400" y="4480560"/>
+            <a:ext cx="3200400" cy="457200"/>
           </a:xfrm>
           <a:prstGeom prst="rect">
             <a:avLst/>
@@ -3896,16 +3814,120 @@
           </a:bodyPr>
           <a:lstStyle/>
           <a:p>
-            <a:pPr algn="l">
-              <a:defRPr sz="1400" b="0">
-                <a:solidFill>
-                  <a:srgbClr val="5A7A9A"/>
+            <a:pPr algn="r"/>
+            <a:r>
+              <a:rPr sz="2000" b="0">
+                <a:solidFill>
+                  <a:srgbClr val="555555"/>
                 </a:solidFill>
                 <a:latin typeface="Microsoft YaHei"/>
-              </a:defRPr>
-            </a:pPr>
-            <a:r>
-              <a:t>有了灵感还要学习工具、搭建流程，创意在过程中被消耗殆尽</a:t>
+              </a:rPr>
+              <a:t>坑了的小说</a:t>
+            </a:r>
+          </a:p>
+        </p:txBody>
+      </p:sp>
+      <p:sp>
+        <p:nvSpPr>
+          <p:cNvPr id="13" name="TextBox 12"/>
+          <p:cNvSpPr txBox="1"/>
+          <p:nvPr/>
+        </p:nvSpPr>
+        <p:spPr>
+          <a:xfrm>
+            <a:off x="6400800" y="4480560"/>
+            <a:ext cx="3200400" cy="457200"/>
+          </a:xfrm>
+          <a:prstGeom prst="rect">
+            <a:avLst/>
+          </a:prstGeom>
+          <a:noFill/>
+        </p:spPr>
+        <p:txBody>
+          <a:bodyPr wrap="square">
+            <a:spAutoFit/>
+          </a:bodyPr>
+          <a:lstStyle/>
+          <a:p>
+            <a:pPr algn="l"/>
+            <a:r>
+              <a:rPr sz="2000" b="1">
+                <a:solidFill>
+                  <a:srgbClr val="0066FF"/>
+                </a:solidFill>
+                <a:latin typeface="Microsoft YaHei"/>
+              </a:rPr>
+              <a:t>被我们填平</a:t>
+            </a:r>
+          </a:p>
+        </p:txBody>
+      </p:sp>
+      <p:sp>
+        <p:nvSpPr>
+          <p:cNvPr id="14" name="TextBox 13"/>
+          <p:cNvSpPr txBox="1"/>
+          <p:nvPr/>
+        </p:nvSpPr>
+        <p:spPr>
+          <a:xfrm>
+            <a:off x="3200400" y="5074920"/>
+            <a:ext cx="3200400" cy="457200"/>
+          </a:xfrm>
+          <a:prstGeom prst="rect">
+            <a:avLst/>
+          </a:prstGeom>
+          <a:noFill/>
+        </p:spPr>
+        <p:txBody>
+          <a:bodyPr wrap="square">
+            <a:spAutoFit/>
+          </a:bodyPr>
+          <a:lstStyle/>
+          <a:p>
+            <a:pPr algn="r"/>
+            <a:r>
+              <a:rPr sz="2000" b="0">
+                <a:solidFill>
+                  <a:srgbClr val="555555"/>
+                </a:solidFill>
+                <a:latin typeface="Microsoft YaHei"/>
+              </a:rPr>
+              <a:t>我们</a:t>
+            </a:r>
+          </a:p>
+        </p:txBody>
+      </p:sp>
+      <p:sp>
+        <p:nvSpPr>
+          <p:cNvPr id="15" name="TextBox 14"/>
+          <p:cNvSpPr txBox="1"/>
+          <p:nvPr/>
+        </p:nvSpPr>
+        <p:spPr>
+          <a:xfrm>
+            <a:off x="6400800" y="5074920"/>
+            <a:ext cx="3200400" cy="457200"/>
+          </a:xfrm>
+          <a:prstGeom prst="rect">
+            <a:avLst/>
+          </a:prstGeom>
+          <a:noFill/>
+        </p:spPr>
+        <p:txBody>
+          <a:bodyPr wrap="square">
+            <a:spAutoFit/>
+          </a:bodyPr>
+          <a:lstStyle/>
+          <a:p>
+            <a:pPr algn="l"/>
+            <a:r>
+              <a:rPr sz="2000" b="1">
+                <a:solidFill>
+                  <a:srgbClr val="0066FF"/>
+                </a:solidFill>
+                <a:latin typeface="Microsoft YaHei"/>
+              </a:rPr>
+              <a:t>都能被看见</a:t>
             </a:r>
           </a:p>
         </p:txBody>
@@ -3921,6 +3943,14 @@
 <file path=ppt/slides/slide3.xml><?xml version="1.0" encoding="utf-8"?>
 <p:sld xmlns:a="http://schemas.openxmlformats.org/drawingml/2006/main" xmlns:p="http://schemas.openxmlformats.org/presentationml/2006/main" xmlns:r="http://schemas.openxmlformats.org/officeDocument/2006/relationships">
   <p:cSld>
+    <p:bg>
+      <p:bgPr>
+        <a:solidFill>
+          <a:srgbClr val="FFFFFF"/>
+        </a:solidFill>
+        <a:effectLst/>
+      </p:bgPr>
+    </p:bg>
     <p:spTree>
       <p:nvGrpSpPr>
         <p:cNvPr id="1" name=""/>
@@ -3930,23 +3960,60 @@
       <p:grpSpPr/>
       <p:sp>
         <p:nvSpPr>
-          <p:cNvPr id="2" name="Rectangle 1"/>
+          <p:cNvPr id="2" name="TextBox 1"/>
+          <p:cNvSpPr txBox="1"/>
+          <p:nvPr/>
+        </p:nvSpPr>
+        <p:spPr>
+          <a:xfrm>
+            <a:off x="0" y="731520"/>
+            <a:ext cx="12191695" cy="822960"/>
+          </a:xfrm>
+          <a:prstGeom prst="rect">
+            <a:avLst/>
+          </a:prstGeom>
+          <a:noFill/>
+        </p:spPr>
+        <p:txBody>
+          <a:bodyPr wrap="square">
+            <a:spAutoFit/>
+          </a:bodyPr>
+          <a:lstStyle/>
+          <a:p>
+            <a:pPr algn="ctr"/>
+            <a:r>
+              <a:rPr sz="4200" b="1">
+                <a:solidFill>
+                  <a:srgbClr val="0066FF"/>
+                </a:solidFill>
+                <a:latin typeface="Microsoft YaHei"/>
+              </a:rPr>
+              <a:t>三个模式，一个信念</a:t>
+            </a:r>
+          </a:p>
+        </p:txBody>
+      </p:sp>
+      <p:sp>
+        <p:nvSpPr>
+          <p:cNvPr id="3" name="Rounded Rectangle 2"/>
           <p:cNvSpPr/>
           <p:nvPr/>
         </p:nvSpPr>
         <p:spPr>
           <a:xfrm>
-            <a:off x="0" y="0"/>
-            <a:ext cx="12191695" cy="6858000"/>
-          </a:xfrm>
-          <a:prstGeom prst="rect">
+            <a:off x="1371600" y="2011680"/>
+            <a:ext cx="2926080" cy="2926080"/>
+          </a:xfrm>
+          <a:prstGeom prst="roundRect">
             <a:avLst/>
           </a:prstGeom>
           <a:solidFill>
-            <a:srgbClr val="F0F7FF"/>
+            <a:srgbClr val="FFFFFF"/>
           </a:solidFill>
           <a:ln>
-            <a:noFill/>
+            <a:solidFill>
+              <a:srgbClr val="CCDDFF"/>
+            </a:solidFill>
           </a:ln>
         </p:spPr>
         <p:style>
@@ -3973,14 +4040,57 @@
       </p:sp>
       <p:sp>
         <p:nvSpPr>
-          <p:cNvPr id="3" name="TextBox 2"/>
+          <p:cNvPr id="4" name="Oval 3"/>
+          <p:cNvSpPr/>
+          <p:nvPr/>
+        </p:nvSpPr>
+        <p:spPr>
+          <a:xfrm>
+            <a:off x="2377440" y="2286000"/>
+            <a:ext cx="914400" cy="914400"/>
+          </a:xfrm>
+          <a:prstGeom prst="ellipse">
+            <a:avLst/>
+          </a:prstGeom>
+          <a:solidFill>
+            <a:srgbClr val="E8F0FF"/>
+          </a:solidFill>
+          <a:ln>
+            <a:noFill/>
+          </a:ln>
+        </p:spPr>
+        <p:style>
+          <a:lnRef idx="1">
+            <a:schemeClr val="accent1"/>
+          </a:lnRef>
+          <a:fillRef idx="3">
+            <a:schemeClr val="accent1"/>
+          </a:fillRef>
+          <a:effectRef idx="2">
+            <a:schemeClr val="accent1"/>
+          </a:effectRef>
+          <a:fontRef idx="minor">
+            <a:schemeClr val="lt1"/>
+          </a:fontRef>
+        </p:style>
+        <p:txBody>
+          <a:bodyPr rtlCol="0" anchor="ctr"/>
+          <a:lstStyle/>
+          <a:p>
+            <a:pPr algn="ctr"/>
+          </a:p>
+        </p:txBody>
+      </p:sp>
+      <p:sp>
+        <p:nvSpPr>
+          <p:cNvPr id="5" name="TextBox 4"/>
           <p:cNvSpPr txBox="1"/>
           <p:nvPr/>
         </p:nvSpPr>
         <p:spPr>
           <a:xfrm>
-            <a:off x="731520" y="457200"/>
-            <a:ext cx="10515600" cy="731520"/>
+            <a:off x="1371600" y="2423160"/>
+            <a:ext cx="2926080" cy="640080"/>
           </a:xfrm>
           <a:prstGeom prst="rect">
             <a:avLst/>
@@ -3993,30 +4103,29 @@
           </a:bodyPr>
           <a:lstStyle/>
           <a:p>
-            <a:pPr algn="l">
-              <a:defRPr sz="3600" b="1">
-                <a:solidFill>
-                  <a:srgbClr val="1E3A5F"/>
+            <a:pPr algn="ctr"/>
+            <a:r>
+              <a:rPr sz="2800" b="0">
+                <a:solidFill>
+                  <a:srgbClr val="1A1A1A"/>
                 </a:solidFill>
                 <a:latin typeface="Microsoft YaHei"/>
-              </a:defRPr>
-            </a:pPr>
-            <a:r>
-              <a:t>故事模式：玩出来的创作</a:t>
-            </a:r>
-          </a:p>
-        </p:txBody>
-      </p:sp>
-      <p:sp>
-        <p:nvSpPr>
-          <p:cNvPr id="4" name="TextBox 3"/>
+              </a:rPr>
+              <a:t>🤖</a:t>
+            </a:r>
+          </a:p>
+        </p:txBody>
+      </p:sp>
+      <p:sp>
+        <p:nvSpPr>
+          <p:cNvPr id="6" name="TextBox 5"/>
           <p:cNvSpPr txBox="1"/>
           <p:nvPr/>
         </p:nvSpPr>
         <p:spPr>
           <a:xfrm>
-            <a:off x="731520" y="1051560"/>
-            <a:ext cx="10515600" cy="365760"/>
+            <a:off x="1371600" y="3291840"/>
+            <a:ext cx="2926080" cy="457200"/>
           </a:xfrm>
           <a:prstGeom prst="rect">
             <a:avLst/>
@@ -4029,30 +4138,68 @@
           </a:bodyPr>
           <a:lstStyle/>
           <a:p>
-            <a:pPr algn="l">
-              <a:defRPr sz="1600" b="0">
-                <a:solidFill>
-                  <a:srgbClr val="5A7A9A"/>
+            <a:pPr algn="ctr"/>
+            <a:r>
+              <a:rPr sz="1800" b="1">
+                <a:solidFill>
+                  <a:srgbClr val="1A1A1A"/>
                 </a:solidFill>
                 <a:latin typeface="Microsoft YaHei"/>
-              </a:defRPr>
-            </a:pPr>
-            <a:r>
-              <a:t>不需要先学会创作，边玩边写，故事自然生长</a:t>
-            </a:r>
-          </a:p>
-        </p:txBody>
-      </p:sp>
-      <p:sp>
-        <p:nvSpPr>
-          <p:cNvPr id="5" name="Rounded Rectangle 4"/>
+              </a:rPr>
+              <a:t>人机模式</a:t>
+            </a:r>
+          </a:p>
+        </p:txBody>
+      </p:sp>
+      <p:sp>
+        <p:nvSpPr>
+          <p:cNvPr id="7" name="TextBox 6"/>
+          <p:cNvSpPr txBox="1"/>
+          <p:nvPr/>
+        </p:nvSpPr>
+        <p:spPr>
+          <a:xfrm>
+            <a:off x="1554480" y="3749039"/>
+            <a:ext cx="2560320" cy="914400"/>
+          </a:xfrm>
+          <a:prstGeom prst="rect">
+            <a:avLst/>
+          </a:prstGeom>
+          <a:noFill/>
+        </p:spPr>
+        <p:txBody>
+          <a:bodyPr wrap="square">
+            <a:spAutoFit/>
+          </a:bodyPr>
+          <a:lstStyle/>
+          <a:p>
+            <a:pPr algn="ctr"/>
+            <a:r>
+              <a:rPr sz="1200" b="0">
+                <a:solidFill>
+                  <a:srgbClr val="555555"/>
+                </a:solidFill>
+                <a:latin typeface="Microsoft YaHei"/>
+              </a:rPr>
+              <a:t>和刘看山聊聊你的脑洞</a:t>
+            </a:r>
+            <a:br/>
+            <a:r>
+              <a:t>一个永远在线的倾听者</a:t>
+            </a:r>
+          </a:p>
+        </p:txBody>
+      </p:sp>
+      <p:sp>
+        <p:nvSpPr>
+          <p:cNvPr id="8" name="Rounded Rectangle 7"/>
           <p:cNvSpPr/>
           <p:nvPr/>
         </p:nvSpPr>
         <p:spPr>
           <a:xfrm>
-            <a:off x="731520" y="1645920"/>
-            <a:ext cx="3383280" cy="2011680"/>
+            <a:off x="5029200" y="2011680"/>
+            <a:ext cx="2926080" cy="2926080"/>
           </a:xfrm>
           <a:prstGeom prst="roundRect">
             <a:avLst/>
@@ -4062,7 +4209,7 @@
           </a:solidFill>
           <a:ln>
             <a:solidFill>
-              <a:srgbClr val="DBEAFE"/>
+              <a:srgbClr val="CCDDFF"/>
             </a:solidFill>
           </a:ln>
         </p:spPr>
@@ -4090,14 +4237,57 @@
       </p:sp>
       <p:sp>
         <p:nvSpPr>
-          <p:cNvPr id="6" name="TextBox 5"/>
+          <p:cNvPr id="9" name="Oval 8"/>
+          <p:cNvSpPr/>
+          <p:nvPr/>
+        </p:nvSpPr>
+        <p:spPr>
+          <a:xfrm>
+            <a:off x="6035040" y="2286000"/>
+            <a:ext cx="914400" cy="914400"/>
+          </a:xfrm>
+          <a:prstGeom prst="ellipse">
+            <a:avLst/>
+          </a:prstGeom>
+          <a:solidFill>
+            <a:srgbClr val="E8F0FF"/>
+          </a:solidFill>
+          <a:ln>
+            <a:noFill/>
+          </a:ln>
+        </p:spPr>
+        <p:style>
+          <a:lnRef idx="1">
+            <a:schemeClr val="accent1"/>
+          </a:lnRef>
+          <a:fillRef idx="3">
+            <a:schemeClr val="accent1"/>
+          </a:fillRef>
+          <a:effectRef idx="2">
+            <a:schemeClr val="accent1"/>
+          </a:effectRef>
+          <a:fontRef idx="minor">
+            <a:schemeClr val="lt1"/>
+          </a:fontRef>
+        </p:style>
+        <p:txBody>
+          <a:bodyPr rtlCol="0" anchor="ctr"/>
+          <a:lstStyle/>
+          <a:p>
+            <a:pPr algn="ctr"/>
+          </a:p>
+        </p:txBody>
+      </p:sp>
+      <p:sp>
+        <p:nvSpPr>
+          <p:cNvPr id="10" name="TextBox 9"/>
           <p:cNvSpPr txBox="1"/>
           <p:nvPr/>
         </p:nvSpPr>
         <p:spPr>
           <a:xfrm>
-            <a:off x="868680" y="1783080"/>
-            <a:ext cx="3108960" cy="365760"/>
+            <a:off x="5029200" y="2423160"/>
+            <a:ext cx="2926080" cy="640080"/>
           </a:xfrm>
           <a:prstGeom prst="rect">
             <a:avLst/>
@@ -4110,30 +4300,29 @@
           </a:bodyPr>
           <a:lstStyle/>
           <a:p>
-            <a:pPr algn="l">
-              <a:defRPr sz="1600" b="1">
-                <a:solidFill>
-                  <a:srgbClr val="1E3A5F"/>
+            <a:pPr algn="ctr"/>
+            <a:r>
+              <a:rPr sz="2800" b="0">
+                <a:solidFill>
+                  <a:srgbClr val="1A1A1A"/>
                 </a:solidFill>
                 <a:latin typeface="Microsoft YaHei"/>
-              </a:defRPr>
-            </a:pPr>
-            <a:r>
-              <a:t>双人解密</a:t>
-            </a:r>
-          </a:p>
-        </p:txBody>
-      </p:sp>
-      <p:sp>
-        <p:nvSpPr>
-          <p:cNvPr id="7" name="TextBox 6"/>
+              </a:rPr>
+              <a:t>💬</a:t>
+            </a:r>
+          </a:p>
+        </p:txBody>
+      </p:sp>
+      <p:sp>
+        <p:nvSpPr>
+          <p:cNvPr id="11" name="TextBox 10"/>
           <p:cNvSpPr txBox="1"/>
           <p:nvPr/>
         </p:nvSpPr>
         <p:spPr>
           <a:xfrm>
-            <a:off x="868680" y="2194560"/>
-            <a:ext cx="3108960" cy="1280160"/>
+            <a:off x="5029200" y="3291840"/>
+            <a:ext cx="2926080" cy="457200"/>
           </a:xfrm>
           <a:prstGeom prst="rect">
             <a:avLst/>
@@ -4146,30 +4335,68 @@
           </a:bodyPr>
           <a:lstStyle/>
           <a:p>
-            <a:pPr algn="l">
-              <a:defRPr sz="1200" b="0">
-                <a:solidFill>
-                  <a:srgbClr val="5A7A9A"/>
+            <a:pPr algn="ctr"/>
+            <a:r>
+              <a:rPr sz="1800" b="1">
+                <a:solidFill>
+                  <a:srgbClr val="1A1A1A"/>
                 </a:solidFill>
                 <a:latin typeface="Microsoft YaHei"/>
-              </a:defRPr>
-            </a:pPr>
-            <a:r>
-              <a:t>匹配陌生搭档，各自扮演不同角色，信息不对称中自然产生戏剧张力</a:t>
-            </a:r>
-          </a:p>
-        </p:txBody>
-      </p:sp>
-      <p:sp>
-        <p:nvSpPr>
-          <p:cNvPr id="8" name="Rounded Rectangle 7"/>
+              </a:rPr>
+              <a:t>双人模式</a:t>
+            </a:r>
+          </a:p>
+        </p:txBody>
+      </p:sp>
+      <p:sp>
+        <p:nvSpPr>
+          <p:cNvPr id="12" name="TextBox 11"/>
+          <p:cNvSpPr txBox="1"/>
+          <p:nvPr/>
+        </p:nvSpPr>
+        <p:spPr>
+          <a:xfrm>
+            <a:off x="5212080" y="3749039"/>
+            <a:ext cx="2560320" cy="914400"/>
+          </a:xfrm>
+          <a:prstGeom prst="rect">
+            <a:avLst/>
+          </a:prstGeom>
+          <a:noFill/>
+        </p:spPr>
+        <p:txBody>
+          <a:bodyPr wrap="square">
+            <a:spAutoFit/>
+          </a:bodyPr>
+          <a:lstStyle/>
+          <a:p>
+            <a:pPr algn="ctr"/>
+            <a:r>
+              <a:rPr sz="1200" b="0">
+                <a:solidFill>
+                  <a:srgbClr val="555555"/>
+                </a:solidFill>
+                <a:latin typeface="Microsoft YaHei"/>
+              </a:rPr>
+              <a:t>和陌生人碰撞出真实火花</a:t>
+            </a:r>
+            <a:br/>
+            <a:r>
+              <a:t>两个真人 + 一个AI催化剂</a:t>
+            </a:r>
+          </a:p>
+        </p:txBody>
+      </p:sp>
+      <p:sp>
+        <p:nvSpPr>
+          <p:cNvPr id="13" name="Rounded Rectangle 12"/>
           <p:cNvSpPr/>
           <p:nvPr/>
         </p:nvSpPr>
         <p:spPr>
           <a:xfrm>
-            <a:off x="4480559" y="1645920"/>
-            <a:ext cx="3383280" cy="2011680"/>
+            <a:off x="8686800" y="2011680"/>
+            <a:ext cx="2926080" cy="2926080"/>
           </a:xfrm>
           <a:prstGeom prst="roundRect">
             <a:avLst/>
@@ -4179,7 +4406,7 @@
           </a:solidFill>
           <a:ln>
             <a:solidFill>
-              <a:srgbClr val="DBEAFE"/>
+              <a:srgbClr val="CCDDFF"/>
             </a:solidFill>
           </a:ln>
         </p:spPr>
@@ -4207,97 +4434,23 @@
       </p:sp>
       <p:sp>
         <p:nvSpPr>
-          <p:cNvPr id="9" name="TextBox 8"/>
-          <p:cNvSpPr txBox="1"/>
-          <p:nvPr/>
-        </p:nvSpPr>
-        <p:spPr>
-          <a:xfrm>
-            <a:off x="4617720" y="1783080"/>
-            <a:ext cx="3108960" cy="365760"/>
-          </a:xfrm>
-          <a:prstGeom prst="rect">
-            <a:avLst/>
-          </a:prstGeom>
-          <a:noFill/>
-        </p:spPr>
-        <p:txBody>
-          <a:bodyPr wrap="square">
-            <a:spAutoFit/>
-          </a:bodyPr>
-          <a:lstStyle/>
-          <a:p>
-            <a:pPr algn="l">
-              <a:defRPr sz="1600" b="1">
-                <a:solidFill>
-                  <a:srgbClr val="1E3A5F"/>
-                </a:solidFill>
-                <a:latin typeface="Microsoft YaHei"/>
-              </a:defRPr>
-            </a:pPr>
-            <a:r>
-              <a:t>角色扮演</a:t>
-            </a:r>
-          </a:p>
-        </p:txBody>
-      </p:sp>
-      <p:sp>
-        <p:nvSpPr>
-          <p:cNvPr id="10" name="TextBox 9"/>
-          <p:cNvSpPr txBox="1"/>
-          <p:nvPr/>
-        </p:nvSpPr>
-        <p:spPr>
-          <a:xfrm>
-            <a:off x="4617720" y="2194560"/>
-            <a:ext cx="3108960" cy="1280160"/>
-          </a:xfrm>
-          <a:prstGeom prst="rect">
-            <a:avLst/>
-          </a:prstGeom>
-          <a:noFill/>
-        </p:spPr>
-        <p:txBody>
-          <a:bodyPr wrap="square">
-            <a:spAutoFit/>
-          </a:bodyPr>
-          <a:lstStyle/>
-          <a:p>
-            <a:pPr algn="l">
-              <a:defRPr sz="1200" b="0">
-                <a:solidFill>
-                  <a:srgbClr val="5A7A9A"/>
-                </a:solidFill>
-                <a:latin typeface="Microsoft YaHei"/>
-              </a:defRPr>
-            </a:pPr>
-            <a:r>
-              <a:t>每个角色拥有专属开场信息和秘密任务，代入感拉满</a:t>
-            </a:r>
-          </a:p>
-        </p:txBody>
-      </p:sp>
-      <p:sp>
-        <p:nvSpPr>
-          <p:cNvPr id="11" name="Rounded Rectangle 10"/>
+          <p:cNvPr id="14" name="Oval 13"/>
           <p:cNvSpPr/>
           <p:nvPr/>
         </p:nvSpPr>
         <p:spPr>
           <a:xfrm>
-            <a:off x="8229600" y="1645920"/>
-            <a:ext cx="3383280" cy="2011680"/>
-          </a:xfrm>
-          <a:prstGeom prst="roundRect">
+            <a:off x="9692640" y="2286000"/>
+            <a:ext cx="914400" cy="914400"/>
+          </a:xfrm>
+          <a:prstGeom prst="ellipse">
             <a:avLst/>
           </a:prstGeom>
           <a:solidFill>
-            <a:srgbClr val="FFFFFF"/>
+            <a:srgbClr val="E8F0FF"/>
           </a:solidFill>
           <a:ln>
-            <a:solidFill>
-              <a:srgbClr val="DBEAFE"/>
-            </a:solidFill>
+            <a:noFill/>
           </a:ln>
         </p:spPr>
         <p:style>
@@ -4324,14 +4477,14 @@
       </p:sp>
       <p:sp>
         <p:nvSpPr>
-          <p:cNvPr id="12" name="TextBox 11"/>
+          <p:cNvPr id="15" name="TextBox 14"/>
           <p:cNvSpPr txBox="1"/>
           <p:nvPr/>
         </p:nvSpPr>
         <p:spPr>
           <a:xfrm>
-            <a:off x="8366760" y="1783080"/>
-            <a:ext cx="3108960" cy="365760"/>
+            <a:off x="8686800" y="2423160"/>
+            <a:ext cx="2926080" cy="640080"/>
           </a:xfrm>
           <a:prstGeom prst="rect">
             <a:avLst/>
@@ -4344,30 +4497,29 @@
           </a:bodyPr>
           <a:lstStyle/>
           <a:p>
-            <a:pPr algn="l">
-              <a:defRPr sz="1600" b="1">
-                <a:solidFill>
-                  <a:srgbClr val="1E3A5F"/>
+            <a:pPr algn="ctr"/>
+            <a:r>
+              <a:rPr sz="2800" b="0">
+                <a:solidFill>
+                  <a:srgbClr val="1A1A1A"/>
                 </a:solidFill>
                 <a:latin typeface="Microsoft YaHei"/>
-              </a:defRPr>
-            </a:pPr>
-            <a:r>
-              <a:t>AI 动态催化</a:t>
-            </a:r>
-          </a:p>
-        </p:txBody>
-      </p:sp>
-      <p:sp>
-        <p:nvSpPr>
-          <p:cNvPr id="13" name="TextBox 12"/>
+              </a:rPr>
+              <a:t>🎭</a:t>
+            </a:r>
+          </a:p>
+        </p:txBody>
+      </p:sp>
+      <p:sp>
+        <p:nvSpPr>
+          <p:cNvPr id="16" name="TextBox 15"/>
           <p:cNvSpPr txBox="1"/>
           <p:nvPr/>
         </p:nvSpPr>
         <p:spPr>
           <a:xfrm>
-            <a:off x="8366760" y="2194560"/>
-            <a:ext cx="3108960" cy="1280160"/>
+            <a:off x="8686800" y="3291840"/>
+            <a:ext cx="2926080" cy="457200"/>
           </a:xfrm>
           <a:prstGeom prst="rect">
             <a:avLst/>
@@ -4380,75 +4532,29 @@
           </a:bodyPr>
           <a:lstStyle/>
           <a:p>
-            <a:pPr algn="l">
-              <a:defRPr sz="1200" b="0">
-                <a:solidFill>
-                  <a:srgbClr val="5A7A9A"/>
+            <a:pPr algn="ctr"/>
+            <a:r>
+              <a:rPr sz="1800" b="1">
+                <a:solidFill>
+                  <a:srgbClr val="1A1A1A"/>
                 </a:solidFill>
                 <a:latin typeface="Microsoft YaHei"/>
-              </a:defRPr>
-            </a:pPr>
-            <a:r>
-              <a:t>刘看山在关键节点抛出追问和环境事件，推动剧情向下一幕发展</a:t>
-            </a:r>
-          </a:p>
-        </p:txBody>
-      </p:sp>
-      <p:sp>
-        <p:nvSpPr>
-          <p:cNvPr id="14" name="Rounded Rectangle 13"/>
-          <p:cNvSpPr/>
-          <p:nvPr/>
-        </p:nvSpPr>
-        <p:spPr>
-          <a:xfrm>
-            <a:off x="731520" y="4023360"/>
-            <a:ext cx="3383280" cy="2011680"/>
-          </a:xfrm>
-          <a:prstGeom prst="roundRect">
-            <a:avLst/>
-          </a:prstGeom>
-          <a:solidFill>
-            <a:srgbClr val="FFFFFF"/>
-          </a:solidFill>
-          <a:ln>
-            <a:solidFill>
-              <a:srgbClr val="DBEAFE"/>
-            </a:solidFill>
-          </a:ln>
-        </p:spPr>
-        <p:style>
-          <a:lnRef idx="1">
-            <a:schemeClr val="accent1"/>
-          </a:lnRef>
-          <a:fillRef idx="3">
-            <a:schemeClr val="accent1"/>
-          </a:fillRef>
-          <a:effectRef idx="2">
-            <a:schemeClr val="accent1"/>
-          </a:effectRef>
-          <a:fontRef idx="minor">
-            <a:schemeClr val="lt1"/>
-          </a:fontRef>
-        </p:style>
-        <p:txBody>
-          <a:bodyPr rtlCol="0" anchor="ctr"/>
-          <a:lstStyle/>
-          <a:p>
-            <a:pPr algn="ctr"/>
-          </a:p>
-        </p:txBody>
-      </p:sp>
-      <p:sp>
-        <p:nvSpPr>
-          <p:cNvPr id="15" name="TextBox 14"/>
+              </a:rPr>
+              <a:t>故事模式</a:t>
+            </a:r>
+          </a:p>
+        </p:txBody>
+      </p:sp>
+      <p:sp>
+        <p:nvSpPr>
+          <p:cNvPr id="17" name="TextBox 16"/>
           <p:cNvSpPr txBox="1"/>
           <p:nvPr/>
         </p:nvSpPr>
         <p:spPr>
           <a:xfrm>
-            <a:off x="868680" y="4160520"/>
-            <a:ext cx="3108960" cy="365760"/>
+            <a:off x="8869680" y="3749039"/>
+            <a:ext cx="2560320" cy="914400"/>
           </a:xfrm>
           <a:prstGeom prst="rect">
             <a:avLst/>
@@ -4461,30 +4567,33 @@
           </a:bodyPr>
           <a:lstStyle/>
           <a:p>
-            <a:pPr algn="l">
-              <a:defRPr sz="1600" b="1">
-                <a:solidFill>
-                  <a:srgbClr val="1E3A5F"/>
+            <a:pPr algn="ctr"/>
+            <a:r>
+              <a:rPr sz="1200" b="0">
+                <a:solidFill>
+                  <a:srgbClr val="555555"/>
                 </a:solidFill>
                 <a:latin typeface="Microsoft YaHei"/>
-              </a:defRPr>
-            </a:pPr>
-            <a:r>
-              <a:t>四幕结构</a:t>
-            </a:r>
-          </a:p>
-        </p:txBody>
-      </p:sp>
-      <p:sp>
-        <p:nvSpPr>
-          <p:cNvPr id="16" name="TextBox 15"/>
+              </a:rPr>
+              <a:t>选一个角色，揭开历史谜题</a:t>
+            </a:r>
+            <a:br/>
+            <a:r>
+              <a:t>四幕推进，真相由你揭晓</a:t>
+            </a:r>
+          </a:p>
+        </p:txBody>
+      </p:sp>
+      <p:sp>
+        <p:nvSpPr>
+          <p:cNvPr id="18" name="TextBox 17"/>
           <p:cNvSpPr txBox="1"/>
           <p:nvPr/>
         </p:nvSpPr>
         <p:spPr>
           <a:xfrm>
-            <a:off x="868680" y="4572000"/>
-            <a:ext cx="3108960" cy="1280160"/>
+            <a:off x="0" y="5760720"/>
+            <a:ext cx="12191695" cy="365760"/>
           </a:xfrm>
           <a:prstGeom prst="rect">
             <a:avLst/>
@@ -4497,250 +4606,15 @@
           </a:bodyPr>
           <a:lstStyle/>
           <a:p>
-            <a:pPr algn="l">
-              <a:defRPr sz="1200" b="0">
-                <a:solidFill>
-                  <a:srgbClr val="5A7A9A"/>
+            <a:pPr algn="ctr"/>
+            <a:r>
+              <a:rPr sz="1300" b="0">
+                <a:solidFill>
+                  <a:srgbClr val="888888"/>
                 </a:solidFill>
                 <a:latin typeface="Microsoft YaHei"/>
-              </a:defRPr>
-            </a:pPr>
-            <a:r>
-              <a:t>起承转合的经典叙事框架，AI 根据当前幕次调整催化策略</a:t>
-            </a:r>
-          </a:p>
-        </p:txBody>
-      </p:sp>
-      <p:sp>
-        <p:nvSpPr>
-          <p:cNvPr id="17" name="Rounded Rectangle 16"/>
-          <p:cNvSpPr/>
-          <p:nvPr/>
-        </p:nvSpPr>
-        <p:spPr>
-          <a:xfrm>
-            <a:off x="4480559" y="4023360"/>
-            <a:ext cx="3383280" cy="2011680"/>
-          </a:xfrm>
-          <a:prstGeom prst="roundRect">
-            <a:avLst/>
-          </a:prstGeom>
-          <a:solidFill>
-            <a:srgbClr val="FFFFFF"/>
-          </a:solidFill>
-          <a:ln>
-            <a:solidFill>
-              <a:srgbClr val="DBEAFE"/>
-            </a:solidFill>
-          </a:ln>
-        </p:spPr>
-        <p:style>
-          <a:lnRef idx="1">
-            <a:schemeClr val="accent1"/>
-          </a:lnRef>
-          <a:fillRef idx="3">
-            <a:schemeClr val="accent1"/>
-          </a:fillRef>
-          <a:effectRef idx="2">
-            <a:schemeClr val="accent1"/>
-          </a:effectRef>
-          <a:fontRef idx="minor">
-            <a:schemeClr val="lt1"/>
-          </a:fontRef>
-        </p:style>
-        <p:txBody>
-          <a:bodyPr rtlCol="0" anchor="ctr"/>
-          <a:lstStyle/>
-          <a:p>
-            <a:pPr algn="ctr"/>
-          </a:p>
-        </p:txBody>
-      </p:sp>
-      <p:sp>
-        <p:nvSpPr>
-          <p:cNvPr id="18" name="TextBox 17"/>
-          <p:cNvSpPr txBox="1"/>
-          <p:nvPr/>
-        </p:nvSpPr>
-        <p:spPr>
-          <a:xfrm>
-            <a:off x="4617720" y="4160520"/>
-            <a:ext cx="3108960" cy="365760"/>
-          </a:xfrm>
-          <a:prstGeom prst="rect">
-            <a:avLst/>
-          </a:prstGeom>
-          <a:noFill/>
-        </p:spPr>
-        <p:txBody>
-          <a:bodyPr wrap="square">
-            <a:spAutoFit/>
-          </a:bodyPr>
-          <a:lstStyle/>
-          <a:p>
-            <a:pPr algn="l">
-              <a:defRPr sz="1600" b="1">
-                <a:solidFill>
-                  <a:srgbClr val="1E3A5F"/>
-                </a:solidFill>
-                <a:latin typeface="Microsoft YaHei"/>
-              </a:defRPr>
-            </a:pPr>
-            <a:r>
-              <a:t>火花标记</a:t>
-            </a:r>
-          </a:p>
-        </p:txBody>
-      </p:sp>
-      <p:sp>
-        <p:nvSpPr>
-          <p:cNvPr id="19" name="TextBox 18"/>
-          <p:cNvSpPr txBox="1"/>
-          <p:nvPr/>
-        </p:nvSpPr>
-        <p:spPr>
-          <a:xfrm>
-            <a:off x="4617720" y="4572000"/>
-            <a:ext cx="3108960" cy="1280160"/>
-          </a:xfrm>
-          <a:prstGeom prst="rect">
-            <a:avLst/>
-          </a:prstGeom>
-          <a:noFill/>
-        </p:spPr>
-        <p:txBody>
-          <a:bodyPr wrap="square">
-            <a:spAutoFit/>
-          </a:bodyPr>
-          <a:lstStyle/>
-          <a:p>
-            <a:pPr algn="l">
-              <a:defRPr sz="1200" b="0">
-                <a:solidFill>
-                  <a:srgbClr val="5A7A9A"/>
-                </a:solidFill>
-                <a:latin typeface="Microsoft YaHei"/>
-              </a:defRPr>
-            </a:pPr>
-            <a:r>
-              <a:t>玩家标记精彩对白，沉淀为可复用的故事资产</a:t>
-            </a:r>
-          </a:p>
-        </p:txBody>
-      </p:sp>
-      <p:sp>
-        <p:nvSpPr>
-          <p:cNvPr id="20" name="Rounded Rectangle 19"/>
-          <p:cNvSpPr/>
-          <p:nvPr/>
-        </p:nvSpPr>
-        <p:spPr>
-          <a:xfrm>
-            <a:off x="8229600" y="4023360"/>
-            <a:ext cx="3383280" cy="2011680"/>
-          </a:xfrm>
-          <a:prstGeom prst="roundRect">
-            <a:avLst/>
-          </a:prstGeom>
-          <a:solidFill>
-            <a:srgbClr val="FFFFFF"/>
-          </a:solidFill>
-          <a:ln>
-            <a:solidFill>
-              <a:srgbClr val="DBEAFE"/>
-            </a:solidFill>
-          </a:ln>
-        </p:spPr>
-        <p:style>
-          <a:lnRef idx="1">
-            <a:schemeClr val="accent1"/>
-          </a:lnRef>
-          <a:fillRef idx="3">
-            <a:schemeClr val="accent1"/>
-          </a:fillRef>
-          <a:effectRef idx="2">
-            <a:schemeClr val="accent1"/>
-          </a:effectRef>
-          <a:fontRef idx="minor">
-            <a:schemeClr val="lt1"/>
-          </a:fontRef>
-        </p:style>
-        <p:txBody>
-          <a:bodyPr rtlCol="0" anchor="ctr"/>
-          <a:lstStyle/>
-          <a:p>
-            <a:pPr algn="ctr"/>
-          </a:p>
-        </p:txBody>
-      </p:sp>
-      <p:sp>
-        <p:nvSpPr>
-          <p:cNvPr id="21" name="TextBox 20"/>
-          <p:cNvSpPr txBox="1"/>
-          <p:nvPr/>
-        </p:nvSpPr>
-        <p:spPr>
-          <a:xfrm>
-            <a:off x="8366760" y="4160520"/>
-            <a:ext cx="3108960" cy="365760"/>
-          </a:xfrm>
-          <a:prstGeom prst="rect">
-            <a:avLst/>
-          </a:prstGeom>
-          <a:noFill/>
-        </p:spPr>
-        <p:txBody>
-          <a:bodyPr wrap="square">
-            <a:spAutoFit/>
-          </a:bodyPr>
-          <a:lstStyle/>
-          <a:p>
-            <a:pPr algn="l">
-              <a:defRPr sz="1600" b="1">
-                <a:solidFill>
-                  <a:srgbClr val="1E3A5F"/>
-                </a:solidFill>
-                <a:latin typeface="Microsoft YaHei"/>
-              </a:defRPr>
-            </a:pPr>
-            <a:r>
-              <a:t>一键成稿</a:t>
-            </a:r>
-          </a:p>
-        </p:txBody>
-      </p:sp>
-      <p:sp>
-        <p:nvSpPr>
-          <p:cNvPr id="22" name="TextBox 21"/>
-          <p:cNvSpPr txBox="1"/>
-          <p:nvPr/>
-        </p:nvSpPr>
-        <p:spPr>
-          <a:xfrm>
-            <a:off x="8366760" y="4572000"/>
-            <a:ext cx="3108960" cy="1280160"/>
-          </a:xfrm>
-          <a:prstGeom prst="rect">
-            <a:avLst/>
-          </a:prstGeom>
-          <a:noFill/>
-        </p:spPr>
-        <p:txBody>
-          <a:bodyPr wrap="square">
-            <a:spAutoFit/>
-          </a:bodyPr>
-          <a:lstStyle/>
-          <a:p>
-            <a:pPr algn="l">
-              <a:defRPr sz="1200" b="0">
-                <a:solidFill>
-                  <a:srgbClr val="5A7A9A"/>
-                </a:solidFill>
-                <a:latin typeface="Microsoft YaHei"/>
-              </a:defRPr>
-            </a:pPr>
-            <a:r>
-              <a:t>对白结束后自动生成剧本格式故事，降低创作门槛</a:t>
+              </a:rPr>
+              <a:t>AI不是作者，是催化剂。你才是故事的主角。</a:t>
             </a:r>
           </a:p>
         </p:txBody>
@@ -4756,6 +4630,14 @@
 <file path=ppt/slides/slide4.xml><?xml version="1.0" encoding="utf-8"?>
 <p:sld xmlns:a="http://schemas.openxmlformats.org/drawingml/2006/main" xmlns:p="http://schemas.openxmlformats.org/presentationml/2006/main" xmlns:r="http://schemas.openxmlformats.org/officeDocument/2006/relationships">
   <p:cSld>
+    <p:bg>
+      <p:bgPr>
+        <a:solidFill>
+          <a:srgbClr val="FFFFFF"/>
+        </a:solidFill>
+        <a:effectLst/>
+      </p:bgPr>
+    </p:bg>
     <p:spTree>
       <p:nvGrpSpPr>
         <p:cNvPr id="1" name=""/>
@@ -4765,23 +4647,95 @@
       <p:grpSpPr/>
       <p:sp>
         <p:nvSpPr>
-          <p:cNvPr id="2" name="Rectangle 1"/>
+          <p:cNvPr id="2" name="TextBox 1"/>
+          <p:cNvSpPr txBox="1"/>
+          <p:nvPr/>
+        </p:nvSpPr>
+        <p:spPr>
+          <a:xfrm>
+            <a:off x="0" y="548640"/>
+            <a:ext cx="12191695" cy="822960"/>
+          </a:xfrm>
+          <a:prstGeom prst="rect">
+            <a:avLst/>
+          </a:prstGeom>
+          <a:noFill/>
+        </p:spPr>
+        <p:txBody>
+          <a:bodyPr wrap="square">
+            <a:spAutoFit/>
+          </a:bodyPr>
+          <a:lstStyle/>
+          <a:p>
+            <a:pPr algn="ctr"/>
+            <a:r>
+              <a:rPr sz="4200" b="1">
+                <a:solidFill>
+                  <a:srgbClr val="0066FF"/>
+                </a:solidFill>
+                <a:latin typeface="Microsoft YaHei"/>
+              </a:rPr>
+              <a:t>一个Agent，11种角色</a:t>
+            </a:r>
+          </a:p>
+        </p:txBody>
+      </p:sp>
+      <p:sp>
+        <p:nvSpPr>
+          <p:cNvPr id="3" name="TextBox 2"/>
+          <p:cNvSpPr txBox="1"/>
+          <p:nvPr/>
+        </p:nvSpPr>
+        <p:spPr>
+          <a:xfrm>
+            <a:off x="0" y="1280160"/>
+            <a:ext cx="12191695" cy="365760"/>
+          </a:xfrm>
+          <a:prstGeom prst="rect">
+            <a:avLst/>
+          </a:prstGeom>
+          <a:noFill/>
+        </p:spPr>
+        <p:txBody>
+          <a:bodyPr wrap="square">
+            <a:spAutoFit/>
+          </a:bodyPr>
+          <a:lstStyle/>
+          <a:p>
+            <a:pPr algn="ctr"/>
+            <a:r>
+              <a:rPr sz="1600" b="0">
+                <a:solidFill>
+                  <a:srgbClr val="555555"/>
+                </a:solidFill>
+                <a:latin typeface="Microsoft YaHei"/>
+              </a:rPr>
+              <a:t>刘看山 —— 最懂你的AI副导演</a:t>
+            </a:r>
+          </a:p>
+        </p:txBody>
+      </p:sp>
+      <p:sp>
+        <p:nvSpPr>
+          <p:cNvPr id="4" name="Rounded Rectangle 3"/>
           <p:cNvSpPr/>
           <p:nvPr/>
         </p:nvSpPr>
         <p:spPr>
           <a:xfrm>
-            <a:off x="0" y="0"/>
-            <a:ext cx="12191695" cy="6858000"/>
-          </a:xfrm>
-          <a:prstGeom prst="rect">
+            <a:off x="1097280" y="1920240"/>
+            <a:ext cx="2560320" cy="457200"/>
+          </a:xfrm>
+          <a:prstGeom prst="roundRect">
             <a:avLst/>
           </a:prstGeom>
           <a:solidFill>
-            <a:srgbClr val="F0F7FF"/>
+            <a:srgbClr val="FFFFFF"/>
           </a:solidFill>
           <a:ln>
-            <a:noFill/>
+            <a:solidFill>
+              <a:srgbClr val="CCDDFF"/>
+            </a:solidFill>
           </a:ln>
         </p:spPr>
         <p:style>
@@ -4808,14 +4762,14 @@
       </p:sp>
       <p:sp>
         <p:nvSpPr>
-          <p:cNvPr id="3" name="TextBox 2"/>
+          <p:cNvPr id="5" name="TextBox 4"/>
           <p:cNvSpPr txBox="1"/>
           <p:nvPr/>
         </p:nvSpPr>
         <p:spPr>
           <a:xfrm>
-            <a:off x="914400" y="1371600"/>
-            <a:ext cx="10362895" cy="1097280"/>
+            <a:off x="1097280" y="1965960"/>
+            <a:ext cx="2560320" cy="365760"/>
           </a:xfrm>
           <a:prstGeom prst="rect">
             <a:avLst/>
@@ -4828,88 +4782,15 @@
           </a:bodyPr>
           <a:lstStyle/>
           <a:p>
-            <a:pPr algn="ctr">
-              <a:defRPr sz="5600" b="1">
-                <a:solidFill>
-                  <a:srgbClr val="1E3A5F"/>
+            <a:pPr algn="ctr"/>
+            <a:r>
+              <a:rPr sz="1300" b="0">
+                <a:solidFill>
+                  <a:srgbClr val="0066FF"/>
                 </a:solidFill>
                 <a:latin typeface="Microsoft YaHei"/>
-              </a:defRPr>
-            </a:pPr>
-            <a:r>
-              <a:t>从玩故事</a:t>
-            </a:r>
-          </a:p>
-        </p:txBody>
-      </p:sp>
-      <p:sp>
-        <p:nvSpPr>
-          <p:cNvPr id="4" name="TextBox 3"/>
-          <p:cNvSpPr txBox="1"/>
-          <p:nvPr/>
-        </p:nvSpPr>
-        <p:spPr>
-          <a:xfrm>
-            <a:off x="914400" y="2286000"/>
-            <a:ext cx="10362895" cy="914400"/>
-          </a:xfrm>
-          <a:prstGeom prst="rect">
-            <a:avLst/>
-          </a:prstGeom>
-          <a:noFill/>
-        </p:spPr>
-        <p:txBody>
-          <a:bodyPr wrap="square">
-            <a:spAutoFit/>
-          </a:bodyPr>
-          <a:lstStyle/>
-          <a:p>
-            <a:pPr algn="ctr">
-              <a:defRPr sz="5600" b="1">
-                <a:solidFill>
-                  <a:srgbClr val="3B82F6"/>
-                </a:solidFill>
-                <a:latin typeface="Microsoft YaHei"/>
-              </a:defRPr>
-            </a:pPr>
-            <a:r>
-              <a:t>到写故事</a:t>
-            </a:r>
-          </a:p>
-        </p:txBody>
-      </p:sp>
-      <p:sp>
-        <p:nvSpPr>
-          <p:cNvPr id="5" name="TextBox 4"/>
-          <p:cNvSpPr txBox="1"/>
-          <p:nvPr/>
-        </p:nvSpPr>
-        <p:spPr>
-          <a:xfrm>
-            <a:off x="914400" y="3291840"/>
-            <a:ext cx="10362895" cy="548640"/>
-          </a:xfrm>
-          <a:prstGeom prst="rect">
-            <a:avLst/>
-          </a:prstGeom>
-          <a:noFill/>
-        </p:spPr>
-        <p:txBody>
-          <a:bodyPr wrap="square">
-            <a:spAutoFit/>
-          </a:bodyPr>
-          <a:lstStyle/>
-          <a:p>
-            <a:pPr algn="ctr">
-              <a:defRPr sz="2800" b="0">
-                <a:solidFill>
-                  <a:srgbClr val="5A7A9A"/>
-                </a:solidFill>
-                <a:latin typeface="Microsoft YaHei"/>
-              </a:defRPr>
-            </a:pPr>
-            <a:r>
-              <a:t>人人都是创作者</a:t>
+              </a:rPr>
+              <a:t>Companion · 陪伴者</a:t>
             </a:r>
           </a:p>
         </p:txBody>
@@ -4922,17 +4803,19 @@
         </p:nvSpPr>
         <p:spPr>
           <a:xfrm>
-            <a:off x="2468880" y="4572000"/>
-            <a:ext cx="731520" cy="731520"/>
+            <a:off x="3840480" y="1920240"/>
+            <a:ext cx="2560320" cy="457200"/>
           </a:xfrm>
           <a:prstGeom prst="roundRect">
             <a:avLst/>
           </a:prstGeom>
           <a:solidFill>
-            <a:srgbClr val="DBEAFE"/>
+            <a:srgbClr val="FFFFFF"/>
           </a:solidFill>
           <a:ln>
-            <a:noFill/>
+            <a:solidFill>
+              <a:srgbClr val="CCDDFF"/>
+            </a:solidFill>
           </a:ln>
         </p:spPr>
         <p:style>
@@ -4965,8 +4848,8 @@
         </p:nvSpPr>
         <p:spPr>
           <a:xfrm>
-            <a:off x="1371600" y="5577840"/>
-            <a:ext cx="3657600" cy="365760"/>
+            <a:off x="3840480" y="1965960"/>
+            <a:ext cx="2560320" cy="365760"/>
           </a:xfrm>
           <a:prstGeom prst="rect">
             <a:avLst/>
@@ -4979,75 +4862,40 @@
           </a:bodyPr>
           <a:lstStyle/>
           <a:p>
-            <a:pPr algn="ctr">
-              <a:defRPr sz="1600" b="1">
-                <a:solidFill>
-                  <a:srgbClr val="1E3A5F"/>
+            <a:pPr algn="ctr"/>
+            <a:r>
+              <a:rPr sz="1300" b="0">
+                <a:solidFill>
+                  <a:srgbClr val="0066FF"/>
                 </a:solidFill>
                 <a:latin typeface="Microsoft YaHei"/>
-              </a:defRPr>
-            </a:pPr>
-            <a:r>
-              <a:t>降低门槛</a:t>
-            </a:r>
-          </a:p>
-        </p:txBody>
-      </p:sp>
-      <p:sp>
-        <p:nvSpPr>
-          <p:cNvPr id="8" name="TextBox 7"/>
-          <p:cNvSpPr txBox="1"/>
-          <p:nvPr/>
-        </p:nvSpPr>
-        <p:spPr>
-          <a:xfrm>
-            <a:off x="1371600" y="5943600"/>
-            <a:ext cx="3657600" cy="548640"/>
-          </a:xfrm>
-          <a:prstGeom prst="rect">
-            <a:avLst/>
-          </a:prstGeom>
-          <a:noFill/>
-        </p:spPr>
-        <p:txBody>
-          <a:bodyPr wrap="square">
-            <a:spAutoFit/>
-          </a:bodyPr>
-          <a:lstStyle/>
-          <a:p>
-            <a:pPr algn="ctr">
-              <a:defRPr sz="1200" b="0">
-                <a:solidFill>
-                  <a:srgbClr val="5A7A9A"/>
-                </a:solidFill>
-                <a:latin typeface="Microsoft YaHei"/>
-              </a:defRPr>
-            </a:pPr>
-            <a:r>
-              <a:t>不需要专业背景，有想法就能开始</a:t>
-            </a:r>
-          </a:p>
-        </p:txBody>
-      </p:sp>
-      <p:sp>
-        <p:nvSpPr>
-          <p:cNvPr id="9" name="Rounded Rectangle 8"/>
+              </a:rPr>
+              <a:t>DM · 主持人</a:t>
+            </a:r>
+          </a:p>
+        </p:txBody>
+      </p:sp>
+      <p:sp>
+        <p:nvSpPr>
+          <p:cNvPr id="8" name="Rounded Rectangle 7"/>
           <p:cNvSpPr/>
           <p:nvPr/>
         </p:nvSpPr>
         <p:spPr>
           <a:xfrm>
-            <a:off x="6126480" y="4572000"/>
-            <a:ext cx="731520" cy="731520"/>
+            <a:off x="6583680" y="1920240"/>
+            <a:ext cx="2560320" cy="457200"/>
           </a:xfrm>
           <a:prstGeom prst="roundRect">
             <a:avLst/>
           </a:prstGeom>
           <a:solidFill>
-            <a:srgbClr val="DBEAFE"/>
+            <a:srgbClr val="FFFFFF"/>
           </a:solidFill>
           <a:ln>
-            <a:noFill/>
+            <a:solidFill>
+              <a:srgbClr val="CCDDFF"/>
+            </a:solidFill>
           </a:ln>
         </p:spPr>
         <p:style>
@@ -5074,14 +4922,14 @@
       </p:sp>
       <p:sp>
         <p:nvSpPr>
-          <p:cNvPr id="10" name="TextBox 9"/>
+          <p:cNvPr id="9" name="TextBox 8"/>
           <p:cNvSpPr txBox="1"/>
           <p:nvPr/>
         </p:nvSpPr>
         <p:spPr>
           <a:xfrm>
-            <a:off x="5029200" y="5577840"/>
-            <a:ext cx="3657600" cy="365760"/>
+            <a:off x="6583680" y="1965960"/>
+            <a:ext cx="2560320" cy="365760"/>
           </a:xfrm>
           <a:prstGeom prst="rect">
             <a:avLst/>
@@ -5094,75 +4942,40 @@
           </a:bodyPr>
           <a:lstStyle/>
           <a:p>
-            <a:pPr algn="ctr">
-              <a:defRPr sz="1600" b="1">
-                <a:solidFill>
-                  <a:srgbClr val="1E3A5F"/>
+            <a:pPr algn="ctr"/>
+            <a:r>
+              <a:rPr sz="1300" b="0">
+                <a:solidFill>
+                  <a:srgbClr val="0066FF"/>
                 </a:solidFill>
                 <a:latin typeface="Microsoft YaHei"/>
-              </a:defRPr>
-            </a:pPr>
-            <a:r>
-              <a:t>协作共创</a:t>
-            </a:r>
-          </a:p>
-        </p:txBody>
-      </p:sp>
-      <p:sp>
-        <p:nvSpPr>
-          <p:cNvPr id="11" name="TextBox 10"/>
-          <p:cNvSpPr txBox="1"/>
-          <p:nvPr/>
-        </p:nvSpPr>
-        <p:spPr>
-          <a:xfrm>
-            <a:off x="5029200" y="5943600"/>
-            <a:ext cx="3657600" cy="548640"/>
-          </a:xfrm>
-          <a:prstGeom prst="rect">
-            <a:avLst/>
-          </a:prstGeom>
-          <a:noFill/>
-        </p:spPr>
-        <p:txBody>
-          <a:bodyPr wrap="square">
-            <a:spAutoFit/>
-          </a:bodyPr>
-          <a:lstStyle/>
-          <a:p>
-            <a:pPr algn="ctr">
-              <a:defRPr sz="1200" b="0">
-                <a:solidFill>
-                  <a:srgbClr val="5A7A9A"/>
-                </a:solidFill>
-                <a:latin typeface="Microsoft YaHei"/>
-              </a:defRPr>
-            </a:pPr>
-            <a:r>
-              <a:t>多人实时碰撞，让1+1&gt;2</a:t>
-            </a:r>
-          </a:p>
-        </p:txBody>
-      </p:sp>
-      <p:sp>
-        <p:nvSpPr>
-          <p:cNvPr id="12" name="Rounded Rectangle 11"/>
+              </a:rPr>
+              <a:t>Story Fallback · 故事替补</a:t>
+            </a:r>
+          </a:p>
+        </p:txBody>
+      </p:sp>
+      <p:sp>
+        <p:nvSpPr>
+          <p:cNvPr id="10" name="Rounded Rectangle 9"/>
           <p:cNvSpPr/>
           <p:nvPr/>
         </p:nvSpPr>
         <p:spPr>
           <a:xfrm>
-            <a:off x="9784080" y="4572000"/>
-            <a:ext cx="731520" cy="731520"/>
+            <a:off x="9326880" y="1920240"/>
+            <a:ext cx="2560320" cy="457200"/>
           </a:xfrm>
           <a:prstGeom prst="roundRect">
             <a:avLst/>
           </a:prstGeom>
           <a:solidFill>
-            <a:srgbClr val="DBEAFE"/>
+            <a:srgbClr val="FFFFFF"/>
           </a:solidFill>
           <a:ln>
-            <a:noFill/>
+            <a:solidFill>
+              <a:srgbClr val="CCDDFF"/>
+            </a:solidFill>
           </a:ln>
         </p:spPr>
         <p:style>
@@ -5189,14 +5002,14 @@
       </p:sp>
       <p:sp>
         <p:nvSpPr>
-          <p:cNvPr id="13" name="TextBox 12"/>
+          <p:cNvPr id="11" name="TextBox 10"/>
           <p:cNvSpPr txBox="1"/>
           <p:nvPr/>
         </p:nvSpPr>
         <p:spPr>
           <a:xfrm>
-            <a:off x="8686800" y="5577840"/>
-            <a:ext cx="3657600" cy="365760"/>
+            <a:off x="9326880" y="1965960"/>
+            <a:ext cx="2560320" cy="365760"/>
           </a:xfrm>
           <a:prstGeom prst="rect">
             <a:avLst/>
@@ -5209,30 +5022,74 @@
           </a:bodyPr>
           <a:lstStyle/>
           <a:p>
-            <a:pPr algn="ctr">
-              <a:defRPr sz="1600" b="1">
-                <a:solidFill>
-                  <a:srgbClr val="1E3A5F"/>
+            <a:pPr algn="ctr"/>
+            <a:r>
+              <a:rPr sz="1300" b="0">
+                <a:solidFill>
+                  <a:srgbClr val="0066FF"/>
                 </a:solidFill>
                 <a:latin typeface="Microsoft YaHei"/>
-              </a:defRPr>
-            </a:pPr>
-            <a:r>
-              <a:t>持续进化</a:t>
-            </a:r>
-          </a:p>
-        </p:txBody>
-      </p:sp>
-      <p:sp>
-        <p:nvSpPr>
-          <p:cNvPr id="14" name="TextBox 13"/>
+              </a:rPr>
+              <a:t>AI副导演 · 剧情把控</a:t>
+            </a:r>
+          </a:p>
+        </p:txBody>
+      </p:sp>
+      <p:sp>
+        <p:nvSpPr>
+          <p:cNvPr id="12" name="Rounded Rectangle 11"/>
+          <p:cNvSpPr/>
+          <p:nvPr/>
+        </p:nvSpPr>
+        <p:spPr>
+          <a:xfrm>
+            <a:off x="1097280" y="2743200"/>
+            <a:ext cx="2560320" cy="457200"/>
+          </a:xfrm>
+          <a:prstGeom prst="roundRect">
+            <a:avLst/>
+          </a:prstGeom>
+          <a:solidFill>
+            <a:srgbClr val="FFFFFF"/>
+          </a:solidFill>
+          <a:ln>
+            <a:solidFill>
+              <a:srgbClr val="CCDDFF"/>
+            </a:solidFill>
+          </a:ln>
+        </p:spPr>
+        <p:style>
+          <a:lnRef idx="1">
+            <a:schemeClr val="accent1"/>
+          </a:lnRef>
+          <a:fillRef idx="3">
+            <a:schemeClr val="accent1"/>
+          </a:fillRef>
+          <a:effectRef idx="2">
+            <a:schemeClr val="accent1"/>
+          </a:effectRef>
+          <a:fontRef idx="minor">
+            <a:schemeClr val="lt1"/>
+          </a:fontRef>
+        </p:style>
+        <p:txBody>
+          <a:bodyPr rtlCol="0" anchor="ctr"/>
+          <a:lstStyle/>
+          <a:p>
+            <a:pPr algn="ctr"/>
+          </a:p>
+        </p:txBody>
+      </p:sp>
+      <p:sp>
+        <p:nvSpPr>
+          <p:cNvPr id="13" name="TextBox 12"/>
           <p:cNvSpPr txBox="1"/>
           <p:nvPr/>
         </p:nvSpPr>
         <p:spPr>
           <a:xfrm>
-            <a:off x="8686800" y="5943600"/>
-            <a:ext cx="3657600" cy="548640"/>
+            <a:off x="1097280" y="2788920"/>
+            <a:ext cx="2560320" cy="365760"/>
           </a:xfrm>
           <a:prstGeom prst="rect">
             <a:avLst/>
@@ -5245,16 +5102,530 @@
           </a:bodyPr>
           <a:lstStyle/>
           <a:p>
-            <a:pPr algn="ctr">
-              <a:defRPr sz="1200" b="0">
-                <a:solidFill>
-                  <a:srgbClr val="5A7A9A"/>
+            <a:pPr algn="ctr"/>
+            <a:r>
+              <a:rPr sz="1300" b="0">
+                <a:solidFill>
+                  <a:srgbClr val="0066FF"/>
                 </a:solidFill>
                 <a:latin typeface="Microsoft YaHei"/>
-              </a:defRPr>
-            </a:pPr>
-            <a:r>
-              <a:t>AI学习每次交互，越用越懂你</a:t>
+              </a:rPr>
+              <a:t>Catalyst · 催化剂</a:t>
+            </a:r>
+          </a:p>
+        </p:txBody>
+      </p:sp>
+      <p:sp>
+        <p:nvSpPr>
+          <p:cNvPr id="14" name="Rounded Rectangle 13"/>
+          <p:cNvSpPr/>
+          <p:nvPr/>
+        </p:nvSpPr>
+        <p:spPr>
+          <a:xfrm>
+            <a:off x="3840480" y="2743200"/>
+            <a:ext cx="2560320" cy="457200"/>
+          </a:xfrm>
+          <a:prstGeom prst="roundRect">
+            <a:avLst/>
+          </a:prstGeom>
+          <a:solidFill>
+            <a:srgbClr val="FFFFFF"/>
+          </a:solidFill>
+          <a:ln>
+            <a:solidFill>
+              <a:srgbClr val="CCDDFF"/>
+            </a:solidFill>
+          </a:ln>
+        </p:spPr>
+        <p:style>
+          <a:lnRef idx="1">
+            <a:schemeClr val="accent1"/>
+          </a:lnRef>
+          <a:fillRef idx="3">
+            <a:schemeClr val="accent1"/>
+          </a:fillRef>
+          <a:effectRef idx="2">
+            <a:schemeClr val="accent1"/>
+          </a:effectRef>
+          <a:fontRef idx="minor">
+            <a:schemeClr val="lt1"/>
+          </a:fontRef>
+        </p:style>
+        <p:txBody>
+          <a:bodyPr rtlCol="0" anchor="ctr"/>
+          <a:lstStyle/>
+          <a:p>
+            <a:pPr algn="ctr"/>
+          </a:p>
+        </p:txBody>
+      </p:sp>
+      <p:sp>
+        <p:nvSpPr>
+          <p:cNvPr id="15" name="TextBox 14"/>
+          <p:cNvSpPr txBox="1"/>
+          <p:nvPr/>
+        </p:nvSpPr>
+        <p:spPr>
+          <a:xfrm>
+            <a:off x="3840480" y="2788920"/>
+            <a:ext cx="2560320" cy="365760"/>
+          </a:xfrm>
+          <a:prstGeom prst="rect">
+            <a:avLst/>
+          </a:prstGeom>
+          <a:noFill/>
+        </p:spPr>
+        <p:txBody>
+          <a:bodyPr wrap="square">
+            <a:spAutoFit/>
+          </a:bodyPr>
+          <a:lstStyle/>
+          <a:p>
+            <a:pPr algn="ctr"/>
+            <a:r>
+              <a:rPr sz="1300" b="0">
+                <a:solidFill>
+                  <a:srgbClr val="0066FF"/>
+                </a:solidFill>
+                <a:latin typeface="Microsoft YaHei"/>
+              </a:rPr>
+              <a:t>Healer · 疗愈师</a:t>
+            </a:r>
+          </a:p>
+        </p:txBody>
+      </p:sp>
+      <p:sp>
+        <p:nvSpPr>
+          <p:cNvPr id="16" name="Rounded Rectangle 15"/>
+          <p:cNvSpPr/>
+          <p:nvPr/>
+        </p:nvSpPr>
+        <p:spPr>
+          <a:xfrm>
+            <a:off x="6583680" y="2743200"/>
+            <a:ext cx="2560320" cy="457200"/>
+          </a:xfrm>
+          <a:prstGeom prst="roundRect">
+            <a:avLst/>
+          </a:prstGeom>
+          <a:solidFill>
+            <a:srgbClr val="FFFFFF"/>
+          </a:solidFill>
+          <a:ln>
+            <a:solidFill>
+              <a:srgbClr val="CCDDFF"/>
+            </a:solidFill>
+          </a:ln>
+        </p:spPr>
+        <p:style>
+          <a:lnRef idx="1">
+            <a:schemeClr val="accent1"/>
+          </a:lnRef>
+          <a:fillRef idx="3">
+            <a:schemeClr val="accent1"/>
+          </a:fillRef>
+          <a:effectRef idx="2">
+            <a:schemeClr val="accent1"/>
+          </a:effectRef>
+          <a:fontRef idx="minor">
+            <a:schemeClr val="lt1"/>
+          </a:fontRef>
+        </p:style>
+        <p:txBody>
+          <a:bodyPr rtlCol="0" anchor="ctr"/>
+          <a:lstStyle/>
+          <a:p>
+            <a:pPr algn="ctr"/>
+          </a:p>
+        </p:txBody>
+      </p:sp>
+      <p:sp>
+        <p:nvSpPr>
+          <p:cNvPr id="17" name="TextBox 16"/>
+          <p:cNvSpPr txBox="1"/>
+          <p:nvPr/>
+        </p:nvSpPr>
+        <p:spPr>
+          <a:xfrm>
+            <a:off x="6583680" y="2788920"/>
+            <a:ext cx="2560320" cy="365760"/>
+          </a:xfrm>
+          <a:prstGeom prst="rect">
+            <a:avLst/>
+          </a:prstGeom>
+          <a:noFill/>
+        </p:spPr>
+        <p:txBody>
+          <a:bodyPr wrap="square">
+            <a:spAutoFit/>
+          </a:bodyPr>
+          <a:lstStyle/>
+          <a:p>
+            <a:pPr algn="ctr"/>
+            <a:r>
+              <a:rPr sz="1300" b="0">
+                <a:solidFill>
+                  <a:srgbClr val="0066FF"/>
+                </a:solidFill>
+                <a:latin typeface="Microsoft YaHei"/>
+              </a:rPr>
+              <a:t>Reviewer · 审稿人</a:t>
+            </a:r>
+          </a:p>
+        </p:txBody>
+      </p:sp>
+      <p:sp>
+        <p:nvSpPr>
+          <p:cNvPr id="18" name="Rounded Rectangle 17"/>
+          <p:cNvSpPr/>
+          <p:nvPr/>
+        </p:nvSpPr>
+        <p:spPr>
+          <a:xfrm>
+            <a:off x="9326880" y="2743200"/>
+            <a:ext cx="2560320" cy="457200"/>
+          </a:xfrm>
+          <a:prstGeom prst="roundRect">
+            <a:avLst/>
+          </a:prstGeom>
+          <a:solidFill>
+            <a:srgbClr val="FFFFFF"/>
+          </a:solidFill>
+          <a:ln>
+            <a:solidFill>
+              <a:srgbClr val="CCDDFF"/>
+            </a:solidFill>
+          </a:ln>
+        </p:spPr>
+        <p:style>
+          <a:lnRef idx="1">
+            <a:schemeClr val="accent1"/>
+          </a:lnRef>
+          <a:fillRef idx="3">
+            <a:schemeClr val="accent1"/>
+          </a:fillRef>
+          <a:effectRef idx="2">
+            <a:schemeClr val="accent1"/>
+          </a:effectRef>
+          <a:fontRef idx="minor">
+            <a:schemeClr val="lt1"/>
+          </a:fontRef>
+        </p:style>
+        <p:txBody>
+          <a:bodyPr rtlCol="0" anchor="ctr"/>
+          <a:lstStyle/>
+          <a:p>
+            <a:pPr algn="ctr"/>
+          </a:p>
+        </p:txBody>
+      </p:sp>
+      <p:sp>
+        <p:nvSpPr>
+          <p:cNvPr id="19" name="TextBox 18"/>
+          <p:cNvSpPr txBox="1"/>
+          <p:nvPr/>
+        </p:nvSpPr>
+        <p:spPr>
+          <a:xfrm>
+            <a:off x="9326880" y="2788920"/>
+            <a:ext cx="2560320" cy="365760"/>
+          </a:xfrm>
+          <a:prstGeom prst="rect">
+            <a:avLst/>
+          </a:prstGeom>
+          <a:noFill/>
+        </p:spPr>
+        <p:txBody>
+          <a:bodyPr wrap="square">
+            <a:spAutoFit/>
+          </a:bodyPr>
+          <a:lstStyle/>
+          <a:p>
+            <a:pPr algn="ctr"/>
+            <a:r>
+              <a:rPr sz="1300" b="0">
+                <a:solidFill>
+                  <a:srgbClr val="0066FF"/>
+                </a:solidFill>
+                <a:latin typeface="Microsoft YaHei"/>
+              </a:rPr>
+              <a:t>Summarizer · 总结者</a:t>
+            </a:r>
+          </a:p>
+        </p:txBody>
+      </p:sp>
+      <p:sp>
+        <p:nvSpPr>
+          <p:cNvPr id="20" name="Rounded Rectangle 19"/>
+          <p:cNvSpPr/>
+          <p:nvPr/>
+        </p:nvSpPr>
+        <p:spPr>
+          <a:xfrm>
+            <a:off x="1097280" y="3566160"/>
+            <a:ext cx="2560320" cy="457200"/>
+          </a:xfrm>
+          <a:prstGeom prst="roundRect">
+            <a:avLst/>
+          </a:prstGeom>
+          <a:solidFill>
+            <a:srgbClr val="FFFFFF"/>
+          </a:solidFill>
+          <a:ln>
+            <a:solidFill>
+              <a:srgbClr val="CCDDFF"/>
+            </a:solidFill>
+          </a:ln>
+        </p:spPr>
+        <p:style>
+          <a:lnRef idx="1">
+            <a:schemeClr val="accent1"/>
+          </a:lnRef>
+          <a:fillRef idx="3">
+            <a:schemeClr val="accent1"/>
+          </a:fillRef>
+          <a:effectRef idx="2">
+            <a:schemeClr val="accent1"/>
+          </a:effectRef>
+          <a:fontRef idx="minor">
+            <a:schemeClr val="lt1"/>
+          </a:fontRef>
+        </p:style>
+        <p:txBody>
+          <a:bodyPr rtlCol="0" anchor="ctr"/>
+          <a:lstStyle/>
+          <a:p>
+            <a:pPr algn="ctr"/>
+          </a:p>
+        </p:txBody>
+      </p:sp>
+      <p:sp>
+        <p:nvSpPr>
+          <p:cNvPr id="21" name="TextBox 20"/>
+          <p:cNvSpPr txBox="1"/>
+          <p:nvPr/>
+        </p:nvSpPr>
+        <p:spPr>
+          <a:xfrm>
+            <a:off x="1097280" y="3611880"/>
+            <a:ext cx="2560320" cy="365760"/>
+          </a:xfrm>
+          <a:prstGeom prst="rect">
+            <a:avLst/>
+          </a:prstGeom>
+          <a:noFill/>
+        </p:spPr>
+        <p:txBody>
+          <a:bodyPr wrap="square">
+            <a:spAutoFit/>
+          </a:bodyPr>
+          <a:lstStyle/>
+          <a:p>
+            <a:pPr algn="ctr"/>
+            <a:r>
+              <a:rPr sz="1300" b="0">
+                <a:solidFill>
+                  <a:srgbClr val="0066FF"/>
+                </a:solidFill>
+                <a:latin typeface="Microsoft YaHei"/>
+              </a:rPr>
+              <a:t>Knowledge Feeder · 知识投喂</a:t>
+            </a:r>
+          </a:p>
+        </p:txBody>
+      </p:sp>
+      <p:sp>
+        <p:nvSpPr>
+          <p:cNvPr id="22" name="Rounded Rectangle 21"/>
+          <p:cNvSpPr/>
+          <p:nvPr/>
+        </p:nvSpPr>
+        <p:spPr>
+          <a:xfrm>
+            <a:off x="3840480" y="3566160"/>
+            <a:ext cx="2560320" cy="457200"/>
+          </a:xfrm>
+          <a:prstGeom prst="roundRect">
+            <a:avLst/>
+          </a:prstGeom>
+          <a:solidFill>
+            <a:srgbClr val="FFFFFF"/>
+          </a:solidFill>
+          <a:ln>
+            <a:solidFill>
+              <a:srgbClr val="CCDDFF"/>
+            </a:solidFill>
+          </a:ln>
+        </p:spPr>
+        <p:style>
+          <a:lnRef idx="1">
+            <a:schemeClr val="accent1"/>
+          </a:lnRef>
+          <a:fillRef idx="3">
+            <a:schemeClr val="accent1"/>
+          </a:fillRef>
+          <a:effectRef idx="2">
+            <a:schemeClr val="accent1"/>
+          </a:effectRef>
+          <a:fontRef idx="minor">
+            <a:schemeClr val="lt1"/>
+          </a:fontRef>
+        </p:style>
+        <p:txBody>
+          <a:bodyPr rtlCol="0" anchor="ctr"/>
+          <a:lstStyle/>
+          <a:p>
+            <a:pPr algn="ctr"/>
+          </a:p>
+        </p:txBody>
+      </p:sp>
+      <p:sp>
+        <p:nvSpPr>
+          <p:cNvPr id="23" name="TextBox 22"/>
+          <p:cNvSpPr txBox="1"/>
+          <p:nvPr/>
+        </p:nvSpPr>
+        <p:spPr>
+          <a:xfrm>
+            <a:off x="3840480" y="3611880"/>
+            <a:ext cx="2560320" cy="365760"/>
+          </a:xfrm>
+          <a:prstGeom prst="rect">
+            <a:avLst/>
+          </a:prstGeom>
+          <a:noFill/>
+        </p:spPr>
+        <p:txBody>
+          <a:bodyPr wrap="square">
+            <a:spAutoFit/>
+          </a:bodyPr>
+          <a:lstStyle/>
+          <a:p>
+            <a:pPr algn="ctr"/>
+            <a:r>
+              <a:rPr sz="1300" b="0">
+                <a:solidFill>
+                  <a:srgbClr val="0066FF"/>
+                </a:solidFill>
+                <a:latin typeface="Microsoft YaHei"/>
+              </a:rPr>
+              <a:t>Mediator · 调解员</a:t>
+            </a:r>
+          </a:p>
+        </p:txBody>
+      </p:sp>
+      <p:sp>
+        <p:nvSpPr>
+          <p:cNvPr id="24" name="Rounded Rectangle 23"/>
+          <p:cNvSpPr/>
+          <p:nvPr/>
+        </p:nvSpPr>
+        <p:spPr>
+          <a:xfrm>
+            <a:off x="6583680" y="3566160"/>
+            <a:ext cx="2560320" cy="457200"/>
+          </a:xfrm>
+          <a:prstGeom prst="roundRect">
+            <a:avLst/>
+          </a:prstGeom>
+          <a:solidFill>
+            <a:srgbClr val="FFFFFF"/>
+          </a:solidFill>
+          <a:ln>
+            <a:solidFill>
+              <a:srgbClr val="CCDDFF"/>
+            </a:solidFill>
+          </a:ln>
+        </p:spPr>
+        <p:style>
+          <a:lnRef idx="1">
+            <a:schemeClr val="accent1"/>
+          </a:lnRef>
+          <a:fillRef idx="3">
+            <a:schemeClr val="accent1"/>
+          </a:fillRef>
+          <a:effectRef idx="2">
+            <a:schemeClr val="accent1"/>
+          </a:effectRef>
+          <a:fontRef idx="minor">
+            <a:schemeClr val="lt1"/>
+          </a:fontRef>
+        </p:style>
+        <p:txBody>
+          <a:bodyPr rtlCol="0" anchor="ctr"/>
+          <a:lstStyle/>
+          <a:p>
+            <a:pPr algn="ctr"/>
+          </a:p>
+        </p:txBody>
+      </p:sp>
+      <p:sp>
+        <p:nvSpPr>
+          <p:cNvPr id="25" name="TextBox 24"/>
+          <p:cNvSpPr txBox="1"/>
+          <p:nvPr/>
+        </p:nvSpPr>
+        <p:spPr>
+          <a:xfrm>
+            <a:off x="6583680" y="3611880"/>
+            <a:ext cx="2560320" cy="365760"/>
+          </a:xfrm>
+          <a:prstGeom prst="rect">
+            <a:avLst/>
+          </a:prstGeom>
+          <a:noFill/>
+        </p:spPr>
+        <p:txBody>
+          <a:bodyPr wrap="square">
+            <a:spAutoFit/>
+          </a:bodyPr>
+          <a:lstStyle/>
+          <a:p>
+            <a:pPr algn="ctr"/>
+            <a:r>
+              <a:rPr sz="1300" b="0">
+                <a:solidFill>
+                  <a:srgbClr val="0066FF"/>
+                </a:solidFill>
+                <a:latin typeface="Microsoft YaHei"/>
+              </a:rPr>
+              <a:t>Creative · 创作助手</a:t>
+            </a:r>
+          </a:p>
+        </p:txBody>
+      </p:sp>
+      <p:sp>
+        <p:nvSpPr>
+          <p:cNvPr id="26" name="TextBox 25"/>
+          <p:cNvSpPr txBox="1"/>
+          <p:nvPr/>
+        </p:nvSpPr>
+        <p:spPr>
+          <a:xfrm>
+            <a:off x="0" y="5303520"/>
+            <a:ext cx="12191695" cy="365760"/>
+          </a:xfrm>
+          <a:prstGeom prst="rect">
+            <a:avLst/>
+          </a:prstGeom>
+          <a:noFill/>
+        </p:spPr>
+        <p:txBody>
+          <a:bodyPr wrap="square">
+            <a:spAutoFit/>
+          </a:bodyPr>
+          <a:lstStyle/>
+          <a:p>
+            <a:pPr algn="ctr"/>
+            <a:r>
+              <a:rPr sz="1300" b="0">
+                <a:solidFill>
+                  <a:srgbClr val="888888"/>
+                </a:solidFill>
+                <a:latin typeface="Microsoft YaHei"/>
+              </a:rPr>
+              <a:t>连接 DeepSeek 和知乎直答，越用越聪明</a:t>
             </a:r>
           </a:p>
         </p:txBody>
@@ -5270,6 +5641,14 @@
 <file path=ppt/slides/slide5.xml><?xml version="1.0" encoding="utf-8"?>
 <p:sld xmlns:a="http://schemas.openxmlformats.org/drawingml/2006/main" xmlns:p="http://schemas.openxmlformats.org/presentationml/2006/main" xmlns:r="http://schemas.openxmlformats.org/officeDocument/2006/relationships">
   <p:cSld>
+    <p:bg>
+      <p:bgPr>
+        <a:solidFill>
+          <a:srgbClr val="FFFFFF"/>
+        </a:solidFill>
+        <a:effectLst/>
+      </p:bgPr>
+    </p:bg>
     <p:spTree>
       <p:nvGrpSpPr>
         <p:cNvPr id="1" name=""/>
@@ -5279,23 +5658,60 @@
       <p:grpSpPr/>
       <p:sp>
         <p:nvSpPr>
-          <p:cNvPr id="2" name="Rectangle 1"/>
+          <p:cNvPr id="2" name="TextBox 1"/>
+          <p:cNvSpPr txBox="1"/>
+          <p:nvPr/>
+        </p:nvSpPr>
+        <p:spPr>
+          <a:xfrm>
+            <a:off x="0" y="731520"/>
+            <a:ext cx="12191695" cy="822960"/>
+          </a:xfrm>
+          <a:prstGeom prst="rect">
+            <a:avLst/>
+          </a:prstGeom>
+          <a:noFill/>
+        </p:spPr>
+        <p:txBody>
+          <a:bodyPr wrap="square">
+            <a:spAutoFit/>
+          </a:bodyPr>
+          <a:lstStyle/>
+          <a:p>
+            <a:pPr algn="ctr"/>
+            <a:r>
+              <a:rPr sz="4200" b="1">
+                <a:solidFill>
+                  <a:srgbClr val="0066FF"/>
+                </a:solidFill>
+                <a:latin typeface="Microsoft YaHei"/>
+              </a:rPr>
+              <a:t>人人都是创作者</a:t>
+            </a:r>
+          </a:p>
+        </p:txBody>
+      </p:sp>
+      <p:sp>
+        <p:nvSpPr>
+          <p:cNvPr id="3" name="Oval 2"/>
           <p:cNvSpPr/>
           <p:nvPr/>
         </p:nvSpPr>
         <p:spPr>
           <a:xfrm>
-            <a:off x="0" y="0"/>
-            <a:ext cx="12191695" cy="6858000"/>
-          </a:xfrm>
-          <a:prstGeom prst="rect">
+            <a:off x="1463040" y="2194560"/>
+            <a:ext cx="1097280" cy="1097280"/>
+          </a:xfrm>
+          <a:prstGeom prst="ellipse">
             <a:avLst/>
           </a:prstGeom>
           <a:solidFill>
-            <a:srgbClr val="F0F7FF"/>
+            <a:srgbClr val="FFFFFF"/>
           </a:solidFill>
-          <a:ln>
-            <a:noFill/>
+          <a:ln w="25400">
+            <a:solidFill>
+              <a:srgbClr val="0066FF"/>
+            </a:solidFill>
           </a:ln>
         </p:spPr>
         <p:style>
@@ -5322,14 +5738,14 @@
       </p:sp>
       <p:sp>
         <p:nvSpPr>
-          <p:cNvPr id="3" name="TextBox 2"/>
+          <p:cNvPr id="4" name="TextBox 3"/>
           <p:cNvSpPr txBox="1"/>
           <p:nvPr/>
         </p:nvSpPr>
         <p:spPr>
           <a:xfrm>
-            <a:off x="731520" y="457200"/>
-            <a:ext cx="10515600" cy="731520"/>
+            <a:off x="914400" y="2423160"/>
+            <a:ext cx="2194560" cy="640080"/>
           </a:xfrm>
           <a:prstGeom prst="rect">
             <a:avLst/>
@@ -5342,30 +5758,29 @@
           </a:bodyPr>
           <a:lstStyle/>
           <a:p>
-            <a:pPr algn="l">
-              <a:defRPr sz="3600" b="1">
-                <a:solidFill>
-                  <a:srgbClr val="1E3A5F"/>
+            <a:pPr algn="ctr"/>
+            <a:r>
+              <a:rPr sz="2800" b="0">
+                <a:solidFill>
+                  <a:srgbClr val="1A1A1A"/>
                 </a:solidFill>
                 <a:latin typeface="Microsoft YaHei"/>
-              </a:defRPr>
-            </a:pPr>
-            <a:r>
-              <a:t>刘看山 AI Agent</a:t>
-            </a:r>
-          </a:p>
-        </p:txBody>
-      </p:sp>
-      <p:sp>
-        <p:nvSpPr>
-          <p:cNvPr id="4" name="TextBox 3"/>
+              </a:rPr>
+              <a:t>🎮</a:t>
+            </a:r>
+          </a:p>
+        </p:txBody>
+      </p:sp>
+      <p:sp>
+        <p:nvSpPr>
+          <p:cNvPr id="5" name="TextBox 4"/>
           <p:cNvSpPr txBox="1"/>
           <p:nvPr/>
         </p:nvSpPr>
         <p:spPr>
           <a:xfrm>
-            <a:off x="731520" y="1051560"/>
-            <a:ext cx="10515600" cy="365760"/>
+            <a:off x="914400" y="3474720"/>
+            <a:ext cx="2194560" cy="365760"/>
           </a:xfrm>
           <a:prstGeom prst="rect">
             <a:avLst/>
@@ -5378,39 +5793,114 @@
           </a:bodyPr>
           <a:lstStyle/>
           <a:p>
-            <a:pPr algn="l">
-              <a:defRPr sz="1600" b="0">
-                <a:solidFill>
-                  <a:srgbClr val="5A7A9A"/>
+            <a:pPr algn="ctr"/>
+            <a:r>
+              <a:rPr sz="1600" b="1">
+                <a:solidFill>
+                  <a:srgbClr val="1A1A1A"/>
                 </a:solidFill>
                 <a:latin typeface="Microsoft YaHei"/>
-              </a:defRPr>
-            </a:pPr>
-            <a:r>
-              <a:t>不是聊天机器人，是会推动剧情的智能催化剂</a:t>
-            </a:r>
-          </a:p>
-        </p:txBody>
-      </p:sp>
-      <p:sp>
-        <p:nvSpPr>
-          <p:cNvPr id="5" name="Rounded Rectangle 4"/>
+              </a:rPr>
+              <a:t>玩故事</a:t>
+            </a:r>
+          </a:p>
+        </p:txBody>
+      </p:sp>
+      <p:sp>
+        <p:nvSpPr>
+          <p:cNvPr id="6" name="TextBox 5"/>
+          <p:cNvSpPr txBox="1"/>
+          <p:nvPr/>
+        </p:nvSpPr>
+        <p:spPr>
+          <a:xfrm>
+            <a:off x="1097280" y="3840480"/>
+            <a:ext cx="1828800" cy="548640"/>
+          </a:xfrm>
+          <a:prstGeom prst="rect">
+            <a:avLst/>
+          </a:prstGeom>
+          <a:noFill/>
+        </p:spPr>
+        <p:txBody>
+          <a:bodyPr wrap="square">
+            <a:spAutoFit/>
+          </a:bodyPr>
+          <a:lstStyle/>
+          <a:p>
+            <a:pPr algn="ctr"/>
+            <a:r>
+              <a:rPr sz="1100" b="0">
+                <a:solidFill>
+                  <a:srgbClr val="555555"/>
+                </a:solidFill>
+                <a:latin typeface="Microsoft YaHei"/>
+              </a:rPr>
+              <a:t>进入一个场景</a:t>
+            </a:r>
+            <a:br/>
+            <a:r>
+              <a:t>扮演一个角色</a:t>
+            </a:r>
+          </a:p>
+        </p:txBody>
+      </p:sp>
+      <p:sp>
+        <p:nvSpPr>
+          <p:cNvPr id="7" name="TextBox 6"/>
+          <p:cNvSpPr txBox="1"/>
+          <p:nvPr/>
+        </p:nvSpPr>
+        <p:spPr>
+          <a:xfrm>
+            <a:off x="3017520" y="2560320"/>
+            <a:ext cx="548640" cy="457200"/>
+          </a:xfrm>
+          <a:prstGeom prst="rect">
+            <a:avLst/>
+          </a:prstGeom>
+          <a:noFill/>
+        </p:spPr>
+        <p:txBody>
+          <a:bodyPr wrap="square">
+            <a:spAutoFit/>
+          </a:bodyPr>
+          <a:lstStyle/>
+          <a:p>
+            <a:pPr algn="ctr"/>
+            <a:r>
+              <a:rPr sz="2400" b="0">
+                <a:solidFill>
+                  <a:srgbClr val="0066FF"/>
+                </a:solidFill>
+                <a:latin typeface="Microsoft YaHei"/>
+              </a:rPr>
+              <a:t>→</a:t>
+            </a:r>
+          </a:p>
+        </p:txBody>
+      </p:sp>
+      <p:sp>
+        <p:nvSpPr>
+          <p:cNvPr id="8" name="Oval 7"/>
           <p:cNvSpPr/>
           <p:nvPr/>
         </p:nvSpPr>
         <p:spPr>
           <a:xfrm>
-            <a:off x="731520" y="1737360"/>
-            <a:ext cx="2560320" cy="1463040"/>
-          </a:xfrm>
-          <a:prstGeom prst="roundRect">
+            <a:off x="4297679" y="2194560"/>
+            <a:ext cx="1097280" cy="1097280"/>
+          </a:xfrm>
+          <a:prstGeom prst="ellipse">
             <a:avLst/>
           </a:prstGeom>
           <a:solidFill>
-            <a:srgbClr val="1E3A5F"/>
+            <a:srgbClr val="FFFFFF"/>
           </a:solidFill>
-          <a:ln>
-            <a:noFill/>
+          <a:ln w="25400">
+            <a:solidFill>
+              <a:srgbClr val="0066FF"/>
+            </a:solidFill>
           </a:ln>
         </p:spPr>
         <p:style>
@@ -5437,14 +5927,14 @@
       </p:sp>
       <p:sp>
         <p:nvSpPr>
-          <p:cNvPr id="6" name="TextBox 5"/>
+          <p:cNvPr id="9" name="TextBox 8"/>
           <p:cNvSpPr txBox="1"/>
           <p:nvPr/>
         </p:nvSpPr>
         <p:spPr>
           <a:xfrm>
-            <a:off x="731520" y="1874519"/>
-            <a:ext cx="2560320" cy="365760"/>
+            <a:off x="3749039" y="2423160"/>
+            <a:ext cx="2194560" cy="640080"/>
           </a:xfrm>
           <a:prstGeom prst="rect">
             <a:avLst/>
@@ -5457,30 +5947,29 @@
           </a:bodyPr>
           <a:lstStyle/>
           <a:p>
-            <a:pPr algn="ctr">
-              <a:defRPr sz="1600" b="1">
-                <a:solidFill>
-                  <a:srgbClr val="FFFFFF"/>
+            <a:pPr algn="ctr"/>
+            <a:r>
+              <a:rPr sz="2800" b="0">
+                <a:solidFill>
+                  <a:srgbClr val="1A1A1A"/>
                 </a:solidFill>
                 <a:latin typeface="Microsoft YaHei"/>
-              </a:defRPr>
-            </a:pPr>
-            <a:r>
-              <a:t>DeepSeek</a:t>
-            </a:r>
-          </a:p>
-        </p:txBody>
-      </p:sp>
-      <p:sp>
-        <p:nvSpPr>
-          <p:cNvPr id="7" name="TextBox 6"/>
+              </a:rPr>
+              <a:t>❤️</a:t>
+            </a:r>
+          </a:p>
+        </p:txBody>
+      </p:sp>
+      <p:sp>
+        <p:nvSpPr>
+          <p:cNvPr id="10" name="TextBox 9"/>
           <p:cNvSpPr txBox="1"/>
           <p:nvPr/>
         </p:nvSpPr>
         <p:spPr>
           <a:xfrm>
-            <a:off x="731520" y="2286000"/>
-            <a:ext cx="2560320" cy="822960"/>
+            <a:off x="3749039" y="3474720"/>
+            <a:ext cx="2194560" cy="365760"/>
           </a:xfrm>
           <a:prstGeom prst="rect">
             <a:avLst/>
@@ -5493,43 +5982,114 @@
           </a:bodyPr>
           <a:lstStyle/>
           <a:p>
-            <a:pPr algn="ctr">
-              <a:defRPr sz="1200" b="0">
-                <a:solidFill>
-                  <a:srgbClr val="FFFFFF"/>
+            <a:pPr algn="ctr"/>
+            <a:r>
+              <a:rPr sz="1600" b="1">
+                <a:solidFill>
+                  <a:srgbClr val="1A1A1A"/>
                 </a:solidFill>
                 <a:latin typeface="Microsoft YaHei"/>
-              </a:defRPr>
-            </a:pPr>
-            <a:r>
-              <a:t>深度推理</a:t>
+              </a:rPr>
+              <a:t>爱故事</a:t>
+            </a:r>
+          </a:p>
+        </p:txBody>
+      </p:sp>
+      <p:sp>
+        <p:nvSpPr>
+          <p:cNvPr id="11" name="TextBox 10"/>
+          <p:cNvSpPr txBox="1"/>
+          <p:nvPr/>
+        </p:nvSpPr>
+        <p:spPr>
+          <a:xfrm>
+            <a:off x="3931920" y="3840480"/>
+            <a:ext cx="1828800" cy="548640"/>
+          </a:xfrm>
+          <a:prstGeom prst="rect">
+            <a:avLst/>
+          </a:prstGeom>
+          <a:noFill/>
+        </p:spPr>
+        <p:txBody>
+          <a:bodyPr wrap="square">
+            <a:spAutoFit/>
+          </a:bodyPr>
+          <a:lstStyle/>
+          <a:p>
+            <a:pPr algn="ctr"/>
+            <a:r>
+              <a:rPr sz="1100" b="0">
+                <a:solidFill>
+                  <a:srgbClr val="555555"/>
+                </a:solidFill>
+                <a:latin typeface="Microsoft YaHei"/>
+              </a:rPr>
+              <a:t>标记精彩火花</a:t>
             </a:r>
             <a:br/>
             <a:r>
-              <a:t>角色扮演引擎</a:t>
-            </a:r>
-          </a:p>
-        </p:txBody>
-      </p:sp>
-      <p:sp>
-        <p:nvSpPr>
-          <p:cNvPr id="8" name="Rounded Rectangle 7"/>
+              <a:t>收藏心动瞬间</a:t>
+            </a:r>
+          </a:p>
+        </p:txBody>
+      </p:sp>
+      <p:sp>
+        <p:nvSpPr>
+          <p:cNvPr id="12" name="TextBox 11"/>
+          <p:cNvSpPr txBox="1"/>
+          <p:nvPr/>
+        </p:nvSpPr>
+        <p:spPr>
+          <a:xfrm>
+            <a:off x="5852159" y="2560320"/>
+            <a:ext cx="548640" cy="457200"/>
+          </a:xfrm>
+          <a:prstGeom prst="rect">
+            <a:avLst/>
+          </a:prstGeom>
+          <a:noFill/>
+        </p:spPr>
+        <p:txBody>
+          <a:bodyPr wrap="square">
+            <a:spAutoFit/>
+          </a:bodyPr>
+          <a:lstStyle/>
+          <a:p>
+            <a:pPr algn="ctr"/>
+            <a:r>
+              <a:rPr sz="2400" b="0">
+                <a:solidFill>
+                  <a:srgbClr val="0066FF"/>
+                </a:solidFill>
+                <a:latin typeface="Microsoft YaHei"/>
+              </a:rPr>
+              <a:t>→</a:t>
+            </a:r>
+          </a:p>
+        </p:txBody>
+      </p:sp>
+      <p:sp>
+        <p:nvSpPr>
+          <p:cNvPr id="13" name="Oval 12"/>
           <p:cNvSpPr/>
           <p:nvPr/>
         </p:nvSpPr>
         <p:spPr>
           <a:xfrm>
-            <a:off x="3566160" y="1737360"/>
-            <a:ext cx="2560320" cy="1463040"/>
-          </a:xfrm>
-          <a:prstGeom prst="roundRect">
+            <a:off x="7132320" y="2194560"/>
+            <a:ext cx="1097280" cy="1097280"/>
+          </a:xfrm>
+          <a:prstGeom prst="ellipse">
             <a:avLst/>
           </a:prstGeom>
           <a:solidFill>
-            <a:srgbClr val="2563EB"/>
+            <a:srgbClr val="FFFFFF"/>
           </a:solidFill>
-          <a:ln>
-            <a:noFill/>
+          <a:ln w="25400">
+            <a:solidFill>
+              <a:srgbClr val="0066FF"/>
+            </a:solidFill>
           </a:ln>
         </p:spPr>
         <p:style>
@@ -5556,14 +6116,14 @@
       </p:sp>
       <p:sp>
         <p:nvSpPr>
-          <p:cNvPr id="9" name="TextBox 8"/>
+          <p:cNvPr id="14" name="TextBox 13"/>
           <p:cNvSpPr txBox="1"/>
           <p:nvPr/>
         </p:nvSpPr>
         <p:spPr>
           <a:xfrm>
-            <a:off x="3566160" y="1874519"/>
-            <a:ext cx="2560320" cy="365760"/>
+            <a:off x="6583680" y="2423160"/>
+            <a:ext cx="2194560" cy="640080"/>
           </a:xfrm>
           <a:prstGeom prst="rect">
             <a:avLst/>
@@ -5576,30 +6136,29 @@
           </a:bodyPr>
           <a:lstStyle/>
           <a:p>
-            <a:pPr algn="ctr">
-              <a:defRPr sz="1600" b="1">
-                <a:solidFill>
-                  <a:srgbClr val="FFFFFF"/>
+            <a:pPr algn="ctr"/>
+            <a:r>
+              <a:rPr sz="2800" b="0">
+                <a:solidFill>
+                  <a:srgbClr val="1A1A1A"/>
                 </a:solidFill>
                 <a:latin typeface="Microsoft YaHei"/>
-              </a:defRPr>
-            </a:pPr>
-            <a:r>
-              <a:t>知乎直答</a:t>
-            </a:r>
-          </a:p>
-        </p:txBody>
-      </p:sp>
-      <p:sp>
-        <p:nvSpPr>
-          <p:cNvPr id="10" name="TextBox 9"/>
+              </a:rPr>
+              <a:t>✍️</a:t>
+            </a:r>
+          </a:p>
+        </p:txBody>
+      </p:sp>
+      <p:sp>
+        <p:nvSpPr>
+          <p:cNvPr id="15" name="TextBox 14"/>
           <p:cNvSpPr txBox="1"/>
           <p:nvPr/>
         </p:nvSpPr>
         <p:spPr>
           <a:xfrm>
-            <a:off x="3566160" y="2286000"/>
-            <a:ext cx="2560320" cy="822960"/>
+            <a:off x="6583680" y="3474720"/>
+            <a:ext cx="2194560" cy="365760"/>
           </a:xfrm>
           <a:prstGeom prst="rect">
             <a:avLst/>
@@ -5612,43 +6171,114 @@
           </a:bodyPr>
           <a:lstStyle/>
           <a:p>
-            <a:pPr algn="ctr">
-              <a:defRPr sz="1200" b="0">
-                <a:solidFill>
-                  <a:srgbClr val="FFFFFF"/>
+            <a:pPr algn="ctr"/>
+            <a:r>
+              <a:rPr sz="1600" b="1">
+                <a:solidFill>
+                  <a:srgbClr val="1A1A1A"/>
                 </a:solidFill>
                 <a:latin typeface="Microsoft YaHei"/>
-              </a:defRPr>
-            </a:pPr>
-            <a:r>
-              <a:t>知识增强</a:t>
+              </a:rPr>
+              <a:t>写短故事</a:t>
+            </a:r>
+          </a:p>
+        </p:txBody>
+      </p:sp>
+      <p:sp>
+        <p:nvSpPr>
+          <p:cNvPr id="16" name="TextBox 15"/>
+          <p:cNvSpPr txBox="1"/>
+          <p:nvPr/>
+        </p:nvSpPr>
+        <p:spPr>
+          <a:xfrm>
+            <a:off x="6766560" y="3840480"/>
+            <a:ext cx="1828800" cy="548640"/>
+          </a:xfrm>
+          <a:prstGeom prst="rect">
+            <a:avLst/>
+          </a:prstGeom>
+          <a:noFill/>
+        </p:spPr>
+        <p:txBody>
+          <a:bodyPr wrap="square">
+            <a:spAutoFit/>
+          </a:bodyPr>
+          <a:lstStyle/>
+          <a:p>
+            <a:pPr algn="ctr"/>
+            <a:r>
+              <a:rPr sz="1100" b="0">
+                <a:solidFill>
+                  <a:srgbClr val="555555"/>
+                </a:solidFill>
+                <a:latin typeface="Microsoft YaHei"/>
+              </a:rPr>
+              <a:t>串联火花</a:t>
             </a:r>
             <a:br/>
             <a:r>
-              <a:t>场景真实性校验</a:t>
-            </a:r>
-          </a:p>
-        </p:txBody>
-      </p:sp>
-      <p:sp>
-        <p:nvSpPr>
-          <p:cNvPr id="11" name="Rounded Rectangle 10"/>
+              <a:t>生成剧本</a:t>
+            </a:r>
+          </a:p>
+        </p:txBody>
+      </p:sp>
+      <p:sp>
+        <p:nvSpPr>
+          <p:cNvPr id="17" name="TextBox 16"/>
+          <p:cNvSpPr txBox="1"/>
+          <p:nvPr/>
+        </p:nvSpPr>
+        <p:spPr>
+          <a:xfrm>
+            <a:off x="8686800" y="2560320"/>
+            <a:ext cx="548640" cy="457200"/>
+          </a:xfrm>
+          <a:prstGeom prst="rect">
+            <a:avLst/>
+          </a:prstGeom>
+          <a:noFill/>
+        </p:spPr>
+        <p:txBody>
+          <a:bodyPr wrap="square">
+            <a:spAutoFit/>
+          </a:bodyPr>
+          <a:lstStyle/>
+          <a:p>
+            <a:pPr algn="ctr"/>
+            <a:r>
+              <a:rPr sz="2400" b="0">
+                <a:solidFill>
+                  <a:srgbClr val="0066FF"/>
+                </a:solidFill>
+                <a:latin typeface="Microsoft YaHei"/>
+              </a:rPr>
+              <a:t>→</a:t>
+            </a:r>
+          </a:p>
+        </p:txBody>
+      </p:sp>
+      <p:sp>
+        <p:nvSpPr>
+          <p:cNvPr id="18" name="Oval 17"/>
           <p:cNvSpPr/>
           <p:nvPr/>
         </p:nvSpPr>
         <p:spPr>
           <a:xfrm>
-            <a:off x="6400800" y="1737360"/>
-            <a:ext cx="2560320" cy="1463040"/>
-          </a:xfrm>
-          <a:prstGeom prst="roundRect">
+            <a:off x="9966960" y="2194560"/>
+            <a:ext cx="1097280" cy="1097280"/>
+          </a:xfrm>
+          <a:prstGeom prst="ellipse">
             <a:avLst/>
           </a:prstGeom>
           <a:solidFill>
-            <a:srgbClr val="10B981"/>
+            <a:srgbClr val="FFFFFF"/>
           </a:solidFill>
-          <a:ln>
-            <a:noFill/>
+          <a:ln w="25400">
+            <a:solidFill>
+              <a:srgbClr val="0066FF"/>
+            </a:solidFill>
           </a:ln>
         </p:spPr>
         <p:style>
@@ -5675,14 +6305,14 @@
       </p:sp>
       <p:sp>
         <p:nvSpPr>
-          <p:cNvPr id="12" name="TextBox 11"/>
+          <p:cNvPr id="19" name="TextBox 18"/>
           <p:cNvSpPr txBox="1"/>
           <p:nvPr/>
         </p:nvSpPr>
         <p:spPr>
           <a:xfrm>
-            <a:off x="6400800" y="1874519"/>
-            <a:ext cx="2560320" cy="365760"/>
+            <a:off x="9418320" y="2423160"/>
+            <a:ext cx="2194560" cy="640080"/>
           </a:xfrm>
           <a:prstGeom prst="rect">
             <a:avLst/>
@@ -5695,30 +6325,29 @@
           </a:bodyPr>
           <a:lstStyle/>
           <a:p>
-            <a:pPr algn="ctr">
-              <a:defRPr sz="1600" b="1">
-                <a:solidFill>
-                  <a:srgbClr val="FFFFFF"/>
+            <a:pPr algn="ctr"/>
+            <a:r>
+              <a:rPr sz="2800" b="0">
+                <a:solidFill>
+                  <a:srgbClr val="1A1A1A"/>
                 </a:solidFill>
                 <a:latin typeface="Microsoft YaHei"/>
-              </a:defRPr>
-            </a:pPr>
-            <a:r>
-              <a:t>动态催化</a:t>
-            </a:r>
-          </a:p>
-        </p:txBody>
-      </p:sp>
-      <p:sp>
-        <p:nvSpPr>
-          <p:cNvPr id="13" name="TextBox 12"/>
+              </a:rPr>
+              <a:t>📖</a:t>
+            </a:r>
+          </a:p>
+        </p:txBody>
+      </p:sp>
+      <p:sp>
+        <p:nvSpPr>
+          <p:cNvPr id="20" name="TextBox 19"/>
           <p:cNvSpPr txBox="1"/>
           <p:nvPr/>
         </p:nvSpPr>
         <p:spPr>
           <a:xfrm>
-            <a:off x="6400800" y="2286000"/>
-            <a:ext cx="2560320" cy="822960"/>
+            <a:off x="9418320" y="3474720"/>
+            <a:ext cx="2194560" cy="365760"/>
           </a:xfrm>
           <a:prstGeom prst="rect">
             <a:avLst/>
@@ -5731,77 +6360,29 @@
           </a:bodyPr>
           <a:lstStyle/>
           <a:p>
-            <a:pPr algn="ctr">
-              <a:defRPr sz="1200" b="0">
-                <a:solidFill>
-                  <a:srgbClr val="FFFFFF"/>
+            <a:pPr algn="ctr"/>
+            <a:r>
+              <a:rPr sz="1600" b="1">
+                <a:solidFill>
+                  <a:srgbClr val="1A1A1A"/>
                 </a:solidFill>
                 <a:latin typeface="Microsoft YaHei"/>
-              </a:defRPr>
-            </a:pPr>
-            <a:r>
-              <a:t>根据幕次和进度</a:t>
-            </a:r>
-            <a:br/>
-            <a:r>
-              <a:t>选择最佳追问时机</a:t>
-            </a:r>
-          </a:p>
-        </p:txBody>
-      </p:sp>
-      <p:sp>
-        <p:nvSpPr>
-          <p:cNvPr id="14" name="Rounded Rectangle 13"/>
-          <p:cNvSpPr/>
-          <p:nvPr/>
-        </p:nvSpPr>
-        <p:spPr>
-          <a:xfrm>
-            <a:off x="9235440" y="1737360"/>
-            <a:ext cx="2560320" cy="1463040"/>
-          </a:xfrm>
-          <a:prstGeom prst="roundRect">
-            <a:avLst/>
-          </a:prstGeom>
-          <a:solidFill>
-            <a:srgbClr val="F59E0B"/>
-          </a:solidFill>
-          <a:ln>
-            <a:noFill/>
-          </a:ln>
-        </p:spPr>
-        <p:style>
-          <a:lnRef idx="1">
-            <a:schemeClr val="accent1"/>
-          </a:lnRef>
-          <a:fillRef idx="3">
-            <a:schemeClr val="accent1"/>
-          </a:fillRef>
-          <a:effectRef idx="2">
-            <a:schemeClr val="accent1"/>
-          </a:effectRef>
-          <a:fontRef idx="minor">
-            <a:schemeClr val="lt1"/>
-          </a:fontRef>
-        </p:style>
-        <p:txBody>
-          <a:bodyPr rtlCol="0" anchor="ctr"/>
-          <a:lstStyle/>
-          <a:p>
-            <a:pPr algn="ctr"/>
-          </a:p>
-        </p:txBody>
-      </p:sp>
-      <p:sp>
-        <p:nvSpPr>
-          <p:cNvPr id="15" name="TextBox 14"/>
+              </a:rPr>
+              <a:t>共创长故事</a:t>
+            </a:r>
+          </a:p>
+        </p:txBody>
+      </p:sp>
+      <p:sp>
+        <p:nvSpPr>
+          <p:cNvPr id="21" name="TextBox 20"/>
           <p:cNvSpPr txBox="1"/>
           <p:nvPr/>
         </p:nvSpPr>
         <p:spPr>
           <a:xfrm>
-            <a:off x="9235440" y="1874519"/>
-            <a:ext cx="2560320" cy="365760"/>
+            <a:off x="9601200" y="3840480"/>
+            <a:ext cx="1828800" cy="548640"/>
           </a:xfrm>
           <a:prstGeom prst="rect">
             <a:avLst/>
@@ -5814,30 +6395,33 @@
           </a:bodyPr>
           <a:lstStyle/>
           <a:p>
-            <a:pPr algn="ctr">
-              <a:defRPr sz="1600" b="1">
-                <a:solidFill>
-                  <a:srgbClr val="FFFFFF"/>
+            <a:pPr algn="ctr"/>
+            <a:r>
+              <a:rPr sz="1100" b="0">
+                <a:solidFill>
+                  <a:srgbClr val="555555"/>
                 </a:solidFill>
                 <a:latin typeface="Microsoft YaHei"/>
-              </a:defRPr>
-            </a:pPr>
-            <a:r>
-              <a:t>刘看山</a:t>
-            </a:r>
-          </a:p>
-        </p:txBody>
-      </p:sp>
-      <p:sp>
-        <p:nvSpPr>
-          <p:cNvPr id="16" name="TextBox 15"/>
+              </a:rPr>
+              <a:t>多人协作</a:t>
+            </a:r>
+            <a:br/>
+            <a:r>
+              <a:t>连载长篇</a:t>
+            </a:r>
+          </a:p>
+        </p:txBody>
+      </p:sp>
+      <p:sp>
+        <p:nvSpPr>
+          <p:cNvPr id="22" name="TextBox 21"/>
           <p:cNvSpPr txBox="1"/>
           <p:nvPr/>
         </p:nvSpPr>
         <p:spPr>
           <a:xfrm>
-            <a:off x="9235440" y="2286000"/>
-            <a:ext cx="2560320" cy="822960"/>
+            <a:off x="0" y="5029200"/>
+            <a:ext cx="12191695" cy="365760"/>
           </a:xfrm>
           <a:prstGeom prst="rect">
             <a:avLst/>
@@ -5850,437 +6434,15 @@
           </a:bodyPr>
           <a:lstStyle/>
           <a:p>
-            <a:pPr algn="ctr">
-              <a:defRPr sz="1200" b="0">
-                <a:solidFill>
-                  <a:srgbClr val="FFFFFF"/>
+            <a:pPr algn="ctr"/>
+            <a:r>
+              <a:rPr sz="1300" b="0">
+                <a:solidFill>
+                  <a:srgbClr val="888888"/>
                 </a:solidFill>
                 <a:latin typeface="Microsoft YaHei"/>
-              </a:defRPr>
-            </a:pPr>
-            <a:r>
-              <a:t>北极狐人格</a:t>
-            </a:r>
-            <a:br/>
-            <a:r>
-              <a:t>温暖狡黠的DM</a:t>
-            </a:r>
-          </a:p>
-        </p:txBody>
-      </p:sp>
-      <p:sp>
-        <p:nvSpPr>
-          <p:cNvPr id="17" name="Right Arrow 16"/>
-          <p:cNvSpPr/>
-          <p:nvPr/>
-        </p:nvSpPr>
-        <p:spPr>
-          <a:xfrm>
-            <a:off x="3337559" y="2286000"/>
-            <a:ext cx="365760" cy="365760"/>
-          </a:xfrm>
-          <a:prstGeom prst="rightArrow">
-            <a:avLst/>
-          </a:prstGeom>
-          <a:solidFill>
-            <a:srgbClr val="BFDBFE"/>
-          </a:solidFill>
-          <a:ln>
-            <a:noFill/>
-          </a:ln>
-        </p:spPr>
-        <p:style>
-          <a:lnRef idx="1">
-            <a:schemeClr val="accent1"/>
-          </a:lnRef>
-          <a:fillRef idx="3">
-            <a:schemeClr val="accent1"/>
-          </a:fillRef>
-          <a:effectRef idx="2">
-            <a:schemeClr val="accent1"/>
-          </a:effectRef>
-          <a:fontRef idx="minor">
-            <a:schemeClr val="lt1"/>
-          </a:fontRef>
-        </p:style>
-        <p:txBody>
-          <a:bodyPr rtlCol="0" anchor="ctr"/>
-          <a:lstStyle/>
-          <a:p>
-            <a:pPr algn="ctr"/>
-          </a:p>
-        </p:txBody>
-      </p:sp>
-      <p:sp>
-        <p:nvSpPr>
-          <p:cNvPr id="18" name="Right Arrow 17"/>
-          <p:cNvSpPr/>
-          <p:nvPr/>
-        </p:nvSpPr>
-        <p:spPr>
-          <a:xfrm>
-            <a:off x="6172200" y="2286000"/>
-            <a:ext cx="365760" cy="365760"/>
-          </a:xfrm>
-          <a:prstGeom prst="rightArrow">
-            <a:avLst/>
-          </a:prstGeom>
-          <a:solidFill>
-            <a:srgbClr val="BFDBFE"/>
-          </a:solidFill>
-          <a:ln>
-            <a:noFill/>
-          </a:ln>
-        </p:spPr>
-        <p:style>
-          <a:lnRef idx="1">
-            <a:schemeClr val="accent1"/>
-          </a:lnRef>
-          <a:fillRef idx="3">
-            <a:schemeClr val="accent1"/>
-          </a:fillRef>
-          <a:effectRef idx="2">
-            <a:schemeClr val="accent1"/>
-          </a:effectRef>
-          <a:fontRef idx="minor">
-            <a:schemeClr val="lt1"/>
-          </a:fontRef>
-        </p:style>
-        <p:txBody>
-          <a:bodyPr rtlCol="0" anchor="ctr"/>
-          <a:lstStyle/>
-          <a:p>
-            <a:pPr algn="ctr"/>
-          </a:p>
-        </p:txBody>
-      </p:sp>
-      <p:sp>
-        <p:nvSpPr>
-          <p:cNvPr id="19" name="Right Arrow 18"/>
-          <p:cNvSpPr/>
-          <p:nvPr/>
-        </p:nvSpPr>
-        <p:spPr>
-          <a:xfrm>
-            <a:off x="9006840" y="2286000"/>
-            <a:ext cx="365760" cy="365760"/>
-          </a:xfrm>
-          <a:prstGeom prst="rightArrow">
-            <a:avLst/>
-          </a:prstGeom>
-          <a:solidFill>
-            <a:srgbClr val="BFDBFE"/>
-          </a:solidFill>
-          <a:ln>
-            <a:noFill/>
-          </a:ln>
-        </p:spPr>
-        <p:style>
-          <a:lnRef idx="1">
-            <a:schemeClr val="accent1"/>
-          </a:lnRef>
-          <a:fillRef idx="3">
-            <a:schemeClr val="accent1"/>
-          </a:fillRef>
-          <a:effectRef idx="2">
-            <a:schemeClr val="accent1"/>
-          </a:effectRef>
-          <a:fontRef idx="minor">
-            <a:schemeClr val="lt1"/>
-          </a:fontRef>
-        </p:style>
-        <p:txBody>
-          <a:bodyPr rtlCol="0" anchor="ctr"/>
-          <a:lstStyle/>
-          <a:p>
-            <a:pPr algn="ctr"/>
-          </a:p>
-        </p:txBody>
-      </p:sp>
-      <p:sp>
-        <p:nvSpPr>
-          <p:cNvPr id="20" name="TextBox 19"/>
-          <p:cNvSpPr txBox="1"/>
-          <p:nvPr/>
-        </p:nvSpPr>
-        <p:spPr>
-          <a:xfrm>
-            <a:off x="731520" y="3657600"/>
-            <a:ext cx="5029200" cy="320040"/>
-          </a:xfrm>
-          <a:prstGeom prst="rect">
-            <a:avLst/>
-          </a:prstGeom>
-          <a:noFill/>
-        </p:spPr>
-        <p:txBody>
-          <a:bodyPr wrap="square">
-            <a:spAutoFit/>
-          </a:bodyPr>
-          <a:lstStyle/>
-          <a:p>
-            <a:pPr algn="l">
-              <a:defRPr sz="1400" b="1">
-                <a:solidFill>
-                  <a:srgbClr val="2563EB"/>
-                </a:solidFill>
-                <a:latin typeface="Microsoft YaHei"/>
-              </a:defRPr>
-            </a:pPr>
-            <a:r>
-              <a:t>双API冗余架构</a:t>
-            </a:r>
-          </a:p>
-        </p:txBody>
-      </p:sp>
-      <p:sp>
-        <p:nvSpPr>
-          <p:cNvPr id="21" name="TextBox 20"/>
-          <p:cNvSpPr txBox="1"/>
-          <p:nvPr/>
-        </p:nvSpPr>
-        <p:spPr>
-          <a:xfrm>
-            <a:off x="731520" y="3977639"/>
-            <a:ext cx="5029200" cy="731520"/>
-          </a:xfrm>
-          <a:prstGeom prst="rect">
-            <a:avLst/>
-          </a:prstGeom>
-          <a:noFill/>
-        </p:spPr>
-        <p:txBody>
-          <a:bodyPr wrap="square">
-            <a:spAutoFit/>
-          </a:bodyPr>
-          <a:lstStyle/>
-          <a:p>
-            <a:pPr algn="l">
-              <a:defRPr sz="1200" b="0">
-                <a:solidFill>
-                  <a:srgbClr val="5A7A9A"/>
-                </a:solidFill>
-                <a:latin typeface="Microsoft YaHei"/>
-              </a:defRPr>
-            </a:pPr>
-            <a:r>
-              <a:t>DeepSeek + 知乎直答同时调用，选择最佳回复，单点故障自动降级</a:t>
-            </a:r>
-          </a:p>
-        </p:txBody>
-      </p:sp>
-      <p:sp>
-        <p:nvSpPr>
-          <p:cNvPr id="22" name="TextBox 21"/>
-          <p:cNvSpPr txBox="1"/>
-          <p:nvPr/>
-        </p:nvSpPr>
-        <p:spPr>
-          <a:xfrm>
-            <a:off x="6217920" y="3657600"/>
-            <a:ext cx="5029200" cy="320040"/>
-          </a:xfrm>
-          <a:prstGeom prst="rect">
-            <a:avLst/>
-          </a:prstGeom>
-          <a:noFill/>
-        </p:spPr>
-        <p:txBody>
-          <a:bodyPr wrap="square">
-            <a:spAutoFit/>
-          </a:bodyPr>
-          <a:lstStyle/>
-          <a:p>
-            <a:pPr algn="l">
-              <a:defRPr sz="1400" b="1">
-                <a:solidFill>
-                  <a:srgbClr val="2563EB"/>
-                </a:solidFill>
-                <a:latin typeface="Microsoft YaHei"/>
-              </a:defRPr>
-            </a:pPr>
-            <a:r>
-              <a:t>四幕推进算法</a:t>
-            </a:r>
-          </a:p>
-        </p:txBody>
-      </p:sp>
-      <p:sp>
-        <p:nvSpPr>
-          <p:cNvPr id="23" name="TextBox 22"/>
-          <p:cNvSpPr txBox="1"/>
-          <p:nvPr/>
-        </p:nvSpPr>
-        <p:spPr>
-          <a:xfrm>
-            <a:off x="6217920" y="3977639"/>
-            <a:ext cx="5029200" cy="731520"/>
-          </a:xfrm>
-          <a:prstGeom prst="rect">
-            <a:avLst/>
-          </a:prstGeom>
-          <a:noFill/>
-        </p:spPr>
-        <p:txBody>
-          <a:bodyPr wrap="square">
-            <a:spAutoFit/>
-          </a:bodyPr>
-          <a:lstStyle/>
-          <a:p>
-            <a:pPr algn="l">
-              <a:defRPr sz="1200" b="0">
-                <a:solidFill>
-                  <a:srgbClr val="5A7A9A"/>
-                </a:solidFill>
-                <a:latin typeface="Microsoft YaHei"/>
-              </a:defRPr>
-            </a:pPr>
-            <a:r>
-              <a:t>根据消息数智能判断当前幕次，自动调整催化策略和追问方向</a:t>
-            </a:r>
-          </a:p>
-        </p:txBody>
-      </p:sp>
-      <p:sp>
-        <p:nvSpPr>
-          <p:cNvPr id="24" name="TextBox 23"/>
-          <p:cNvSpPr txBox="1"/>
-          <p:nvPr/>
-        </p:nvSpPr>
-        <p:spPr>
-          <a:xfrm>
-            <a:off x="731520" y="5029200"/>
-            <a:ext cx="5029200" cy="320040"/>
-          </a:xfrm>
-          <a:prstGeom prst="rect">
-            <a:avLst/>
-          </a:prstGeom>
-          <a:noFill/>
-        </p:spPr>
-        <p:txBody>
-          <a:bodyPr wrap="square">
-            <a:spAutoFit/>
-          </a:bodyPr>
-          <a:lstStyle/>
-          <a:p>
-            <a:pPr algn="l">
-              <a:defRPr sz="1400" b="1">
-                <a:solidFill>
-                  <a:srgbClr val="2563EB"/>
-                </a:solidFill>
-                <a:latin typeface="Microsoft YaHei"/>
-              </a:defRPr>
-            </a:pPr>
-            <a:r>
-              <a:t>实时学习系统</a:t>
-            </a:r>
-          </a:p>
-        </p:txBody>
-      </p:sp>
-      <p:sp>
-        <p:nvSpPr>
-          <p:cNvPr id="25" name="TextBox 24"/>
-          <p:cNvSpPr txBox="1"/>
-          <p:nvPr/>
-        </p:nvSpPr>
-        <p:spPr>
-          <a:xfrm>
-            <a:off x="731520" y="5349240"/>
-            <a:ext cx="5029200" cy="731520"/>
-          </a:xfrm>
-          <a:prstGeom prst="rect">
-            <a:avLst/>
-          </a:prstGeom>
-          <a:noFill/>
-        </p:spPr>
-        <p:txBody>
-          <a:bodyPr wrap="square">
-            <a:spAutoFit/>
-          </a:bodyPr>
-          <a:lstStyle/>
-          <a:p>
-            <a:pPr algn="l">
-              <a:defRPr sz="1200" b="0">
-                <a:solidFill>
-                  <a:srgbClr val="5A7A9A"/>
-                </a:solidFill>
-                <a:latin typeface="Microsoft YaHei"/>
-              </a:defRPr>
-            </a:pPr>
-            <a:r>
-              <a:t>记录每次AI交互效果，自动优化最佳催化时机和提问模板</a:t>
-            </a:r>
-          </a:p>
-        </p:txBody>
-      </p:sp>
-      <p:sp>
-        <p:nvSpPr>
-          <p:cNvPr id="26" name="TextBox 25"/>
-          <p:cNvSpPr txBox="1"/>
-          <p:nvPr/>
-        </p:nvSpPr>
-        <p:spPr>
-          <a:xfrm>
-            <a:off x="6217920" y="5029200"/>
-            <a:ext cx="5029200" cy="320040"/>
-          </a:xfrm>
-          <a:prstGeom prst="rect">
-            <a:avLst/>
-          </a:prstGeom>
-          <a:noFill/>
-        </p:spPr>
-        <p:txBody>
-          <a:bodyPr wrap="square">
-            <a:spAutoFit/>
-          </a:bodyPr>
-          <a:lstStyle/>
-          <a:p>
-            <a:pPr algn="l">
-              <a:defRPr sz="1400" b="1">
-                <a:solidFill>
-                  <a:srgbClr val="2563EB"/>
-                </a:solidFill>
-                <a:latin typeface="Microsoft YaHei"/>
-              </a:defRPr>
-            </a:pPr>
-            <a:r>
-              <a:t>人格一致性</a:t>
-            </a:r>
-          </a:p>
-        </p:txBody>
-      </p:sp>
-      <p:sp>
-        <p:nvSpPr>
-          <p:cNvPr id="27" name="TextBox 26"/>
-          <p:cNvSpPr txBox="1"/>
-          <p:nvPr/>
-        </p:nvSpPr>
-        <p:spPr>
-          <a:xfrm>
-            <a:off x="6217920" y="5349240"/>
-            <a:ext cx="5029200" cy="731520"/>
-          </a:xfrm>
-          <a:prstGeom prst="rect">
-            <a:avLst/>
-          </a:prstGeom>
-          <a:noFill/>
-        </p:spPr>
-        <p:txBody>
-          <a:bodyPr wrap="square">
-            <a:spAutoFit/>
-          </a:bodyPr>
-          <a:lstStyle/>
-          <a:p>
-            <a:pPr algn="l">
-              <a:defRPr sz="1200" b="0">
-                <a:solidFill>
-                  <a:srgbClr val="5A7A9A"/>
-                </a:solidFill>
-                <a:latin typeface="Microsoft YaHei"/>
-              </a:defRPr>
-            </a:pPr>
-            <a:r>
-              <a:t>刘看山有完整角色设定：北极狐、75cm、爱吃鳕鱼、偶尔问为什么</a:t>
+              </a:rPr>
+              <a:t>低门槛创作，高价值产出。每一个想法都值得被看见。</a:t>
             </a:r>
           </a:p>
         </p:txBody>
@@ -6296,6 +6458,14 @@
 <file path=ppt/slides/slide6.xml><?xml version="1.0" encoding="utf-8"?>
 <p:sld xmlns:a="http://schemas.openxmlformats.org/drawingml/2006/main" xmlns:p="http://schemas.openxmlformats.org/presentationml/2006/main" xmlns:r="http://schemas.openxmlformats.org/officeDocument/2006/relationships">
   <p:cSld>
+    <p:bg>
+      <p:bgPr>
+        <a:solidFill>
+          <a:srgbClr val="FFFFFF"/>
+        </a:solidFill>
+        <a:effectLst/>
+      </p:bgPr>
+    </p:bg>
     <p:spTree>
       <p:nvGrpSpPr>
         <p:cNvPr id="1" name=""/>
@@ -6305,23 +6475,95 @@
       <p:grpSpPr/>
       <p:sp>
         <p:nvSpPr>
-          <p:cNvPr id="2" name="Rectangle 1"/>
+          <p:cNvPr id="2" name="TextBox 1"/>
+          <p:cNvSpPr txBox="1"/>
+          <p:nvPr/>
+        </p:nvSpPr>
+        <p:spPr>
+          <a:xfrm>
+            <a:off x="0" y="731520"/>
+            <a:ext cx="12191695" cy="822960"/>
+          </a:xfrm>
+          <a:prstGeom prst="rect">
+            <a:avLst/>
+          </a:prstGeom>
+          <a:noFill/>
+        </p:spPr>
+        <p:txBody>
+          <a:bodyPr wrap="square">
+            <a:spAutoFit/>
+          </a:bodyPr>
+          <a:lstStyle/>
+          <a:p>
+            <a:pPr algn="ctr"/>
+            <a:r>
+              <a:rPr sz="4200" b="1">
+                <a:solidFill>
+                  <a:srgbClr val="0066FF"/>
+                </a:solidFill>
+                <a:latin typeface="Microsoft YaHei"/>
+              </a:rPr>
+              <a:t>碰撞真实火花</a:t>
+            </a:r>
+          </a:p>
+        </p:txBody>
+      </p:sp>
+      <p:sp>
+        <p:nvSpPr>
+          <p:cNvPr id="3" name="TextBox 2"/>
+          <p:cNvSpPr txBox="1"/>
+          <p:nvPr/>
+        </p:nvSpPr>
+        <p:spPr>
+          <a:xfrm>
+            <a:off x="0" y="1371600"/>
+            <a:ext cx="12191695" cy="365760"/>
+          </a:xfrm>
+          <a:prstGeom prst="rect">
+            <a:avLst/>
+          </a:prstGeom>
+          <a:noFill/>
+        </p:spPr>
+        <p:txBody>
+          <a:bodyPr wrap="square">
+            <a:spAutoFit/>
+          </a:bodyPr>
+          <a:lstStyle/>
+          <a:p>
+            <a:pPr algn="ctr"/>
+            <a:r>
+              <a:rPr sz="1600" b="0">
+                <a:solidFill>
+                  <a:srgbClr val="555555"/>
+                </a:solidFill>
+                <a:latin typeface="Microsoft YaHei"/>
+              </a:rPr>
+              <a:t>两个真人 + 一个AI催化剂</a:t>
+            </a:r>
+          </a:p>
+        </p:txBody>
+      </p:sp>
+      <p:sp>
+        <p:nvSpPr>
+          <p:cNvPr id="4" name="Rounded Rectangle 3"/>
           <p:cNvSpPr/>
           <p:nvPr/>
         </p:nvSpPr>
         <p:spPr>
           <a:xfrm>
-            <a:off x="0" y="0"/>
-            <a:ext cx="12191695" cy="6858000"/>
-          </a:xfrm>
-          <a:prstGeom prst="rect">
+            <a:off x="1371600" y="2286000"/>
+            <a:ext cx="4572000" cy="1188720"/>
+          </a:xfrm>
+          <a:prstGeom prst="roundRect">
             <a:avLst/>
           </a:prstGeom>
           <a:solidFill>
-            <a:srgbClr val="F0F7FF"/>
+            <a:srgbClr val="F6F8FA"/>
           </a:solidFill>
           <a:ln>
-            <a:noFill/>
+            <a:solidFill>
+              <a:srgbClr val="E0E4EA"/>
+            </a:solidFill>
           </a:ln>
         </p:spPr>
         <p:style>
@@ -6348,14 +6590,14 @@
       </p:sp>
       <p:sp>
         <p:nvSpPr>
-          <p:cNvPr id="3" name="TextBox 2"/>
+          <p:cNvPr id="5" name="TextBox 4"/>
           <p:cNvSpPr txBox="1"/>
           <p:nvPr/>
         </p:nvSpPr>
         <p:spPr>
           <a:xfrm>
-            <a:off x="731520" y="457200"/>
-            <a:ext cx="1828800" cy="365760"/>
+            <a:off x="1554480" y="2377440"/>
+            <a:ext cx="4206240" cy="274320"/>
           </a:xfrm>
           <a:prstGeom prst="rect">
             <a:avLst/>
@@ -6370,36 +6612,73 @@
           <a:p>
             <a:pPr algn="l"/>
             <a:r>
-              <a:rPr sz="1400" b="0">
-                <a:solidFill>
-                  <a:srgbClr val="93A3B8"/>
+              <a:rPr sz="1100" b="1">
+                <a:solidFill>
+                  <a:srgbClr val="0066FF"/>
                 </a:solidFill>
                 <a:latin typeface="Microsoft YaHei"/>
               </a:rPr>
-              <a:t>06 / 07</a:t>
-            </a:r>
-          </a:p>
-        </p:txBody>
-      </p:sp>
-      <p:sp>
-        <p:nvSpPr>
-          <p:cNvPr id="4" name="Rounded Rectangle 3"/>
+              <a:t>医生</a:t>
+            </a:r>
+          </a:p>
+        </p:txBody>
+      </p:sp>
+      <p:sp>
+        <p:nvSpPr>
+          <p:cNvPr id="6" name="TextBox 5"/>
+          <p:cNvSpPr txBox="1"/>
+          <p:nvPr/>
+        </p:nvSpPr>
+        <p:spPr>
+          <a:xfrm>
+            <a:off x="1554480" y="2651760"/>
+            <a:ext cx="4206240" cy="548640"/>
+          </a:xfrm>
+          <a:prstGeom prst="rect">
+            <a:avLst/>
+          </a:prstGeom>
+          <a:noFill/>
+        </p:spPr>
+        <p:txBody>
+          <a:bodyPr wrap="square">
+            <a:spAutoFit/>
+          </a:bodyPr>
+          <a:lstStyle/>
+          <a:p>
+            <a:pPr algn="l"/>
+            <a:r>
+              <a:rPr sz="1400" b="0">
+                <a:solidFill>
+                  <a:srgbClr val="1A1A1A"/>
+                </a:solidFill>
+                <a:latin typeface="Microsoft YaHei"/>
+              </a:rPr>
+              <a:t>先推肾上腺素，准备除颤仪！</a:t>
+            </a:r>
+          </a:p>
+        </p:txBody>
+      </p:sp>
+      <p:sp>
+        <p:nvSpPr>
+          <p:cNvPr id="7" name="Rounded Rectangle 6"/>
           <p:cNvSpPr/>
           <p:nvPr/>
         </p:nvSpPr>
         <p:spPr>
           <a:xfrm>
-            <a:off x="731520" y="914400"/>
-            <a:ext cx="1645920" cy="411480"/>
+            <a:off x="6217920" y="3657600"/>
+            <a:ext cx="4572000" cy="1188720"/>
           </a:xfrm>
           <a:prstGeom prst="roundRect">
             <a:avLst/>
           </a:prstGeom>
           <a:solidFill>
-            <a:srgbClr val="EC4899"/>
+            <a:srgbClr val="F0F5FF"/>
           </a:solidFill>
           <a:ln>
-            <a:noFill/>
+            <a:solidFill>
+              <a:srgbClr val="CCDDFF"/>
+            </a:solidFill>
           </a:ln>
         </p:spPr>
         <p:style>
@@ -6426,14 +6705,14 @@
       </p:sp>
       <p:sp>
         <p:nvSpPr>
-          <p:cNvPr id="5" name="TextBox 4"/>
+          <p:cNvPr id="8" name="TextBox 7"/>
           <p:cNvSpPr txBox="1"/>
           <p:nvPr/>
         </p:nvSpPr>
         <p:spPr>
           <a:xfrm>
-            <a:off x="731520" y="987552"/>
-            <a:ext cx="1645920" cy="411480"/>
+            <a:off x="6400800" y="3749039"/>
+            <a:ext cx="4206240" cy="274320"/>
           </a:xfrm>
           <a:prstGeom prst="rect">
             <a:avLst/>
@@ -6446,29 +6725,29 @@
           </a:bodyPr>
           <a:lstStyle/>
           <a:p>
-            <a:pPr algn="ctr"/>
-            <a:r>
-              <a:rPr sz="1600" b="1">
-                <a:solidFill>
-                  <a:srgbClr val="FFFFFF"/>
+            <a:pPr algn="l"/>
+            <a:r>
+              <a:rPr sz="1100" b="1">
+                <a:solidFill>
+                  <a:srgbClr val="0066FF"/>
                 </a:solidFill>
                 <a:latin typeface="Microsoft YaHei"/>
               </a:rPr>
-              <a:t>人机模式</a:t>
-            </a:r>
-          </a:p>
-        </p:txBody>
-      </p:sp>
-      <p:sp>
-        <p:nvSpPr>
-          <p:cNvPr id="6" name="TextBox 5"/>
+              <a:t>家属</a:t>
+            </a:r>
+          </a:p>
+        </p:txBody>
+      </p:sp>
+      <p:sp>
+        <p:nvSpPr>
+          <p:cNvPr id="9" name="TextBox 8"/>
           <p:cNvSpPr txBox="1"/>
           <p:nvPr/>
         </p:nvSpPr>
         <p:spPr>
           <a:xfrm>
-            <a:off x="731520" y="1463040"/>
-            <a:ext cx="10972800" cy="731520"/>
+            <a:off x="6400800" y="4023360"/>
+            <a:ext cx="4206240" cy="548640"/>
           </a:xfrm>
           <a:prstGeom prst="rect">
             <a:avLst/>
@@ -6483,72 +6762,37 @@
           <a:p>
             <a:pPr algn="l"/>
             <a:r>
-              <a:rPr sz="4000" b="1">
-                <a:solidFill>
-                  <a:srgbClr val="1E3A5F"/>
+              <a:rPr sz="1400" b="0">
+                <a:solidFill>
+                  <a:srgbClr val="1A1A1A"/>
                 </a:solidFill>
                 <a:latin typeface="Microsoft YaHei"/>
               </a:rPr>
-              <a:t>双人对白，碰撞真实火花</a:t>
-            </a:r>
-          </a:p>
-        </p:txBody>
-      </p:sp>
-      <p:sp>
-        <p:nvSpPr>
-          <p:cNvPr id="7" name="TextBox 6"/>
-          <p:cNvSpPr txBox="1"/>
-          <p:nvPr/>
-        </p:nvSpPr>
-        <p:spPr>
-          <a:xfrm>
-            <a:off x="731520" y="2194560"/>
-            <a:ext cx="10972800" cy="457200"/>
-          </a:xfrm>
-          <a:prstGeom prst="rect">
-            <a:avLst/>
-          </a:prstGeom>
-          <a:noFill/>
-        </p:spPr>
-        <p:txBody>
-          <a:bodyPr wrap="square">
-            <a:spAutoFit/>
-          </a:bodyPr>
-          <a:lstStyle/>
-          <a:p>
-            <a:pPr algn="l"/>
-            <a:r>
-              <a:rPr sz="1800" b="0">
-                <a:solidFill>
-                  <a:srgbClr val="5A7A9A"/>
-                </a:solidFill>
-                <a:latin typeface="Microsoft YaHei"/>
-              </a:rPr>
-              <a:t>与 AI 或真人搭档，在自由脑洞中即兴创作，真实对话中诞生灵感</a:t>
-            </a:r>
-          </a:p>
-        </p:txBody>
-      </p:sp>
-      <p:sp>
-        <p:nvSpPr>
-          <p:cNvPr id="8" name="Rounded Rectangle 7"/>
+              <a:t>他是不是没有希望了？</a:t>
+            </a:r>
+          </a:p>
+        </p:txBody>
+      </p:sp>
+      <p:sp>
+        <p:nvSpPr>
+          <p:cNvPr id="10" name="Rounded Rectangle 9"/>
           <p:cNvSpPr/>
           <p:nvPr/>
         </p:nvSpPr>
         <p:spPr>
           <a:xfrm>
-            <a:off x="731520" y="2926080"/>
-            <a:ext cx="5303520" cy="1645920"/>
+            <a:off x="1371600" y="5029200"/>
+            <a:ext cx="4572000" cy="1188720"/>
           </a:xfrm>
           <a:prstGeom prst="roundRect">
             <a:avLst/>
           </a:prstGeom>
           <a:solidFill>
-            <a:srgbClr val="FFFFFF"/>
+            <a:srgbClr val="F6F8FA"/>
           </a:solidFill>
           <a:ln>
             <a:solidFill>
-              <a:srgbClr val="E2E8F0"/>
+              <a:srgbClr val="E0E4EA"/>
             </a:solidFill>
           </a:ln>
         </p:spPr>
@@ -6576,14 +6820,14 @@
       </p:sp>
       <p:sp>
         <p:nvSpPr>
-          <p:cNvPr id="9" name="TextBox 8"/>
+          <p:cNvPr id="11" name="TextBox 10"/>
           <p:cNvSpPr txBox="1"/>
           <p:nvPr/>
         </p:nvSpPr>
         <p:spPr>
           <a:xfrm>
-            <a:off x="1005840" y="3108960"/>
-            <a:ext cx="4754880" cy="365760"/>
+            <a:off x="1554480" y="5120640"/>
+            <a:ext cx="4206240" cy="274320"/>
           </a:xfrm>
           <a:prstGeom prst="rect">
             <a:avLst/>
@@ -6598,27 +6842,27 @@
           <a:p>
             <a:pPr algn="l"/>
             <a:r>
-              <a:rPr sz="1800" b="1">
-                <a:solidFill>
-                  <a:srgbClr val="BE185D"/>
+              <a:rPr sz="1100" b="1">
+                <a:solidFill>
+                  <a:srgbClr val="0066FF"/>
                 </a:solidFill>
                 <a:latin typeface="Microsoft YaHei"/>
               </a:rPr>
-              <a:t>脑洞大厅</a:t>
-            </a:r>
-          </a:p>
-        </p:txBody>
-      </p:sp>
-      <p:sp>
-        <p:nvSpPr>
-          <p:cNvPr id="10" name="TextBox 9"/>
+              <a:t>刘看山 · 催化剂</a:t>
+            </a:r>
+          </a:p>
+        </p:txBody>
+      </p:sp>
+      <p:sp>
+        <p:nvSpPr>
+          <p:cNvPr id="12" name="TextBox 11"/>
           <p:cNvSpPr txBox="1"/>
           <p:nvPr/>
         </p:nvSpPr>
         <p:spPr>
           <a:xfrm>
-            <a:off x="1005840" y="3520440"/>
-            <a:ext cx="4754880" cy="914400"/>
+            <a:off x="1554480" y="5394960"/>
+            <a:ext cx="4206240" cy="548640"/>
           </a:xfrm>
           <a:prstGeom prst="rect">
             <a:avLst/>
@@ -6635,70 +6879,25 @@
             <a:r>
               <a:rPr sz="1400" b="0">
                 <a:solidFill>
-                  <a:srgbClr val="5A7A9A"/>
+                  <a:srgbClr val="1A1A1A"/>
                 </a:solidFill>
                 <a:latin typeface="Microsoft YaHei"/>
               </a:rPr>
-              <a:t>热度加权随机匹配脑洞场景，每次进入都是新体验，告别创作枯竭</a:t>
-            </a:r>
-          </a:p>
-        </p:txBody>
-      </p:sp>
-      <p:sp>
-        <p:nvSpPr>
-          <p:cNvPr id="11" name="Rounded Rectangle 10"/>
-          <p:cNvSpPr/>
-          <p:nvPr/>
-        </p:nvSpPr>
-        <p:spPr>
-          <a:xfrm>
-            <a:off x="6492240" y="2926080"/>
-            <a:ext cx="5303520" cy="1645920"/>
-          </a:xfrm>
-          <a:prstGeom prst="roundRect">
-            <a:avLst/>
-          </a:prstGeom>
-          <a:solidFill>
-            <a:srgbClr val="FFFFFF"/>
-          </a:solidFill>
-          <a:ln>
-            <a:solidFill>
-              <a:srgbClr val="E2E8F0"/>
-            </a:solidFill>
-          </a:ln>
-        </p:spPr>
-        <p:style>
-          <a:lnRef idx="1">
-            <a:schemeClr val="accent1"/>
-          </a:lnRef>
-          <a:fillRef idx="3">
-            <a:schemeClr val="accent1"/>
-          </a:fillRef>
-          <a:effectRef idx="2">
-            <a:schemeClr val="accent1"/>
-          </a:effectRef>
-          <a:fontRef idx="minor">
-            <a:schemeClr val="lt1"/>
-          </a:fontRef>
-        </p:style>
-        <p:txBody>
-          <a:bodyPr rtlCol="0" anchor="ctr"/>
-          <a:lstStyle/>
-          <a:p>
-            <a:pPr algn="ctr"/>
-          </a:p>
-        </p:txBody>
-      </p:sp>
-      <p:sp>
-        <p:nvSpPr>
-          <p:cNvPr id="12" name="TextBox 11"/>
+              <a:t>家属此刻最害怕的是什么？</a:t>
+            </a:r>
+          </a:p>
+        </p:txBody>
+      </p:sp>
+      <p:sp>
+        <p:nvSpPr>
+          <p:cNvPr id="13" name="TextBox 12"/>
           <p:cNvSpPr txBox="1"/>
           <p:nvPr/>
         </p:nvSpPr>
         <p:spPr>
           <a:xfrm>
-            <a:off x="6766560" y="3108960"/>
-            <a:ext cx="4754880" cy="365760"/>
+            <a:off x="0" y="6400800"/>
+            <a:ext cx="12191695" cy="274320"/>
           </a:xfrm>
           <a:prstGeom prst="rect">
             <a:avLst/>
@@ -6711,280 +6910,15 @@
           </a:bodyPr>
           <a:lstStyle/>
           <a:p>
-            <a:pPr algn="l"/>
-            <a:r>
-              <a:rPr sz="1800" b="1">
-                <a:solidFill>
-                  <a:srgbClr val="BE185D"/>
+            <a:pPr algn="ctr"/>
+            <a:r>
+              <a:rPr sz="1200" b="0">
+                <a:solidFill>
+                  <a:srgbClr val="888888"/>
                 </a:solidFill>
                 <a:latin typeface="Microsoft YaHei"/>
               </a:rPr>
-              <a:t>AI 搭档</a:t>
-            </a:r>
-          </a:p>
-        </p:txBody>
-      </p:sp>
-      <p:sp>
-        <p:nvSpPr>
-          <p:cNvPr id="13" name="TextBox 12"/>
-          <p:cNvSpPr txBox="1"/>
-          <p:nvPr/>
-        </p:nvSpPr>
-        <p:spPr>
-          <a:xfrm>
-            <a:off x="6766560" y="3520440"/>
-            <a:ext cx="4754880" cy="914400"/>
-          </a:xfrm>
-          <a:prstGeom prst="rect">
-            <a:avLst/>
-          </a:prstGeom>
-          <a:noFill/>
-        </p:spPr>
-        <p:txBody>
-          <a:bodyPr wrap="square">
-            <a:spAutoFit/>
-          </a:bodyPr>
-          <a:lstStyle/>
-          <a:p>
-            <a:pPr algn="l"/>
-            <a:r>
-              <a:rPr sz="1400" b="0">
-                <a:solidFill>
-                  <a:srgbClr val="5A7A9A"/>
-                </a:solidFill>
-                <a:latin typeface="Microsoft YaHei"/>
-              </a:rPr>
-              <a:t>刘看山随时待命，陪你聊任何脑洞，从生活琐事到奇幻冒险都能接梗</a:t>
-            </a:r>
-          </a:p>
-        </p:txBody>
-      </p:sp>
-      <p:sp>
-        <p:nvSpPr>
-          <p:cNvPr id="14" name="Rounded Rectangle 13"/>
-          <p:cNvSpPr/>
-          <p:nvPr/>
-        </p:nvSpPr>
-        <p:spPr>
-          <a:xfrm>
-            <a:off x="731520" y="4937760"/>
-            <a:ext cx="5303520" cy="1645920"/>
-          </a:xfrm>
-          <a:prstGeom prst="roundRect">
-            <a:avLst/>
-          </a:prstGeom>
-          <a:solidFill>
-            <a:srgbClr val="FFFFFF"/>
-          </a:solidFill>
-          <a:ln>
-            <a:solidFill>
-              <a:srgbClr val="E2E8F0"/>
-            </a:solidFill>
-          </a:ln>
-        </p:spPr>
-        <p:style>
-          <a:lnRef idx="1">
-            <a:schemeClr val="accent1"/>
-          </a:lnRef>
-          <a:fillRef idx="3">
-            <a:schemeClr val="accent1"/>
-          </a:fillRef>
-          <a:effectRef idx="2">
-            <a:schemeClr val="accent1"/>
-          </a:effectRef>
-          <a:fontRef idx="minor">
-            <a:schemeClr val="lt1"/>
-          </a:fontRef>
-        </p:style>
-        <p:txBody>
-          <a:bodyPr rtlCol="0" anchor="ctr"/>
-          <a:lstStyle/>
-          <a:p>
-            <a:pPr algn="ctr"/>
-          </a:p>
-        </p:txBody>
-      </p:sp>
-      <p:sp>
-        <p:nvSpPr>
-          <p:cNvPr id="15" name="TextBox 14"/>
-          <p:cNvSpPr txBox="1"/>
-          <p:nvPr/>
-        </p:nvSpPr>
-        <p:spPr>
-          <a:xfrm>
-            <a:off x="1005840" y="5120640"/>
-            <a:ext cx="4754880" cy="365760"/>
-          </a:xfrm>
-          <a:prstGeom prst="rect">
-            <a:avLst/>
-          </a:prstGeom>
-          <a:noFill/>
-        </p:spPr>
-        <p:txBody>
-          <a:bodyPr wrap="square">
-            <a:spAutoFit/>
-          </a:bodyPr>
-          <a:lstStyle/>
-          <a:p>
-            <a:pPr algn="l"/>
-            <a:r>
-              <a:rPr sz="1800" b="1">
-                <a:solidFill>
-                  <a:srgbClr val="BE185D"/>
-                </a:solidFill>
-                <a:latin typeface="Microsoft YaHei"/>
-              </a:rPr>
-              <a:t>真人匹配</a:t>
-            </a:r>
-          </a:p>
-        </p:txBody>
-      </p:sp>
-      <p:sp>
-        <p:nvSpPr>
-          <p:cNvPr id="16" name="TextBox 15"/>
-          <p:cNvSpPr txBox="1"/>
-          <p:nvPr/>
-        </p:nvSpPr>
-        <p:spPr>
-          <a:xfrm>
-            <a:off x="1005840" y="5532120"/>
-            <a:ext cx="4754880" cy="914400"/>
-          </a:xfrm>
-          <a:prstGeom prst="rect">
-            <a:avLst/>
-          </a:prstGeom>
-          <a:noFill/>
-        </p:spPr>
-        <p:txBody>
-          <a:bodyPr wrap="square">
-            <a:spAutoFit/>
-          </a:bodyPr>
-          <a:lstStyle/>
-          <a:p>
-            <a:pPr algn="l"/>
-            <a:r>
-              <a:rPr sz="1400" b="0">
-                <a:solidFill>
-                  <a:srgbClr val="5A7A9A"/>
-                </a:solidFill>
-                <a:latin typeface="Microsoft YaHei"/>
-              </a:rPr>
-              <a:t>一键匹配陌生创作者，不同视角的碰撞往往诞生最精彩的对白</a:t>
-            </a:r>
-          </a:p>
-        </p:txBody>
-      </p:sp>
-      <p:sp>
-        <p:nvSpPr>
-          <p:cNvPr id="17" name="Rounded Rectangle 16"/>
-          <p:cNvSpPr/>
-          <p:nvPr/>
-        </p:nvSpPr>
-        <p:spPr>
-          <a:xfrm>
-            <a:off x="6492240" y="4937760"/>
-            <a:ext cx="5303520" cy="1645920"/>
-          </a:xfrm>
-          <a:prstGeom prst="roundRect">
-            <a:avLst/>
-          </a:prstGeom>
-          <a:solidFill>
-            <a:srgbClr val="FFFFFF"/>
-          </a:solidFill>
-          <a:ln>
-            <a:solidFill>
-              <a:srgbClr val="E2E8F0"/>
-            </a:solidFill>
-          </a:ln>
-        </p:spPr>
-        <p:style>
-          <a:lnRef idx="1">
-            <a:schemeClr val="accent1"/>
-          </a:lnRef>
-          <a:fillRef idx="3">
-            <a:schemeClr val="accent1"/>
-          </a:fillRef>
-          <a:effectRef idx="2">
-            <a:schemeClr val="accent1"/>
-          </a:effectRef>
-          <a:fontRef idx="minor">
-            <a:schemeClr val="lt1"/>
-          </a:fontRef>
-        </p:style>
-        <p:txBody>
-          <a:bodyPr rtlCol="0" anchor="ctr"/>
-          <a:lstStyle/>
-          <a:p>
-            <a:pPr algn="ctr"/>
-          </a:p>
-        </p:txBody>
-      </p:sp>
-      <p:sp>
-        <p:nvSpPr>
-          <p:cNvPr id="18" name="TextBox 17"/>
-          <p:cNvSpPr txBox="1"/>
-          <p:nvPr/>
-        </p:nvSpPr>
-        <p:spPr>
-          <a:xfrm>
-            <a:off x="6766560" y="5120640"/>
-            <a:ext cx="4754880" cy="365760"/>
-          </a:xfrm>
-          <a:prstGeom prst="rect">
-            <a:avLst/>
-          </a:prstGeom>
-          <a:noFill/>
-        </p:spPr>
-        <p:txBody>
-          <a:bodyPr wrap="square">
-            <a:spAutoFit/>
-          </a:bodyPr>
-          <a:lstStyle/>
-          <a:p>
-            <a:pPr algn="l"/>
-            <a:r>
-              <a:rPr sz="1800" b="1">
-                <a:solidFill>
-                  <a:srgbClr val="BE185D"/>
-                </a:solidFill>
-                <a:latin typeface="Microsoft YaHei"/>
-              </a:rPr>
-              <a:t>火花沉淀</a:t>
-            </a:r>
-          </a:p>
-        </p:txBody>
-      </p:sp>
-      <p:sp>
-        <p:nvSpPr>
-          <p:cNvPr id="19" name="TextBox 18"/>
-          <p:cNvSpPr txBox="1"/>
-          <p:nvPr/>
-        </p:nvSpPr>
-        <p:spPr>
-          <a:xfrm>
-            <a:off x="6766560" y="5532120"/>
-            <a:ext cx="4754880" cy="914400"/>
-          </a:xfrm>
-          <a:prstGeom prst="rect">
-            <a:avLst/>
-          </a:prstGeom>
-          <a:noFill/>
-        </p:spPr>
-        <p:txBody>
-          <a:bodyPr wrap="square">
-            <a:spAutoFit/>
-          </a:bodyPr>
-          <a:lstStyle/>
-          <a:p>
-            <a:pPr algn="l"/>
-            <a:r>
-              <a:rPr sz="1400" b="0">
-                <a:solidFill>
-                  <a:srgbClr val="5A7A9A"/>
-                </a:solidFill>
-                <a:latin typeface="Microsoft YaHei"/>
-              </a:rPr>
-              <a:t>即兴对白自动生成故事资产，你的每一次灵感都不会浪费</a:t>
+              <a:t>这不是AI编的故事，这是真实的人说出来的话。</a:t>
             </a:r>
           </a:p>
         </p:txBody>
@@ -7000,6 +6934,14 @@
 <file path=ppt/slides/slide7.xml><?xml version="1.0" encoding="utf-8"?>
 <p:sld xmlns:a="http://schemas.openxmlformats.org/drawingml/2006/main" xmlns:p="http://schemas.openxmlformats.org/presentationml/2006/main" xmlns:r="http://schemas.openxmlformats.org/officeDocument/2006/relationships">
   <p:cSld>
+    <p:bg>
+      <p:bgPr>
+        <a:solidFill>
+          <a:srgbClr val="0066FF"/>
+        </a:solidFill>
+        <a:effectLst/>
+      </p:bgPr>
+    </p:bg>
     <p:spTree>
       <p:nvGrpSpPr>
         <p:cNvPr id="1" name=""/>
@@ -7009,23 +6951,95 @@
       <p:grpSpPr/>
       <p:sp>
         <p:nvSpPr>
-          <p:cNvPr id="2" name="Rectangle 1"/>
+          <p:cNvPr id="2" name="TextBox 1"/>
+          <p:cNvSpPr txBox="1"/>
+          <p:nvPr/>
+        </p:nvSpPr>
+        <p:spPr>
+          <a:xfrm>
+            <a:off x="0" y="1828800"/>
+            <a:ext cx="12191695" cy="914400"/>
+          </a:xfrm>
+          <a:prstGeom prst="rect">
+            <a:avLst/>
+          </a:prstGeom>
+          <a:noFill/>
+        </p:spPr>
+        <p:txBody>
+          <a:bodyPr wrap="square">
+            <a:spAutoFit/>
+          </a:bodyPr>
+          <a:lstStyle/>
+          <a:p>
+            <a:pPr algn="ctr"/>
+            <a:r>
+              <a:rPr sz="5400" b="1">
+                <a:solidFill>
+                  <a:srgbClr val="FFFFFF"/>
+                </a:solidFill>
+                <a:latin typeface="Microsoft YaHei"/>
+              </a:rPr>
+              <a:t>群像·星火</a:t>
+            </a:r>
+          </a:p>
+        </p:txBody>
+      </p:sp>
+      <p:sp>
+        <p:nvSpPr>
+          <p:cNvPr id="3" name="TextBox 2"/>
+          <p:cNvSpPr txBox="1"/>
+          <p:nvPr/>
+        </p:nvSpPr>
+        <p:spPr>
+          <a:xfrm>
+            <a:off x="0" y="2834640"/>
+            <a:ext cx="12191695" cy="457200"/>
+          </a:xfrm>
+          <a:prstGeom prst="rect">
+            <a:avLst/>
+          </a:prstGeom>
+          <a:noFill/>
+        </p:spPr>
+        <p:txBody>
+          <a:bodyPr wrap="square">
+            <a:spAutoFit/>
+          </a:bodyPr>
+          <a:lstStyle/>
+          <a:p>
+            <a:pPr algn="ctr"/>
+            <a:r>
+              <a:rPr sz="2000" b="0">
+                <a:solidFill>
+                  <a:srgbClr val="DDDDDD"/>
+                </a:solidFill>
+                <a:latin typeface="Microsoft YaHei"/>
+              </a:rPr>
+              <a:t>让真实发光，让思想变现</a:t>
+            </a:r>
+          </a:p>
+        </p:txBody>
+      </p:sp>
+      <p:sp>
+        <p:nvSpPr>
+          <p:cNvPr id="4" name="Rounded Rectangle 3"/>
           <p:cNvSpPr/>
           <p:nvPr/>
         </p:nvSpPr>
         <p:spPr>
           <a:xfrm>
-            <a:off x="0" y="0"/>
-            <a:ext cx="12191695" cy="6858000"/>
-          </a:xfrm>
-          <a:prstGeom prst="rect">
+            <a:off x="4389120" y="3657600"/>
+            <a:ext cx="3383280" cy="457200"/>
+          </a:xfrm>
+          <a:prstGeom prst="roundRect">
             <a:avLst/>
           </a:prstGeom>
           <a:solidFill>
-            <a:srgbClr val="F0F7FF"/>
+            <a:srgbClr val="0055DD"/>
           </a:solidFill>
           <a:ln>
-            <a:noFill/>
+            <a:solidFill>
+              <a:srgbClr val="3377EE"/>
+            </a:solidFill>
           </a:ln>
         </p:spPr>
         <p:style>
@@ -7052,57 +7066,14 @@
       </p:sp>
       <p:sp>
         <p:nvSpPr>
-          <p:cNvPr id="3" name="Rounded Rectangle 2"/>
-          <p:cNvSpPr/>
-          <p:nvPr/>
-        </p:nvSpPr>
-        <p:spPr>
-          <a:xfrm>
-            <a:off x="5394960" y="1371600"/>
-            <a:ext cx="1371600" cy="1371600"/>
-          </a:xfrm>
-          <a:prstGeom prst="roundRect">
-            <a:avLst/>
-          </a:prstGeom>
-          <a:solidFill>
-            <a:srgbClr val="3B82F6"/>
-          </a:solidFill>
-          <a:ln>
-            <a:noFill/>
-          </a:ln>
-        </p:spPr>
-        <p:style>
-          <a:lnRef idx="1">
-            <a:schemeClr val="accent1"/>
-          </a:lnRef>
-          <a:fillRef idx="3">
-            <a:schemeClr val="accent1"/>
-          </a:fillRef>
-          <a:effectRef idx="2">
-            <a:schemeClr val="accent1"/>
-          </a:effectRef>
-          <a:fontRef idx="minor">
-            <a:schemeClr val="lt1"/>
-          </a:fontRef>
-        </p:style>
-        <p:txBody>
-          <a:bodyPr rtlCol="0" anchor="ctr"/>
-          <a:lstStyle/>
-          <a:p>
-            <a:pPr algn="ctr"/>
-          </a:p>
-        </p:txBody>
-      </p:sp>
-      <p:sp>
-        <p:nvSpPr>
-          <p:cNvPr id="4" name="TextBox 3"/>
+          <p:cNvPr id="5" name="TextBox 4"/>
           <p:cNvSpPr txBox="1"/>
           <p:nvPr/>
         </p:nvSpPr>
         <p:spPr>
           <a:xfrm>
-            <a:off x="914400" y="3017520"/>
-            <a:ext cx="10362895" cy="914400"/>
+            <a:off x="4389120" y="3703320"/>
+            <a:ext cx="3383280" cy="365760"/>
           </a:xfrm>
           <a:prstGeom prst="rect">
             <a:avLst/>
@@ -7115,30 +7086,29 @@
           </a:bodyPr>
           <a:lstStyle/>
           <a:p>
-            <a:pPr algn="ctr">
-              <a:defRPr sz="5200" b="1">
-                <a:solidFill>
-                  <a:srgbClr val="1E3A5F"/>
+            <a:pPr algn="ctr"/>
+            <a:r>
+              <a:rPr sz="1300" b="0">
+                <a:solidFill>
+                  <a:srgbClr val="CCCCCC"/>
                 </a:solidFill>
                 <a:latin typeface="Microsoft YaHei"/>
-              </a:defRPr>
-            </a:pPr>
-            <a:r>
-              <a:t>群像·星火</a:t>
-            </a:r>
-          </a:p>
-        </p:txBody>
-      </p:sp>
-      <p:sp>
-        <p:nvSpPr>
-          <p:cNvPr id="5" name="TextBox 4"/>
+              </a:rPr>
+              <a:t>http://81.70.59.228</a:t>
+            </a:r>
+          </a:p>
+        </p:txBody>
+      </p:sp>
+      <p:sp>
+        <p:nvSpPr>
+          <p:cNvPr id="6" name="TextBox 5"/>
           <p:cNvSpPr txBox="1"/>
           <p:nvPr/>
         </p:nvSpPr>
         <p:spPr>
           <a:xfrm>
-            <a:off x="914400" y="3840480"/>
-            <a:ext cx="10362895" cy="365760"/>
+            <a:off x="0" y="4572000"/>
+            <a:ext cx="12191695" cy="365760"/>
           </a:xfrm>
           <a:prstGeom prst="rect">
             <a:avLst/>
@@ -7151,124 +7121,15 @@
           </a:bodyPr>
           <a:lstStyle/>
           <a:p>
-            <a:pPr algn="ctr">
-              <a:defRPr sz="1600" b="0">
-                <a:solidFill>
-                  <a:srgbClr val="93A3B8"/>
+            <a:pPr algn="ctr"/>
+            <a:r>
+              <a:rPr sz="1400" b="0">
+                <a:solidFill>
+                  <a:srgbClr val="AAAAAA"/>
                 </a:solidFill>
                 <a:latin typeface="Microsoft YaHei"/>
-              </a:defRPr>
-            </a:pPr>
-            <a:r>
-              <a:t>QUNXIANG · XINGHUO</a:t>
-            </a:r>
-          </a:p>
-        </p:txBody>
-      </p:sp>
-      <p:sp>
-        <p:nvSpPr>
-          <p:cNvPr id="6" name="TextBox 5"/>
-          <p:cNvSpPr txBox="1"/>
-          <p:nvPr/>
-        </p:nvSpPr>
-        <p:spPr>
-          <a:xfrm>
-            <a:off x="914400" y="4389120"/>
-            <a:ext cx="10362895" cy="457200"/>
-          </a:xfrm>
-          <a:prstGeom prst="rect">
-            <a:avLst/>
-          </a:prstGeom>
-          <a:noFill/>
-        </p:spPr>
-        <p:txBody>
-          <a:bodyPr wrap="square">
-            <a:spAutoFit/>
-          </a:bodyPr>
-          <a:lstStyle/>
-          <a:p>
-            <a:pPr algn="ctr">
-              <a:defRPr sz="2000" b="0">
-                <a:solidFill>
-                  <a:srgbClr val="3B82F6"/>
-                </a:solidFill>
-                <a:latin typeface="Microsoft YaHei"/>
-              </a:defRPr>
-            </a:pPr>
-            <a:r>
-              <a:t>http://81.70.59.228/</a:t>
-            </a:r>
-          </a:p>
-        </p:txBody>
-      </p:sp>
-      <p:sp>
-        <p:nvSpPr>
-          <p:cNvPr id="7" name="TextBox 6"/>
-          <p:cNvSpPr txBox="1"/>
-          <p:nvPr/>
-        </p:nvSpPr>
-        <p:spPr>
-          <a:xfrm>
-            <a:off x="914400" y="5029200"/>
-            <a:ext cx="10362895" cy="548640"/>
-          </a:xfrm>
-          <a:prstGeom prst="rect">
-            <a:avLst/>
-          </a:prstGeom>
-          <a:noFill/>
-        </p:spPr>
-        <p:txBody>
-          <a:bodyPr wrap="square">
-            <a:spAutoFit/>
-          </a:bodyPr>
-          <a:lstStyle/>
-          <a:p>
-            <a:pPr algn="ctr">
-              <a:defRPr sz="3200" b="1">
-                <a:solidFill>
-                  <a:srgbClr val="1E3A5F"/>
-                </a:solidFill>
-                <a:latin typeface="Microsoft YaHei"/>
-              </a:defRPr>
-            </a:pPr>
-            <a:r>
-              <a:t>谢谢观看</a:t>
-            </a:r>
-          </a:p>
-        </p:txBody>
-      </p:sp>
-      <p:sp>
-        <p:nvSpPr>
-          <p:cNvPr id="8" name="TextBox 7"/>
-          <p:cNvSpPr txBox="1"/>
-          <p:nvPr/>
-        </p:nvSpPr>
-        <p:spPr>
-          <a:xfrm>
-            <a:off x="914400" y="5669280"/>
-            <a:ext cx="10362895" cy="457200"/>
-          </a:xfrm>
-          <a:prstGeom prst="rect">
-            <a:avLst/>
-          </a:prstGeom>
-          <a:noFill/>
-        </p:spPr>
-        <p:txBody>
-          <a:bodyPr wrap="square">
-            <a:spAutoFit/>
-          </a:bodyPr>
-          <a:lstStyle/>
-          <a:p>
-            <a:pPr algn="ctr">
-              <a:defRPr sz="1400" b="0">
-                <a:solidFill>
-                  <a:srgbClr val="93A3B8"/>
-                </a:solidFill>
-                <a:latin typeface="Microsoft YaHei"/>
-              </a:defRPr>
-            </a:pPr>
-            <a:r>
-              <a:t>让真实发光，让思想变现</a:t>
+              </a:rPr>
+              <a:t>希望在故事里，遇见你。</a:t>
             </a:r>
           </a:p>
         </p:txBody>
